--- a/docs/Presentation/W03_ PRESENTATION.pptx
+++ b/docs/Presentation/W03_ PRESENTATION.pptx
@@ -6,13 +6,13 @@
   </p:sldMasterIdLst>
   <p:sldIdLst>
     <p:sldId id="256" r:id="rId2"/>
-    <p:sldId id="268" r:id="rId3"/>
-    <p:sldId id="257" r:id="rId4"/>
-    <p:sldId id="264" r:id="rId5"/>
-    <p:sldId id="265" r:id="rId6"/>
-    <p:sldId id="266" r:id="rId7"/>
-    <p:sldId id="267" r:id="rId8"/>
-    <p:sldId id="262" r:id="rId9"/>
+    <p:sldId id="257" r:id="rId3"/>
+    <p:sldId id="264" r:id="rId4"/>
+    <p:sldId id="265" r:id="rId5"/>
+    <p:sldId id="266" r:id="rId6"/>
+    <p:sldId id="267" r:id="rId7"/>
+    <p:sldId id="262" r:id="rId8"/>
+    <p:sldId id="268" r:id="rId9"/>
     <p:sldId id="263" r:id="rId10"/>
   </p:sldIdLst>
   <p:sldSz cx="12192000" cy="6858000"/>
@@ -112,6 +112,11 @@
       </a:defRPr>
     </a:lvl9pPr>
   </p:defaultTextStyle>
+  <p:extLst>
+    <p:ext uri="{EFAFB233-063F-42B5-8137-9DF3F51BA10A}">
+      <p15:sldGuideLst xmlns:p15="http://schemas.microsoft.com/office/powerpoint/2012/main"/>
+    </p:ext>
+  </p:extLst>
 </p:presentation>
 </file>
 
@@ -1048,7 +1053,7 @@
         </a:p>
       </dgm:t>
     </dgm:pt>
-    <dgm:pt modelId="{C9CD50CA-ABF1-481D-B322-A3455A0F8DB0}">
+    <dgm:pt modelId="{365D7F74-FFE5-482B-9D98-39CA7CA0513A}">
       <dgm:prSet/>
       <dgm:spPr/>
       <dgm:t>
@@ -1069,55 +1074,7 @@
               <a:ea typeface="+mn-ea"/>
               <a:cs typeface="+mn-cs"/>
             </a:rPr>
-            <a:t>docs/ARCHITECTURE.md (1–2 pages; simple diagram + explanation)</a:t>
-          </a:r>
-        </a:p>
-      </dgm:t>
-    </dgm:pt>
-    <dgm:pt modelId="{3D784CF8-FD48-47DF-AFDD-7BB541FFEC4F}" type="parTrans" cxnId="{95BBC5A9-B08B-4651-94DB-0FAC4726E8BA}">
-      <dgm:prSet/>
-      <dgm:spPr/>
-      <dgm:t>
-        <a:bodyPr/>
-        <a:lstStyle/>
-        <a:p>
-          <a:endParaRPr lang="en-US"/>
-        </a:p>
-      </dgm:t>
-    </dgm:pt>
-    <dgm:pt modelId="{A9B35914-7BDC-4E1A-AE1E-827EDE30E8C2}" type="sibTrans" cxnId="{95BBC5A9-B08B-4651-94DB-0FAC4726E8BA}">
-      <dgm:prSet/>
-      <dgm:spPr/>
-      <dgm:t>
-        <a:bodyPr/>
-        <a:lstStyle/>
-        <a:p>
-          <a:endParaRPr lang="en-US"/>
-        </a:p>
-      </dgm:t>
-    </dgm:pt>
-    <dgm:pt modelId="{365D7F74-FFE5-482B-9D98-39CA7CA0513A}">
-      <dgm:prSet/>
-      <dgm:spPr/>
-      <dgm:t>
-        <a:bodyPr/>
-        <a:lstStyle/>
-        <a:p>
-          <a:pPr algn="l">
-            <a:lnSpc>
-              <a:spcPct val="90000"/>
-            </a:lnSpc>
-          </a:pPr>
-          <a:r>
-            <a:rPr lang="en-US" sz="2300">
-              <a:solidFill>
-                <a:srgbClr val="FFFFFF"/>
-              </a:solidFill>
-              <a:latin typeface="Aptos" panose="02110004020202020204"/>
-              <a:ea typeface="+mn-ea"/>
-              <a:cs typeface="+mn-cs"/>
-            </a:rPr>
-            <a:t>docs/sprints/W01/plan.md</a:t>
+            <a:t>docs/sprints/W03/plan.md</a:t>
           </a:r>
         </a:p>
       </dgm:t>
@@ -1157,7 +1114,7 @@
             </a:lnSpc>
           </a:pPr>
           <a:r>
-            <a:rPr lang="en-US" sz="2300" b="1">
+            <a:rPr lang="en-US" sz="2300" b="1" dirty="0">
               <a:solidFill>
                 <a:srgbClr val="FFFFFF"/>
               </a:solidFill>
@@ -1168,7 +1125,7 @@
             <a:t> </a:t>
           </a:r>
           <a:r>
-            <a:rPr lang="en-US" sz="2300">
+            <a:rPr lang="en-US" sz="2300" dirty="0">
               <a:solidFill>
                 <a:srgbClr val="FFFFFF"/>
               </a:solidFill>
@@ -1216,7 +1173,7 @@
             </a:lnSpc>
           </a:pPr>
           <a:r>
-            <a:rPr lang="en-US" sz="2300">
+            <a:rPr lang="en-US" sz="2300" dirty="0">
               <a:solidFill>
                 <a:srgbClr val="FFFFFF"/>
               </a:solidFill>
@@ -1224,7 +1181,29 @@
               <a:ea typeface="+mn-ea"/>
               <a:cs typeface="+mn-cs"/>
             </a:rPr>
-            <a:t>sdk/tests/test_import.py </a:t>
+            <a:t>3d Drone </a:t>
+          </a:r>
+          <a:r>
+            <a:rPr lang="en-US" sz="2300" dirty="0" err="1">
+              <a:solidFill>
+                <a:srgbClr val="FFFFFF"/>
+              </a:solidFill>
+              <a:latin typeface="Aptos" panose="02110004020202020204"/>
+              <a:ea typeface="+mn-ea"/>
+              <a:cs typeface="+mn-cs"/>
+            </a:rPr>
+            <a:t>Drone</a:t>
+          </a:r>
+          <a:r>
+            <a:rPr lang="en-US" sz="2300" dirty="0">
+              <a:solidFill>
+                <a:srgbClr val="FFFFFF"/>
+              </a:solidFill>
+              <a:latin typeface="Aptos" panose="02110004020202020204"/>
+              <a:ea typeface="+mn-ea"/>
+              <a:cs typeface="+mn-cs"/>
+            </a:rPr>
+            <a:t> Model inside Project</a:t>
           </a:r>
         </a:p>
       </dgm:t>
@@ -1264,7 +1243,7 @@
             </a:lnSpc>
           </a:pPr>
           <a:r>
-            <a:rPr lang="en-US" sz="2300">
+            <a:rPr lang="en-US" sz="2300" dirty="0">
               <a:solidFill>
                 <a:srgbClr val="FFFFFF"/>
               </a:solidFill>
@@ -1274,7 +1253,7 @@
             </a:rPr>
             <a:t>docs/PROTOCOL.md (updated to match implemented messages)</a:t>
           </a:r>
-          <a:endParaRPr lang="en-US" sz="2300">
+          <a:endParaRPr lang="en-US" sz="2300" dirty="0">
             <a:solidFill>
               <a:srgbClr val="FFFFFF"/>
             </a:solidFill>
@@ -1307,102 +1286,6 @@
         </a:p>
       </dgm:t>
     </dgm:pt>
-    <dgm:pt modelId="{67DBE63C-8A1B-48D5-8856-8FB279741AD4}">
-      <dgm:prSet phldr="0"/>
-      <dgm:spPr/>
-      <dgm:t>
-        <a:bodyPr/>
-        <a:lstStyle/>
-        <a:p>
-          <a:pPr algn="l" rtl="0">
-            <a:lnSpc>
-              <a:spcPct val="90000"/>
-            </a:lnSpc>
-          </a:pPr>
-          <a:r>
-            <a:rPr lang="en-US" sz="2300">
-              <a:solidFill>
-                <a:srgbClr val="FFFFFF"/>
-              </a:solidFill>
-              <a:latin typeface="Calibri"/>
-              <a:ea typeface="Calibri"/>
-              <a:cs typeface="Calibri"/>
-            </a:rPr>
-            <a:t>Docs/sprints/W02/plan.md</a:t>
-          </a:r>
-        </a:p>
-      </dgm:t>
-    </dgm:pt>
-    <dgm:pt modelId="{BA37D9E4-0DBE-4BC2-A1A4-6D791B19AE09}" type="parTrans" cxnId="{15D766B9-6C99-4BDA-BCA3-959E3E99AED2}">
-      <dgm:prSet/>
-      <dgm:spPr/>
-      <dgm:t>
-        <a:bodyPr/>
-        <a:lstStyle/>
-        <a:p>
-          <a:endParaRPr lang="en-US"/>
-        </a:p>
-      </dgm:t>
-    </dgm:pt>
-    <dgm:pt modelId="{DBF9B8DA-D5A1-4656-861D-FE8C4CE654DE}" type="sibTrans" cxnId="{15D766B9-6C99-4BDA-BCA3-959E3E99AED2}">
-      <dgm:prSet/>
-      <dgm:spPr/>
-      <dgm:t>
-        <a:bodyPr/>
-        <a:lstStyle/>
-        <a:p>
-          <a:endParaRPr lang="en-US"/>
-        </a:p>
-      </dgm:t>
-    </dgm:pt>
-    <dgm:pt modelId="{324AB503-E648-4895-9720-93A3A405CE26}">
-      <dgm:prSet phldr="0"/>
-      <dgm:spPr/>
-      <dgm:t>
-        <a:bodyPr/>
-        <a:lstStyle/>
-        <a:p>
-          <a:pPr algn="l" rtl="0">
-            <a:lnSpc>
-              <a:spcPct val="90000"/>
-            </a:lnSpc>
-          </a:pPr>
-          <a:r>
-            <a:rPr lang="en-US" sz="2300">
-              <a:solidFill>
-                <a:srgbClr val="FFFFFF"/>
-              </a:solidFill>
-              <a:latin typeface="Calibri"/>
-              <a:ea typeface="Calibri"/>
-              <a:cs typeface="Calibri"/>
-            </a:rPr>
-            <a:t>docs/presentations/W02.pdf (or W02.pptx)</a:t>
-          </a:r>
-        </a:p>
-      </dgm:t>
-    </dgm:pt>
-    <dgm:pt modelId="{501692F3-CBD3-41B4-B57F-E3EE8AD7A562}" type="parTrans" cxnId="{14A65C43-27B4-4605-813F-C8A5AB30F638}">
-      <dgm:prSet/>
-      <dgm:spPr/>
-      <dgm:t>
-        <a:bodyPr/>
-        <a:lstStyle/>
-        <a:p>
-          <a:endParaRPr lang="en-US"/>
-        </a:p>
-      </dgm:t>
-    </dgm:pt>
-    <dgm:pt modelId="{EA094387-D42A-4167-B317-3CFE4270E1FA}" type="sibTrans" cxnId="{14A65C43-27B4-4605-813F-C8A5AB30F638}">
-      <dgm:prSet/>
-      <dgm:spPr/>
-      <dgm:t>
-        <a:bodyPr/>
-        <a:lstStyle/>
-        <a:p>
-          <a:endParaRPr lang="en-US"/>
-        </a:p>
-      </dgm:t>
-    </dgm:pt>
     <dgm:pt modelId="{072A07C3-6AAB-445D-80A7-249A004FADB9}" type="pres">
       <dgm:prSet presAssocID="{08C5620D-152A-4AB9-9F1D-AACA858352D5}" presName="linear" presStyleCnt="0">
         <dgm:presLayoutVars>
@@ -1412,21 +1295,8 @@
       </dgm:prSet>
       <dgm:spPr/>
     </dgm:pt>
-    <dgm:pt modelId="{8E8C7FFC-61BC-4EC8-B585-066A62D1097E}" type="pres">
-      <dgm:prSet presAssocID="{C9CD50CA-ABF1-481D-B322-A3455A0F8DB0}" presName="parentText" presStyleLbl="node1" presStyleIdx="0" presStyleCnt="7">
-        <dgm:presLayoutVars>
-          <dgm:chMax val="0"/>
-          <dgm:bulletEnabled val="1"/>
-        </dgm:presLayoutVars>
-      </dgm:prSet>
-      <dgm:spPr/>
-    </dgm:pt>
-    <dgm:pt modelId="{6DE6404F-40CC-4E3E-89C0-51CA3752A2B9}" type="pres">
-      <dgm:prSet presAssocID="{A9B35914-7BDC-4E1A-AE1E-827EDE30E8C2}" presName="spacer" presStyleCnt="0"/>
-      <dgm:spPr/>
-    </dgm:pt>
     <dgm:pt modelId="{8694ED8D-E215-4D76-857D-83338FC1B4B1}" type="pres">
-      <dgm:prSet presAssocID="{365D7F74-FFE5-482B-9D98-39CA7CA0513A}" presName="parentText" presStyleLbl="node1" presStyleIdx="1" presStyleCnt="7">
+      <dgm:prSet presAssocID="{365D7F74-FFE5-482B-9D98-39CA7CA0513A}" presName="parentText" presStyleLbl="node1" presStyleIdx="0" presStyleCnt="4">
         <dgm:presLayoutVars>
           <dgm:chMax val="0"/>
           <dgm:bulletEnabled val="1"/>
@@ -1439,7 +1309,7 @@
       <dgm:spPr/>
     </dgm:pt>
     <dgm:pt modelId="{6D8FE49D-26DA-4425-8C7E-DCE94839AD71}" type="pres">
-      <dgm:prSet presAssocID="{EBC24022-F74C-44D4-B421-78DBA0FDC453}" presName="parentText" presStyleLbl="node1" presStyleIdx="2" presStyleCnt="7">
+      <dgm:prSet presAssocID="{EBC24022-F74C-44D4-B421-78DBA0FDC453}" presName="parentText" presStyleLbl="node1" presStyleIdx="1" presStyleCnt="4">
         <dgm:presLayoutVars>
           <dgm:chMax val="0"/>
           <dgm:bulletEnabled val="1"/>
@@ -1452,7 +1322,7 @@
       <dgm:spPr/>
     </dgm:pt>
     <dgm:pt modelId="{09E87734-5520-49F9-A61A-7BFE46AABF34}" type="pres">
-      <dgm:prSet presAssocID="{EDCA3F4A-F7A1-4D91-BF3B-FA626C83CB10}" presName="parentText" presStyleLbl="node1" presStyleIdx="3" presStyleCnt="7">
+      <dgm:prSet presAssocID="{EDCA3F4A-F7A1-4D91-BF3B-FA626C83CB10}" presName="parentText" presStyleLbl="node1" presStyleIdx="2" presStyleCnt="4">
         <dgm:presLayoutVars>
           <dgm:chMax val="0"/>
           <dgm:bulletEnabled val="1"/>
@@ -1465,33 +1335,7 @@
       <dgm:spPr/>
     </dgm:pt>
     <dgm:pt modelId="{8668C22C-39F1-4F13-A3C8-96243DD7C753}" type="pres">
-      <dgm:prSet presAssocID="{F4127BAC-F723-4BA7-9F31-71AEC6B631B0}" presName="parentText" presStyleLbl="node1" presStyleIdx="4" presStyleCnt="7">
-        <dgm:presLayoutVars>
-          <dgm:chMax val="0"/>
-          <dgm:bulletEnabled val="1"/>
-        </dgm:presLayoutVars>
-      </dgm:prSet>
-      <dgm:spPr/>
-    </dgm:pt>
-    <dgm:pt modelId="{0F367B6F-ABE3-43B9-9E29-94C979B603F8}" type="pres">
-      <dgm:prSet presAssocID="{558E3C29-084D-4F27-83BF-79C3E09C0562}" presName="spacer" presStyleCnt="0"/>
-      <dgm:spPr/>
-    </dgm:pt>
-    <dgm:pt modelId="{A3559C65-4E5D-4CA8-85BC-C432C3837387}" type="pres">
-      <dgm:prSet presAssocID="{67DBE63C-8A1B-48D5-8856-8FB279741AD4}" presName="parentText" presStyleLbl="node1" presStyleIdx="5" presStyleCnt="7">
-        <dgm:presLayoutVars>
-          <dgm:chMax val="0"/>
-          <dgm:bulletEnabled val="1"/>
-        </dgm:presLayoutVars>
-      </dgm:prSet>
-      <dgm:spPr/>
-    </dgm:pt>
-    <dgm:pt modelId="{9CFA046C-DF58-4C04-AF2F-BEE95C972E3A}" type="pres">
-      <dgm:prSet presAssocID="{DBF9B8DA-D5A1-4656-861D-FE8C4CE654DE}" presName="spacer" presStyleCnt="0"/>
-      <dgm:spPr/>
-    </dgm:pt>
-    <dgm:pt modelId="{7F0D6C25-7930-47AB-8FBA-CE4FDF55D586}" type="pres">
-      <dgm:prSet presAssocID="{324AB503-E648-4895-9720-93A3A405CE26}" presName="parentText" presStyleLbl="node1" presStyleIdx="6" presStyleCnt="7">
+      <dgm:prSet presAssocID="{F4127BAC-F723-4BA7-9F31-71AEC6B631B0}" presName="parentText" presStyleLbl="node1" presStyleIdx="3" presStyleCnt="4">
         <dgm:presLayoutVars>
           <dgm:chMax val="0"/>
           <dgm:bulletEnabled val="1"/>
@@ -1502,39 +1346,27 @@
   </dgm:ptLst>
   <dgm:cxnLst>
     <dgm:cxn modelId="{22274311-C138-44AB-B457-6F9EB8D5C2D4}" type="presOf" srcId="{EBC24022-F74C-44D4-B421-78DBA0FDC453}" destId="{6D8FE49D-26DA-4425-8C7E-DCE94839AD71}" srcOrd="0" destOrd="0" presId="urn:microsoft.com/office/officeart/2005/8/layout/vList2"/>
-    <dgm:cxn modelId="{92A3561A-8B9C-437C-9AF1-F5B3A0699233}" type="presOf" srcId="{C9CD50CA-ABF1-481D-B322-A3455A0F8DB0}" destId="{8E8C7FFC-61BC-4EC8-B585-066A62D1097E}" srcOrd="0" destOrd="0" presId="urn:microsoft.com/office/officeart/2005/8/layout/vList2"/>
-    <dgm:cxn modelId="{18AB071C-64FA-45F1-B389-C0C680F20A45}" srcId="{08C5620D-152A-4AB9-9F1D-AACA858352D5}" destId="{F4127BAC-F723-4BA7-9F31-71AEC6B631B0}" srcOrd="4" destOrd="0" parTransId="{2755F71C-25C3-42FA-864F-0C3C8AFBE3C4}" sibTransId="{558E3C29-084D-4F27-83BF-79C3E09C0562}"/>
-    <dgm:cxn modelId="{43C3301C-6277-4228-9AF5-835ADEB7A39C}" srcId="{08C5620D-152A-4AB9-9F1D-AACA858352D5}" destId="{365D7F74-FFE5-482B-9D98-39CA7CA0513A}" srcOrd="1" destOrd="0" parTransId="{D17DA32A-B04F-4970-8E9F-C0DF6828DE5B}" sibTransId="{21339A53-A261-43CF-94D6-54DE839026A4}"/>
-    <dgm:cxn modelId="{1EA71A30-8CEE-4080-870A-60B941815164}" srcId="{08C5620D-152A-4AB9-9F1D-AACA858352D5}" destId="{EBC24022-F74C-44D4-B421-78DBA0FDC453}" srcOrd="2" destOrd="0" parTransId="{2DC771CA-2899-4F94-89F6-EED97E2DB446}" sibTransId="{649E8D30-3117-4174-9932-2B174D813E15}"/>
-    <dgm:cxn modelId="{14A65C43-27B4-4605-813F-C8A5AB30F638}" srcId="{08C5620D-152A-4AB9-9F1D-AACA858352D5}" destId="{324AB503-E648-4895-9720-93A3A405CE26}" srcOrd="6" destOrd="0" parTransId="{501692F3-CBD3-41B4-B57F-E3EE8AD7A562}" sibTransId="{EA094387-D42A-4167-B317-3CFE4270E1FA}"/>
-    <dgm:cxn modelId="{A6974950-37A3-4F4C-BC52-2A18802092DD}" type="presOf" srcId="{324AB503-E648-4895-9720-93A3A405CE26}" destId="{7F0D6C25-7930-47AB-8FBA-CE4FDF55D586}" srcOrd="0" destOrd="0" presId="urn:microsoft.com/office/officeart/2005/8/layout/vList2"/>
+    <dgm:cxn modelId="{18AB071C-64FA-45F1-B389-C0C680F20A45}" srcId="{08C5620D-152A-4AB9-9F1D-AACA858352D5}" destId="{F4127BAC-F723-4BA7-9F31-71AEC6B631B0}" srcOrd="3" destOrd="0" parTransId="{2755F71C-25C3-42FA-864F-0C3C8AFBE3C4}" sibTransId="{558E3C29-084D-4F27-83BF-79C3E09C0562}"/>
+    <dgm:cxn modelId="{43C3301C-6277-4228-9AF5-835ADEB7A39C}" srcId="{08C5620D-152A-4AB9-9F1D-AACA858352D5}" destId="{365D7F74-FFE5-482B-9D98-39CA7CA0513A}" srcOrd="0" destOrd="0" parTransId="{D17DA32A-B04F-4970-8E9F-C0DF6828DE5B}" sibTransId="{21339A53-A261-43CF-94D6-54DE839026A4}"/>
+    <dgm:cxn modelId="{1EA71A30-8CEE-4080-870A-60B941815164}" srcId="{08C5620D-152A-4AB9-9F1D-AACA858352D5}" destId="{EBC24022-F74C-44D4-B421-78DBA0FDC453}" srcOrd="1" destOrd="0" parTransId="{2DC771CA-2899-4F94-89F6-EED97E2DB446}" sibTransId="{649E8D30-3117-4174-9932-2B174D813E15}"/>
     <dgm:cxn modelId="{A639098A-624F-4F4A-A760-59486A9A725E}" type="presOf" srcId="{365D7F74-FFE5-482B-9D98-39CA7CA0513A}" destId="{8694ED8D-E215-4D76-857D-83338FC1B4B1}" srcOrd="0" destOrd="0" presId="urn:microsoft.com/office/officeart/2005/8/layout/vList2"/>
-    <dgm:cxn modelId="{7191409F-7EDE-45BD-A6B4-8BA1BDABB0E3}" srcId="{08C5620D-152A-4AB9-9F1D-AACA858352D5}" destId="{EDCA3F4A-F7A1-4D91-BF3B-FA626C83CB10}" srcOrd="3" destOrd="0" parTransId="{E9693187-5B17-43E3-BA6E-69E9E9BEF533}" sibTransId="{7961C441-2E7D-4507-84CE-4BCD89F89971}"/>
-    <dgm:cxn modelId="{790EDAA6-11B9-4594-BB3F-44DC1503C83B}" type="presOf" srcId="{67DBE63C-8A1B-48D5-8856-8FB279741AD4}" destId="{A3559C65-4E5D-4CA8-85BC-C432C3837387}" srcOrd="0" destOrd="0" presId="urn:microsoft.com/office/officeart/2005/8/layout/vList2"/>
-    <dgm:cxn modelId="{95BBC5A9-B08B-4651-94DB-0FAC4726E8BA}" srcId="{08C5620D-152A-4AB9-9F1D-AACA858352D5}" destId="{C9CD50CA-ABF1-481D-B322-A3455A0F8DB0}" srcOrd="0" destOrd="0" parTransId="{3D784CF8-FD48-47DF-AFDD-7BB541FFEC4F}" sibTransId="{A9B35914-7BDC-4E1A-AE1E-827EDE30E8C2}"/>
+    <dgm:cxn modelId="{7191409F-7EDE-45BD-A6B4-8BA1BDABB0E3}" srcId="{08C5620D-152A-4AB9-9F1D-AACA858352D5}" destId="{EDCA3F4A-F7A1-4D91-BF3B-FA626C83CB10}" srcOrd="2" destOrd="0" parTransId="{E9693187-5B17-43E3-BA6E-69E9E9BEF533}" sibTransId="{7961C441-2E7D-4507-84CE-4BCD89F89971}"/>
     <dgm:cxn modelId="{397ECAB7-B016-4663-B04D-F0803B2B1935}" type="presOf" srcId="{08C5620D-152A-4AB9-9F1D-AACA858352D5}" destId="{072A07C3-6AAB-445D-80A7-249A004FADB9}" srcOrd="0" destOrd="0" presId="urn:microsoft.com/office/officeart/2005/8/layout/vList2"/>
-    <dgm:cxn modelId="{15D766B9-6C99-4BDA-BCA3-959E3E99AED2}" srcId="{08C5620D-152A-4AB9-9F1D-AACA858352D5}" destId="{67DBE63C-8A1B-48D5-8856-8FB279741AD4}" srcOrd="5" destOrd="0" parTransId="{BA37D9E4-0DBE-4BC2-A1A4-6D791B19AE09}" sibTransId="{DBF9B8DA-D5A1-4656-861D-FE8C4CE654DE}"/>
     <dgm:cxn modelId="{5FDCBEBE-0F92-47F6-9645-C56D7B959E67}" type="presOf" srcId="{F4127BAC-F723-4BA7-9F31-71AEC6B631B0}" destId="{8668C22C-39F1-4F13-A3C8-96243DD7C753}" srcOrd="0" destOrd="0" presId="urn:microsoft.com/office/officeart/2005/8/layout/vList2"/>
     <dgm:cxn modelId="{7D1DBCEA-D836-4A8E-9475-061860F61421}" type="presOf" srcId="{EDCA3F4A-F7A1-4D91-BF3B-FA626C83CB10}" destId="{09E87734-5520-49F9-A61A-7BFE46AABF34}" srcOrd="0" destOrd="0" presId="urn:microsoft.com/office/officeart/2005/8/layout/vList2"/>
-    <dgm:cxn modelId="{752CB8FC-AE99-4FDB-A3CD-3AE3D18A3900}" type="presParOf" srcId="{072A07C3-6AAB-445D-80A7-249A004FADB9}" destId="{8E8C7FFC-61BC-4EC8-B585-066A62D1097E}" srcOrd="0" destOrd="0" presId="urn:microsoft.com/office/officeart/2005/8/layout/vList2"/>
-    <dgm:cxn modelId="{568FCD3C-51D9-49D0-9688-8FD0A5171327}" type="presParOf" srcId="{072A07C3-6AAB-445D-80A7-249A004FADB9}" destId="{6DE6404F-40CC-4E3E-89C0-51CA3752A2B9}" srcOrd="1" destOrd="0" presId="urn:microsoft.com/office/officeart/2005/8/layout/vList2"/>
-    <dgm:cxn modelId="{68659AF1-62BB-488A-8C0D-9958A8C76943}" type="presParOf" srcId="{072A07C3-6AAB-445D-80A7-249A004FADB9}" destId="{8694ED8D-E215-4D76-857D-83338FC1B4B1}" srcOrd="2" destOrd="0" presId="urn:microsoft.com/office/officeart/2005/8/layout/vList2"/>
-    <dgm:cxn modelId="{3A81852A-F371-43F4-831D-275D1B78AFD1}" type="presParOf" srcId="{072A07C3-6AAB-445D-80A7-249A004FADB9}" destId="{EA64E464-7D77-455D-ACFC-01A130F78390}" srcOrd="3" destOrd="0" presId="urn:microsoft.com/office/officeart/2005/8/layout/vList2"/>
-    <dgm:cxn modelId="{0DDC444E-995D-4085-99AA-06C2BBC5C1EE}" type="presParOf" srcId="{072A07C3-6AAB-445D-80A7-249A004FADB9}" destId="{6D8FE49D-26DA-4425-8C7E-DCE94839AD71}" srcOrd="4" destOrd="0" presId="urn:microsoft.com/office/officeart/2005/8/layout/vList2"/>
-    <dgm:cxn modelId="{8C67D8E3-129C-4D72-94C9-70033AD1067C}" type="presParOf" srcId="{072A07C3-6AAB-445D-80A7-249A004FADB9}" destId="{6AB7D1FF-0E3B-4C3F-BD9E-BCB7095F48F1}" srcOrd="5" destOrd="0" presId="urn:microsoft.com/office/officeart/2005/8/layout/vList2"/>
-    <dgm:cxn modelId="{FF574833-8003-466B-9A1B-C2633A7E40F5}" type="presParOf" srcId="{072A07C3-6AAB-445D-80A7-249A004FADB9}" destId="{09E87734-5520-49F9-A61A-7BFE46AABF34}" srcOrd="6" destOrd="0" presId="urn:microsoft.com/office/officeart/2005/8/layout/vList2"/>
-    <dgm:cxn modelId="{5E9B9D1B-8F89-482D-BBF4-6005D6416C85}" type="presParOf" srcId="{072A07C3-6AAB-445D-80A7-249A004FADB9}" destId="{BE705CF8-4BBE-4F21-8F4A-F7B329CA02E3}" srcOrd="7" destOrd="0" presId="urn:microsoft.com/office/officeart/2005/8/layout/vList2"/>
-    <dgm:cxn modelId="{DAB782EE-45E3-4719-86AA-1F45A9F159B3}" type="presParOf" srcId="{072A07C3-6AAB-445D-80A7-249A004FADB9}" destId="{8668C22C-39F1-4F13-A3C8-96243DD7C753}" srcOrd="8" destOrd="0" presId="urn:microsoft.com/office/officeart/2005/8/layout/vList2"/>
-    <dgm:cxn modelId="{8B49DB83-A4F2-46DA-83BE-C66FF46AC945}" type="presParOf" srcId="{072A07C3-6AAB-445D-80A7-249A004FADB9}" destId="{0F367B6F-ABE3-43B9-9E29-94C979B603F8}" srcOrd="9" destOrd="0" presId="urn:microsoft.com/office/officeart/2005/8/layout/vList2"/>
-    <dgm:cxn modelId="{E2FCF776-4C9D-4FA1-B7CF-C538565DCA91}" type="presParOf" srcId="{072A07C3-6AAB-445D-80A7-249A004FADB9}" destId="{A3559C65-4E5D-4CA8-85BC-C432C3837387}" srcOrd="10" destOrd="0" presId="urn:microsoft.com/office/officeart/2005/8/layout/vList2"/>
-    <dgm:cxn modelId="{7E6C92DF-CC68-4F32-BC6F-A7F4618B0BCA}" type="presParOf" srcId="{072A07C3-6AAB-445D-80A7-249A004FADB9}" destId="{9CFA046C-DF58-4C04-AF2F-BEE95C972E3A}" srcOrd="11" destOrd="0" presId="urn:microsoft.com/office/officeart/2005/8/layout/vList2"/>
-    <dgm:cxn modelId="{D10C6B6B-547D-412A-B2F2-2AE8E4937084}" type="presParOf" srcId="{072A07C3-6AAB-445D-80A7-249A004FADB9}" destId="{7F0D6C25-7930-47AB-8FBA-CE4FDF55D586}" srcOrd="12" destOrd="0" presId="urn:microsoft.com/office/officeart/2005/8/layout/vList2"/>
+    <dgm:cxn modelId="{68659AF1-62BB-488A-8C0D-9958A8C76943}" type="presParOf" srcId="{072A07C3-6AAB-445D-80A7-249A004FADB9}" destId="{8694ED8D-E215-4D76-857D-83338FC1B4B1}" srcOrd="0" destOrd="0" presId="urn:microsoft.com/office/officeart/2005/8/layout/vList2"/>
+    <dgm:cxn modelId="{3A81852A-F371-43F4-831D-275D1B78AFD1}" type="presParOf" srcId="{072A07C3-6AAB-445D-80A7-249A004FADB9}" destId="{EA64E464-7D77-455D-ACFC-01A130F78390}" srcOrd="1" destOrd="0" presId="urn:microsoft.com/office/officeart/2005/8/layout/vList2"/>
+    <dgm:cxn modelId="{0DDC444E-995D-4085-99AA-06C2BBC5C1EE}" type="presParOf" srcId="{072A07C3-6AAB-445D-80A7-249A004FADB9}" destId="{6D8FE49D-26DA-4425-8C7E-DCE94839AD71}" srcOrd="2" destOrd="0" presId="urn:microsoft.com/office/officeart/2005/8/layout/vList2"/>
+    <dgm:cxn modelId="{8C67D8E3-129C-4D72-94C9-70033AD1067C}" type="presParOf" srcId="{072A07C3-6AAB-445D-80A7-249A004FADB9}" destId="{6AB7D1FF-0E3B-4C3F-BD9E-BCB7095F48F1}" srcOrd="3" destOrd="0" presId="urn:microsoft.com/office/officeart/2005/8/layout/vList2"/>
+    <dgm:cxn modelId="{FF574833-8003-466B-9A1B-C2633A7E40F5}" type="presParOf" srcId="{072A07C3-6AAB-445D-80A7-249A004FADB9}" destId="{09E87734-5520-49F9-A61A-7BFE46AABF34}" srcOrd="4" destOrd="0" presId="urn:microsoft.com/office/officeart/2005/8/layout/vList2"/>
+    <dgm:cxn modelId="{5E9B9D1B-8F89-482D-BBF4-6005D6416C85}" type="presParOf" srcId="{072A07C3-6AAB-445D-80A7-249A004FADB9}" destId="{BE705CF8-4BBE-4F21-8F4A-F7B329CA02E3}" srcOrd="5" destOrd="0" presId="urn:microsoft.com/office/officeart/2005/8/layout/vList2"/>
+    <dgm:cxn modelId="{DAB782EE-45E3-4719-86AA-1F45A9F159B3}" type="presParOf" srcId="{072A07C3-6AAB-445D-80A7-249A004FADB9}" destId="{8668C22C-39F1-4F13-A3C8-96243DD7C753}" srcOrd="6" destOrd="0" presId="urn:microsoft.com/office/officeart/2005/8/layout/vList2"/>
   </dgm:cxnLst>
   <dgm:bg/>
   <dgm:whole/>
   <dgm:extLst>
     <a:ext uri="http://schemas.microsoft.com/office/drawing/2008/diagram">
-      <dsp:dataModelExt xmlns:dsp="http://schemas.microsoft.com/office/drawing/2008/diagram" relId="rId7" minVer="http://schemas.openxmlformats.org/drawingml/2006/diagram"/>
+      <dsp:dataModelExt xmlns:dsp="http://schemas.microsoft.com/office/drawing/2008/diagram" relId="rId6" minVer="http://schemas.openxmlformats.org/drawingml/2006/diagram"/>
     </a:ext>
   </dgm:extLst>
 </dgm:dataModel>
@@ -1548,15 +1380,15 @@
       <dsp:cNvGrpSpPr/>
     </dsp:nvGrpSpPr>
     <dsp:grpSpPr/>
-    <dsp:sp modelId="{8E8C7FFC-61BC-4EC8-B585-066A62D1097E}">
+    <dsp:sp modelId="{8694ED8D-E215-4D76-857D-83338FC1B4B1}">
       <dsp:nvSpPr>
         <dsp:cNvPr id="0" name=""/>
         <dsp:cNvSpPr/>
       </dsp:nvSpPr>
       <dsp:spPr>
         <a:xfrm>
-          <a:off x="0" y="93698"/>
-          <a:ext cx="10504557" cy="540540"/>
+          <a:off x="0" y="571869"/>
+          <a:ext cx="10504557" cy="737099"/>
         </a:xfrm>
         <a:prstGeom prst="roundRect">
           <a:avLst/>
@@ -1625,12 +1457,12 @@
         </a:fontRef>
       </dsp:style>
       <dsp:txBody>
-        <a:bodyPr spcFirstLastPara="0" vert="horz" wrap="square" lIns="83820" tIns="83820" rIns="83820" bIns="83820" numCol="1" spcCol="1270" anchor="ctr" anchorCtr="0">
+        <a:bodyPr spcFirstLastPara="0" vert="horz" wrap="square" lIns="114300" tIns="114300" rIns="114300" bIns="114300" numCol="1" spcCol="1270" anchor="ctr" anchorCtr="0">
           <a:noAutofit/>
         </a:bodyPr>
         <a:lstStyle/>
         <a:p>
-          <a:pPr marL="0" lvl="0" indent="0" algn="l" defTabSz="977900">
+          <a:pPr marL="0" lvl="0" indent="0" algn="l" defTabSz="1333500">
             <a:lnSpc>
               <a:spcPct val="90000"/>
             </a:lnSpc>
@@ -1643,7 +1475,7 @@
             <a:buNone/>
           </a:pPr>
           <a:r>
-            <a:rPr lang="en-US" sz="2200" kern="1200" dirty="0">
+            <a:rPr lang="en-US" sz="3000" kern="1200" dirty="0">
               <a:solidFill>
                 <a:srgbClr val="FFFFFF"/>
               </a:solidFill>
@@ -1651,24 +1483,24 @@
               <a:ea typeface="+mn-ea"/>
               <a:cs typeface="+mn-cs"/>
             </a:rPr>
-            <a:t>docs/ARCHITECTURE.md (1–2 pages; simple diagram + explanation)</a:t>
+            <a:t>docs/sprints/W03/plan.md</a:t>
           </a:r>
         </a:p>
       </dsp:txBody>
       <dsp:txXfrm>
-        <a:off x="26387" y="120085"/>
-        <a:ext cx="10451783" cy="487766"/>
+        <a:off x="35982" y="607851"/>
+        <a:ext cx="10432593" cy="665135"/>
       </dsp:txXfrm>
     </dsp:sp>
-    <dsp:sp modelId="{8694ED8D-E215-4D76-857D-83338FC1B4B1}">
+    <dsp:sp modelId="{6D8FE49D-26DA-4425-8C7E-DCE94839AD71}">
       <dsp:nvSpPr>
         <dsp:cNvPr id="0" name=""/>
         <dsp:cNvSpPr/>
       </dsp:nvSpPr>
       <dsp:spPr>
         <a:xfrm>
-          <a:off x="0" y="697598"/>
-          <a:ext cx="10504557" cy="540540"/>
+          <a:off x="0" y="1395369"/>
+          <a:ext cx="10504557" cy="737099"/>
         </a:xfrm>
         <a:prstGeom prst="roundRect">
           <a:avLst/>
@@ -1737,12 +1569,12 @@
         </a:fontRef>
       </dsp:style>
       <dsp:txBody>
-        <a:bodyPr spcFirstLastPara="0" vert="horz" wrap="square" lIns="83820" tIns="83820" rIns="83820" bIns="83820" numCol="1" spcCol="1270" anchor="ctr" anchorCtr="0">
+        <a:bodyPr spcFirstLastPara="0" vert="horz" wrap="square" lIns="114300" tIns="114300" rIns="114300" bIns="114300" numCol="1" spcCol="1270" anchor="ctr" anchorCtr="0">
           <a:noAutofit/>
         </a:bodyPr>
         <a:lstStyle/>
         <a:p>
-          <a:pPr marL="0" lvl="0" indent="0" algn="l" defTabSz="977900">
+          <a:pPr marL="0" lvl="0" indent="0" algn="l" defTabSz="1333500">
             <a:lnSpc>
               <a:spcPct val="90000"/>
             </a:lnSpc>
@@ -1755,7 +1587,7 @@
             <a:buNone/>
           </a:pPr>
           <a:r>
-            <a:rPr lang="en-US" sz="2200" kern="1200">
+            <a:rPr lang="en-US" sz="3000" b="1" kern="1200" dirty="0">
               <a:solidFill>
                 <a:srgbClr val="FFFFFF"/>
               </a:solidFill>
@@ -1763,24 +1595,35 @@
               <a:ea typeface="+mn-ea"/>
               <a:cs typeface="+mn-cs"/>
             </a:rPr>
-            <a:t>docs/sprints/W01/plan.md</a:t>
+            <a:t> </a:t>
+          </a:r>
+          <a:r>
+            <a:rPr lang="en-US" sz="3000" kern="1200" dirty="0">
+              <a:solidFill>
+                <a:srgbClr val="FFFFFF"/>
+              </a:solidFill>
+              <a:latin typeface="Aptos" panose="02110004020202020204"/>
+              <a:ea typeface="+mn-ea"/>
+              <a:cs typeface="+mn-cs"/>
+            </a:rPr>
+            <a:t>examples/00_sdk_smoke.py</a:t>
           </a:r>
         </a:p>
       </dsp:txBody>
       <dsp:txXfrm>
-        <a:off x="26387" y="723985"/>
-        <a:ext cx="10451783" cy="487766"/>
+        <a:off x="35982" y="1431351"/>
+        <a:ext cx="10432593" cy="665135"/>
       </dsp:txXfrm>
     </dsp:sp>
-    <dsp:sp modelId="{6D8FE49D-26DA-4425-8C7E-DCE94839AD71}">
+    <dsp:sp modelId="{09E87734-5520-49F9-A61A-7BFE46AABF34}">
       <dsp:nvSpPr>
         <dsp:cNvPr id="0" name=""/>
         <dsp:cNvSpPr/>
       </dsp:nvSpPr>
       <dsp:spPr>
         <a:xfrm>
-          <a:off x="0" y="1301499"/>
-          <a:ext cx="10504557" cy="540540"/>
+          <a:off x="0" y="2218869"/>
+          <a:ext cx="10504557" cy="737099"/>
         </a:xfrm>
         <a:prstGeom prst="roundRect">
           <a:avLst/>
@@ -1849,12 +1692,12 @@
         </a:fontRef>
       </dsp:style>
       <dsp:txBody>
-        <a:bodyPr spcFirstLastPara="0" vert="horz" wrap="square" lIns="83820" tIns="83820" rIns="83820" bIns="83820" numCol="1" spcCol="1270" anchor="ctr" anchorCtr="0">
+        <a:bodyPr spcFirstLastPara="0" vert="horz" wrap="square" lIns="114300" tIns="114300" rIns="114300" bIns="114300" numCol="1" spcCol="1270" anchor="ctr" anchorCtr="0">
           <a:noAutofit/>
         </a:bodyPr>
         <a:lstStyle/>
         <a:p>
-          <a:pPr marL="0" lvl="0" indent="0" algn="l" defTabSz="977900">
+          <a:pPr marL="0" lvl="0" indent="0" algn="l" defTabSz="1333500">
             <a:lnSpc>
               <a:spcPct val="90000"/>
             </a:lnSpc>
@@ -1867,7 +1710,7 @@
             <a:buNone/>
           </a:pPr>
           <a:r>
-            <a:rPr lang="en-US" sz="2200" b="1" kern="1200">
+            <a:rPr lang="en-US" sz="3000" kern="1200" dirty="0">
               <a:solidFill>
                 <a:srgbClr val="FFFFFF"/>
               </a:solidFill>
@@ -1875,10 +1718,10 @@
               <a:ea typeface="+mn-ea"/>
               <a:cs typeface="+mn-cs"/>
             </a:rPr>
-            <a:t> </a:t>
+            <a:t>3d Drone </a:t>
           </a:r>
           <a:r>
-            <a:rPr lang="en-US" sz="2200" kern="1200">
+            <a:rPr lang="en-US" sz="3000" kern="1200" dirty="0" err="1">
               <a:solidFill>
                 <a:srgbClr val="FFFFFF"/>
               </a:solidFill>
@@ -1886,24 +1729,35 @@
               <a:ea typeface="+mn-ea"/>
               <a:cs typeface="+mn-cs"/>
             </a:rPr>
-            <a:t>examples/00_sdk_smoke.py</a:t>
+            <a:t>Drone</a:t>
+          </a:r>
+          <a:r>
+            <a:rPr lang="en-US" sz="3000" kern="1200" dirty="0">
+              <a:solidFill>
+                <a:srgbClr val="FFFFFF"/>
+              </a:solidFill>
+              <a:latin typeface="Aptos" panose="02110004020202020204"/>
+              <a:ea typeface="+mn-ea"/>
+              <a:cs typeface="+mn-cs"/>
+            </a:rPr>
+            <a:t> Model inside Project</a:t>
           </a:r>
         </a:p>
       </dsp:txBody>
       <dsp:txXfrm>
-        <a:off x="26387" y="1327886"/>
-        <a:ext cx="10451783" cy="487766"/>
+        <a:off x="35982" y="2254851"/>
+        <a:ext cx="10432593" cy="665135"/>
       </dsp:txXfrm>
     </dsp:sp>
-    <dsp:sp modelId="{09E87734-5520-49F9-A61A-7BFE46AABF34}">
+    <dsp:sp modelId="{8668C22C-39F1-4F13-A3C8-96243DD7C753}">
       <dsp:nvSpPr>
         <dsp:cNvPr id="0" name=""/>
         <dsp:cNvSpPr/>
       </dsp:nvSpPr>
       <dsp:spPr>
         <a:xfrm>
-          <a:off x="0" y="1905399"/>
-          <a:ext cx="10504557" cy="540540"/>
+          <a:off x="0" y="3042369"/>
+          <a:ext cx="10504557" cy="737099"/>
         </a:xfrm>
         <a:prstGeom prst="roundRect">
           <a:avLst/>
@@ -1972,12 +1826,12 @@
         </a:fontRef>
       </dsp:style>
       <dsp:txBody>
-        <a:bodyPr spcFirstLastPara="0" vert="horz" wrap="square" lIns="83820" tIns="83820" rIns="83820" bIns="83820" numCol="1" spcCol="1270" anchor="ctr" anchorCtr="0">
+        <a:bodyPr spcFirstLastPara="0" vert="horz" wrap="square" lIns="114300" tIns="114300" rIns="114300" bIns="114300" numCol="1" spcCol="1270" anchor="ctr" anchorCtr="0">
           <a:noAutofit/>
         </a:bodyPr>
         <a:lstStyle/>
         <a:p>
-          <a:pPr marL="0" lvl="0" indent="0" algn="l" defTabSz="977900">
+          <a:pPr marL="0" lvl="0" indent="0" algn="l" defTabSz="1333500">
             <a:lnSpc>
               <a:spcPct val="90000"/>
             </a:lnSpc>
@@ -1990,119 +1844,7 @@
             <a:buNone/>
           </a:pPr>
           <a:r>
-            <a:rPr lang="en-US" sz="2200" kern="1200">
-              <a:solidFill>
-                <a:srgbClr val="FFFFFF"/>
-              </a:solidFill>
-              <a:latin typeface="Aptos" panose="02110004020202020204"/>
-              <a:ea typeface="+mn-ea"/>
-              <a:cs typeface="+mn-cs"/>
-            </a:rPr>
-            <a:t>sdk/tests/test_import.py </a:t>
-          </a:r>
-        </a:p>
-      </dsp:txBody>
-      <dsp:txXfrm>
-        <a:off x="26387" y="1931786"/>
-        <a:ext cx="10451783" cy="487766"/>
-      </dsp:txXfrm>
-    </dsp:sp>
-    <dsp:sp modelId="{8668C22C-39F1-4F13-A3C8-96243DD7C753}">
-      <dsp:nvSpPr>
-        <dsp:cNvPr id="0" name=""/>
-        <dsp:cNvSpPr/>
-      </dsp:nvSpPr>
-      <dsp:spPr>
-        <a:xfrm>
-          <a:off x="0" y="2509299"/>
-          <a:ext cx="10504557" cy="540540"/>
-        </a:xfrm>
-        <a:prstGeom prst="roundRect">
-          <a:avLst/>
-        </a:prstGeom>
-        <a:gradFill rotWithShape="0">
-          <a:gsLst>
-            <a:gs pos="0">
-              <a:schemeClr val="accent6">
-                <a:hueOff val="0"/>
-                <a:satOff val="0"/>
-                <a:lumOff val="0"/>
-                <a:alphaOff val="0"/>
-                <a:satMod val="103000"/>
-                <a:lumMod val="102000"/>
-                <a:tint val="94000"/>
-              </a:schemeClr>
-            </a:gs>
-            <a:gs pos="50000">
-              <a:schemeClr val="accent6">
-                <a:hueOff val="0"/>
-                <a:satOff val="0"/>
-                <a:lumOff val="0"/>
-                <a:alphaOff val="0"/>
-                <a:satMod val="110000"/>
-                <a:lumMod val="100000"/>
-                <a:shade val="100000"/>
-              </a:schemeClr>
-            </a:gs>
-            <a:gs pos="100000">
-              <a:schemeClr val="accent6">
-                <a:hueOff val="0"/>
-                <a:satOff val="0"/>
-                <a:lumOff val="0"/>
-                <a:alphaOff val="0"/>
-                <a:lumMod val="99000"/>
-                <a:satMod val="120000"/>
-                <a:shade val="78000"/>
-              </a:schemeClr>
-            </a:gs>
-          </a:gsLst>
-          <a:lin ang="5400000" scaled="0"/>
-        </a:gradFill>
-        <a:ln>
-          <a:noFill/>
-        </a:ln>
-        <a:effectLst>
-          <a:outerShdw blurRad="57150" dist="19050" dir="5400000" algn="ctr" rotWithShape="0">
-            <a:srgbClr val="000000">
-              <a:alpha val="63000"/>
-            </a:srgbClr>
-          </a:outerShdw>
-        </a:effectLst>
-      </dsp:spPr>
-      <dsp:style>
-        <a:lnRef idx="0">
-          <a:scrgbClr r="0" g="0" b="0"/>
-        </a:lnRef>
-        <a:fillRef idx="3">
-          <a:scrgbClr r="0" g="0" b="0"/>
-        </a:fillRef>
-        <a:effectRef idx="3">
-          <a:scrgbClr r="0" g="0" b="0"/>
-        </a:effectRef>
-        <a:fontRef idx="minor">
-          <a:schemeClr val="lt1"/>
-        </a:fontRef>
-      </dsp:style>
-      <dsp:txBody>
-        <a:bodyPr spcFirstLastPara="0" vert="horz" wrap="square" lIns="83820" tIns="83820" rIns="83820" bIns="83820" numCol="1" spcCol="1270" anchor="ctr" anchorCtr="0">
-          <a:noAutofit/>
-        </a:bodyPr>
-        <a:lstStyle/>
-        <a:p>
-          <a:pPr marL="0" lvl="0" indent="0" algn="l" defTabSz="977900">
-            <a:lnSpc>
-              <a:spcPct val="90000"/>
-            </a:lnSpc>
-            <a:spcBef>
-              <a:spcPct val="0"/>
-            </a:spcBef>
-            <a:spcAft>
-              <a:spcPct val="35000"/>
-            </a:spcAft>
-            <a:buNone/>
-          </a:pPr>
-          <a:r>
-            <a:rPr lang="en-US" sz="2200" kern="1200">
+            <a:rPr lang="en-US" sz="3000" kern="1200" dirty="0">
               <a:solidFill>
                 <a:srgbClr val="FFFFFF"/>
               </a:solidFill>
@@ -2112,7 +1854,7 @@
             </a:rPr>
             <a:t>docs/PROTOCOL.md (updated to match implemented messages)</a:t>
           </a:r>
-          <a:endParaRPr lang="en-US" sz="2200" kern="1200">
+          <a:endParaRPr lang="en-US" sz="3000" kern="1200" dirty="0">
             <a:solidFill>
               <a:srgbClr val="FFFFFF"/>
             </a:solidFill>
@@ -2123,232 +1865,8 @@
         </a:p>
       </dsp:txBody>
       <dsp:txXfrm>
-        <a:off x="26387" y="2535686"/>
-        <a:ext cx="10451783" cy="487766"/>
-      </dsp:txXfrm>
-    </dsp:sp>
-    <dsp:sp modelId="{A3559C65-4E5D-4CA8-85BC-C432C3837387}">
-      <dsp:nvSpPr>
-        <dsp:cNvPr id="0" name=""/>
-        <dsp:cNvSpPr/>
-      </dsp:nvSpPr>
-      <dsp:spPr>
-        <a:xfrm>
-          <a:off x="0" y="3113199"/>
-          <a:ext cx="10504557" cy="540540"/>
-        </a:xfrm>
-        <a:prstGeom prst="roundRect">
-          <a:avLst/>
-        </a:prstGeom>
-        <a:gradFill rotWithShape="0">
-          <a:gsLst>
-            <a:gs pos="0">
-              <a:schemeClr val="accent2">
-                <a:hueOff val="0"/>
-                <a:satOff val="0"/>
-                <a:lumOff val="0"/>
-                <a:alphaOff val="0"/>
-                <a:satMod val="103000"/>
-                <a:lumMod val="102000"/>
-                <a:tint val="94000"/>
-              </a:schemeClr>
-            </a:gs>
-            <a:gs pos="50000">
-              <a:schemeClr val="accent2">
-                <a:hueOff val="0"/>
-                <a:satOff val="0"/>
-                <a:lumOff val="0"/>
-                <a:alphaOff val="0"/>
-                <a:satMod val="110000"/>
-                <a:lumMod val="100000"/>
-                <a:shade val="100000"/>
-              </a:schemeClr>
-            </a:gs>
-            <a:gs pos="100000">
-              <a:schemeClr val="accent2">
-                <a:hueOff val="0"/>
-                <a:satOff val="0"/>
-                <a:lumOff val="0"/>
-                <a:alphaOff val="0"/>
-                <a:lumMod val="99000"/>
-                <a:satMod val="120000"/>
-                <a:shade val="78000"/>
-              </a:schemeClr>
-            </a:gs>
-          </a:gsLst>
-          <a:lin ang="5400000" scaled="0"/>
-        </a:gradFill>
-        <a:ln>
-          <a:noFill/>
-        </a:ln>
-        <a:effectLst>
-          <a:outerShdw blurRad="57150" dist="19050" dir="5400000" algn="ctr" rotWithShape="0">
-            <a:srgbClr val="000000">
-              <a:alpha val="63000"/>
-            </a:srgbClr>
-          </a:outerShdw>
-        </a:effectLst>
-      </dsp:spPr>
-      <dsp:style>
-        <a:lnRef idx="0">
-          <a:scrgbClr r="0" g="0" b="0"/>
-        </a:lnRef>
-        <a:fillRef idx="3">
-          <a:scrgbClr r="0" g="0" b="0"/>
-        </a:fillRef>
-        <a:effectRef idx="3">
-          <a:scrgbClr r="0" g="0" b="0"/>
-        </a:effectRef>
-        <a:fontRef idx="minor">
-          <a:schemeClr val="lt1"/>
-        </a:fontRef>
-      </dsp:style>
-      <dsp:txBody>
-        <a:bodyPr spcFirstLastPara="0" vert="horz" wrap="square" lIns="83820" tIns="83820" rIns="83820" bIns="83820" numCol="1" spcCol="1270" anchor="ctr" anchorCtr="0">
-          <a:noAutofit/>
-        </a:bodyPr>
-        <a:lstStyle/>
-        <a:p>
-          <a:pPr marL="0" lvl="0" indent="0" algn="l" defTabSz="977900" rtl="0">
-            <a:lnSpc>
-              <a:spcPct val="90000"/>
-            </a:lnSpc>
-            <a:spcBef>
-              <a:spcPct val="0"/>
-            </a:spcBef>
-            <a:spcAft>
-              <a:spcPct val="35000"/>
-            </a:spcAft>
-            <a:buNone/>
-          </a:pPr>
-          <a:r>
-            <a:rPr lang="en-US" sz="2200" kern="1200">
-              <a:solidFill>
-                <a:srgbClr val="FFFFFF"/>
-              </a:solidFill>
-              <a:latin typeface="Calibri"/>
-              <a:ea typeface="Calibri"/>
-              <a:cs typeface="Calibri"/>
-            </a:rPr>
-            <a:t>Docs/sprints/W02/plan.md</a:t>
-          </a:r>
-        </a:p>
-      </dsp:txBody>
-      <dsp:txXfrm>
-        <a:off x="26387" y="3139586"/>
-        <a:ext cx="10451783" cy="487766"/>
-      </dsp:txXfrm>
-    </dsp:sp>
-    <dsp:sp modelId="{7F0D6C25-7930-47AB-8FBA-CE4FDF55D586}">
-      <dsp:nvSpPr>
-        <dsp:cNvPr id="0" name=""/>
-        <dsp:cNvSpPr/>
-      </dsp:nvSpPr>
-      <dsp:spPr>
-        <a:xfrm>
-          <a:off x="0" y="3717099"/>
-          <a:ext cx="10504557" cy="540540"/>
-        </a:xfrm>
-        <a:prstGeom prst="roundRect">
-          <a:avLst/>
-        </a:prstGeom>
-        <a:gradFill rotWithShape="0">
-          <a:gsLst>
-            <a:gs pos="0">
-              <a:schemeClr val="accent3">
-                <a:hueOff val="0"/>
-                <a:satOff val="0"/>
-                <a:lumOff val="0"/>
-                <a:alphaOff val="0"/>
-                <a:satMod val="103000"/>
-                <a:lumMod val="102000"/>
-                <a:tint val="94000"/>
-              </a:schemeClr>
-            </a:gs>
-            <a:gs pos="50000">
-              <a:schemeClr val="accent3">
-                <a:hueOff val="0"/>
-                <a:satOff val="0"/>
-                <a:lumOff val="0"/>
-                <a:alphaOff val="0"/>
-                <a:satMod val="110000"/>
-                <a:lumMod val="100000"/>
-                <a:shade val="100000"/>
-              </a:schemeClr>
-            </a:gs>
-            <a:gs pos="100000">
-              <a:schemeClr val="accent3">
-                <a:hueOff val="0"/>
-                <a:satOff val="0"/>
-                <a:lumOff val="0"/>
-                <a:alphaOff val="0"/>
-                <a:lumMod val="99000"/>
-                <a:satMod val="120000"/>
-                <a:shade val="78000"/>
-              </a:schemeClr>
-            </a:gs>
-          </a:gsLst>
-          <a:lin ang="5400000" scaled="0"/>
-        </a:gradFill>
-        <a:ln>
-          <a:noFill/>
-        </a:ln>
-        <a:effectLst>
-          <a:outerShdw blurRad="57150" dist="19050" dir="5400000" algn="ctr" rotWithShape="0">
-            <a:srgbClr val="000000">
-              <a:alpha val="63000"/>
-            </a:srgbClr>
-          </a:outerShdw>
-        </a:effectLst>
-      </dsp:spPr>
-      <dsp:style>
-        <a:lnRef idx="0">
-          <a:scrgbClr r="0" g="0" b="0"/>
-        </a:lnRef>
-        <a:fillRef idx="3">
-          <a:scrgbClr r="0" g="0" b="0"/>
-        </a:fillRef>
-        <a:effectRef idx="3">
-          <a:scrgbClr r="0" g="0" b="0"/>
-        </a:effectRef>
-        <a:fontRef idx="minor">
-          <a:schemeClr val="lt1"/>
-        </a:fontRef>
-      </dsp:style>
-      <dsp:txBody>
-        <a:bodyPr spcFirstLastPara="0" vert="horz" wrap="square" lIns="83820" tIns="83820" rIns="83820" bIns="83820" numCol="1" spcCol="1270" anchor="ctr" anchorCtr="0">
-          <a:noAutofit/>
-        </a:bodyPr>
-        <a:lstStyle/>
-        <a:p>
-          <a:pPr marL="0" lvl="0" indent="0" algn="l" defTabSz="977900" rtl="0">
-            <a:lnSpc>
-              <a:spcPct val="90000"/>
-            </a:lnSpc>
-            <a:spcBef>
-              <a:spcPct val="0"/>
-            </a:spcBef>
-            <a:spcAft>
-              <a:spcPct val="35000"/>
-            </a:spcAft>
-            <a:buNone/>
-          </a:pPr>
-          <a:r>
-            <a:rPr lang="en-US" sz="2200" kern="1200">
-              <a:solidFill>
-                <a:srgbClr val="FFFFFF"/>
-              </a:solidFill>
-              <a:latin typeface="Calibri"/>
-              <a:ea typeface="Calibri"/>
-              <a:cs typeface="Calibri"/>
-            </a:rPr>
-            <a:t>docs/presentations/W02.pdf (or W02.pptx)</a:t>
-          </a:r>
-        </a:p>
-      </dsp:txBody>
-      <dsp:txXfrm>
-        <a:off x="26387" y="3743486"/>
-        <a:ext cx="10451783" cy="487766"/>
+        <a:off x="35982" y="3078351"/>
+        <a:ext cx="10432593" cy="665135"/>
       </dsp:txXfrm>
     </dsp:sp>
   </dsp:spTree>
@@ -3703,7 +3221,7 @@
           <a:p>
             <a:fld id="{FD11E731-7C35-4F3A-86C7-28C15E898D8A}" type="datetimeFigureOut">
               <a:rPr lang="en-US" smtClean="0"/>
-              <a:t>2/28/2026</a:t>
+              <a:t>3/5/2026</a:t>
             </a:fld>
             <a:endParaRPr lang="en-US"/>
           </a:p>
@@ -3901,7 +3419,7 @@
           <a:p>
             <a:fld id="{FD11E731-7C35-4F3A-86C7-28C15E898D8A}" type="datetimeFigureOut">
               <a:rPr lang="en-US" smtClean="0"/>
-              <a:t>3/1/2026</a:t>
+              <a:t>3/5/2026</a:t>
             </a:fld>
             <a:endParaRPr lang="en-US"/>
           </a:p>
@@ -4109,7 +3627,7 @@
           <a:p>
             <a:fld id="{FD11E731-7C35-4F3A-86C7-28C15E898D8A}" type="datetimeFigureOut">
               <a:rPr lang="en-US" smtClean="0"/>
-              <a:t>3/1/2026</a:t>
+              <a:t>3/5/2026</a:t>
             </a:fld>
             <a:endParaRPr lang="en-US"/>
           </a:p>
@@ -4307,7 +3825,7 @@
           <a:p>
             <a:fld id="{FD11E731-7C35-4F3A-86C7-28C15E898D8A}" type="datetimeFigureOut">
               <a:rPr lang="en-US" smtClean="0"/>
-              <a:t>2/28/2026</a:t>
+              <a:t>3/5/2026</a:t>
             </a:fld>
             <a:endParaRPr lang="en-US"/>
           </a:p>
@@ -4582,7 +4100,7 @@
           <a:p>
             <a:fld id="{FD11E731-7C35-4F3A-86C7-28C15E898D8A}" type="datetimeFigureOut">
               <a:rPr lang="en-US" smtClean="0"/>
-              <a:t>3/1/2026</a:t>
+              <a:t>3/5/2026</a:t>
             </a:fld>
             <a:endParaRPr lang="en-US"/>
           </a:p>
@@ -4847,7 +4365,7 @@
           <a:p>
             <a:fld id="{FD11E731-7C35-4F3A-86C7-28C15E898D8A}" type="datetimeFigureOut">
               <a:rPr lang="en-US" smtClean="0"/>
-              <a:t>3/1/2026</a:t>
+              <a:t>3/5/2026</a:t>
             </a:fld>
             <a:endParaRPr lang="en-US"/>
           </a:p>
@@ -5259,7 +4777,7 @@
           <a:p>
             <a:fld id="{FD11E731-7C35-4F3A-86C7-28C15E898D8A}" type="datetimeFigureOut">
               <a:rPr lang="en-US" smtClean="0"/>
-              <a:t>3/1/2026</a:t>
+              <a:t>3/5/2026</a:t>
             </a:fld>
             <a:endParaRPr lang="en-US"/>
           </a:p>
@@ -5400,7 +4918,7 @@
           <a:p>
             <a:fld id="{FD11E731-7C35-4F3A-86C7-28C15E898D8A}" type="datetimeFigureOut">
               <a:rPr lang="en-US" smtClean="0"/>
-              <a:t>3/1/2026</a:t>
+              <a:t>3/5/2026</a:t>
             </a:fld>
             <a:endParaRPr lang="en-US"/>
           </a:p>
@@ -5513,7 +5031,7 @@
           <a:p>
             <a:fld id="{FD11E731-7C35-4F3A-86C7-28C15E898D8A}" type="datetimeFigureOut">
               <a:rPr lang="en-US" smtClean="0"/>
-              <a:t>3/1/2026</a:t>
+              <a:t>3/5/2026</a:t>
             </a:fld>
             <a:endParaRPr lang="en-US"/>
           </a:p>
@@ -5824,7 +5342,7 @@
           <a:p>
             <a:fld id="{FD11E731-7C35-4F3A-86C7-28C15E898D8A}" type="datetimeFigureOut">
               <a:rPr lang="en-US" smtClean="0"/>
-              <a:t>3/1/2026</a:t>
+              <a:t>3/5/2026</a:t>
             </a:fld>
             <a:endParaRPr lang="en-US"/>
           </a:p>
@@ -6112,7 +5630,7 @@
           <a:p>
             <a:fld id="{FD11E731-7C35-4F3A-86C7-28C15E898D8A}" type="datetimeFigureOut">
               <a:rPr lang="en-US" smtClean="0"/>
-              <a:t>3/1/2026</a:t>
+              <a:t>3/5/2026</a:t>
             </a:fld>
             <a:endParaRPr lang="en-US"/>
           </a:p>
@@ -6353,7 +5871,7 @@
           <a:p>
             <a:fld id="{FD11E731-7C35-4F3A-86C7-28C15E898D8A}" type="datetimeFigureOut">
               <a:rPr lang="en-US" smtClean="0"/>
-              <a:t>2/28/2026</a:t>
+              <a:t>3/5/2026</a:t>
             </a:fld>
             <a:endParaRPr lang="en-US"/>
           </a:p>
@@ -7502,424 +7020,6 @@
           <a:chExt cx="0" cy="0"/>
         </a:xfrm>
       </p:grpSpPr>
-      <p:pic>
-        <p:nvPicPr>
-          <p:cNvPr id="15" name="Picture 14">
-            <a:extLst>
-              <a:ext uri="{FF2B5EF4-FFF2-40B4-BE49-F238E27FC236}">
-                <a16:creationId xmlns:a16="http://schemas.microsoft.com/office/drawing/2014/main" id="{A9153D83-57A3-FC68-CC82-358139BB4C0D}"/>
-              </a:ext>
-            </a:extLst>
-          </p:cNvPr>
-          <p:cNvPicPr>
-            <a:picLocks noChangeAspect="1"/>
-          </p:cNvPicPr>
-          <p:nvPr/>
-        </p:nvPicPr>
-        <p:blipFill>
-          <a:blip r:embed="rId2">
-            <a:duotone>
-              <a:schemeClr val="bg2">
-                <a:shade val="45000"/>
-                <a:satMod val="135000"/>
-              </a:schemeClr>
-              <a:prstClr val="white"/>
-            </a:duotone>
-          </a:blip>
-          <a:srcRect t="11637" r="9091" b="37227"/>
-          <a:stretch>
-            <a:fillRect/>
-          </a:stretch>
-        </p:blipFill>
-        <p:spPr>
-          <a:xfrm>
-            <a:off x="-38090" y="10"/>
-            <a:ext cx="12191980" cy="6857990"/>
-          </a:xfrm>
-          <a:prstGeom prst="rect">
-            <a:avLst/>
-          </a:prstGeom>
-        </p:spPr>
-      </p:pic>
-      <p:sp>
-        <p:nvSpPr>
-          <p:cNvPr id="24" name="Rectangle 23">
-            <a:extLst>
-              <a:ext uri="{FF2B5EF4-FFF2-40B4-BE49-F238E27FC236}">
-                <a16:creationId xmlns:a16="http://schemas.microsoft.com/office/drawing/2014/main" id="{B50AB553-2A96-4A92-96F2-93548E096954}"/>
-              </a:ext>
-              <a:ext uri="{C183D7F6-B498-43B3-948B-1728B52AA6E4}">
-                <adec:decorative xmlns:adec="http://schemas.microsoft.com/office/drawing/2017/decorative" val="1"/>
-              </a:ext>
-            </a:extLst>
-          </p:cNvPr>
-          <p:cNvSpPr>
-            <a:spLocks noGrp="1" noRot="1" noChangeAspect="1" noMove="1" noResize="1" noEditPoints="1" noAdjustHandles="1" noChangeArrowheads="1" noChangeShapeType="1" noTextEdit="1"/>
-          </p:cNvSpPr>
-          <p:nvPr>
-            <p:extLst>
-              <p:ext uri="{386F3935-93C4-4BCD-93E2-E3B085C9AB24}">
-                <p16:designElem xmlns:p16="http://schemas.microsoft.com/office/powerpoint/2015/main" val="1"/>
-              </p:ext>
-            </p:extLst>
-          </p:nvPr>
-        </p:nvSpPr>
-        <p:spPr>
-          <a:xfrm>
-            <a:off x="0" y="0"/>
-            <a:ext cx="12192000" cy="6858000"/>
-          </a:xfrm>
-          <a:prstGeom prst="rect">
-            <a:avLst/>
-          </a:prstGeom>
-          <a:gradFill>
-            <a:gsLst>
-              <a:gs pos="10000">
-                <a:schemeClr val="bg2">
-                  <a:alpha val="68000"/>
-                </a:schemeClr>
-              </a:gs>
-              <a:gs pos="85000">
-                <a:schemeClr val="bg2">
-                  <a:alpha val="97000"/>
-                </a:schemeClr>
-              </a:gs>
-            </a:gsLst>
-            <a:path path="circle">
-              <a:fillToRect l="50000" t="50000" r="50000" b="50000"/>
-            </a:path>
-          </a:gradFill>
-          <a:ln>
-            <a:noFill/>
-          </a:ln>
-        </p:spPr>
-        <p:style>
-          <a:lnRef idx="2">
-            <a:schemeClr val="accent1">
-              <a:shade val="50000"/>
-            </a:schemeClr>
-          </a:lnRef>
-          <a:fillRef idx="1">
-            <a:schemeClr val="accent1"/>
-          </a:fillRef>
-          <a:effectRef idx="0">
-            <a:schemeClr val="accent1"/>
-          </a:effectRef>
-          <a:fontRef idx="minor">
-            <a:schemeClr val="lt1"/>
-          </a:fontRef>
-        </p:style>
-        <p:txBody>
-          <a:bodyPr rtlCol="0" anchor="ctr"/>
-          <a:lstStyle/>
-          <a:p>
-            <a:pPr algn="ctr"/>
-            <a:endParaRPr lang="en-US"/>
-          </a:p>
-        </p:txBody>
-      </p:sp>
-      <p:sp>
-        <p:nvSpPr>
-          <p:cNvPr id="2" name="Title 1">
-            <a:extLst>
-              <a:ext uri="{FF2B5EF4-FFF2-40B4-BE49-F238E27FC236}">
-                <a16:creationId xmlns:a16="http://schemas.microsoft.com/office/drawing/2014/main" id="{2D7AF4BD-C9E6-DD9E-8AD0-9DAD0F65147F}"/>
-              </a:ext>
-            </a:extLst>
-          </p:cNvPr>
-          <p:cNvSpPr>
-            <a:spLocks noGrp="1"/>
-          </p:cNvSpPr>
-          <p:nvPr>
-            <p:ph type="title"/>
-          </p:nvPr>
-        </p:nvSpPr>
-        <p:spPr>
-          <a:xfrm>
-            <a:off x="838200" y="365125"/>
-            <a:ext cx="10515600" cy="1325563"/>
-          </a:xfrm>
-        </p:spPr>
-        <p:txBody>
-          <a:bodyPr>
-            <a:normAutofit/>
-          </a:bodyPr>
-          <a:lstStyle/>
-          <a:p>
-            <a:r>
-              <a:rPr lang="en-US"/>
-              <a:t>Deliverables</a:t>
-            </a:r>
-          </a:p>
-        </p:txBody>
-      </p:sp>
-      <p:graphicFrame>
-        <p:nvGraphicFramePr>
-          <p:cNvPr id="14" name="Content Placeholder 2">
-            <a:extLst>
-              <a:ext uri="{FF2B5EF4-FFF2-40B4-BE49-F238E27FC236}">
-                <a16:creationId xmlns:a16="http://schemas.microsoft.com/office/drawing/2014/main" id="{CB9FB94D-28CA-B8AF-E99E-B55D35733884}"/>
-              </a:ext>
-            </a:extLst>
-          </p:cNvPr>
-          <p:cNvGraphicFramePr>
-            <a:graphicFrameLocks noGrp="1"/>
-          </p:cNvGraphicFramePr>
-          <p:nvPr>
-            <p:ph idx="1"/>
-            <p:extLst>
-              <p:ext uri="{D42A27DB-BD31-4B8C-83A1-F6EECF244321}">
-                <p14:modId xmlns:p14="http://schemas.microsoft.com/office/powerpoint/2010/main" val="2308325228"/>
-              </p:ext>
-            </p:extLst>
-          </p:nvPr>
-        </p:nvGraphicFramePr>
-        <p:xfrm>
-          <a:off x="805068" y="1648929"/>
-          <a:ext cx="10504557" cy="4351338"/>
-        </p:xfrm>
-        <a:graphic>
-          <a:graphicData uri="http://schemas.openxmlformats.org/drawingml/2006/diagram">
-            <dgm:relIds xmlns:dgm="http://schemas.openxmlformats.org/drawingml/2006/diagram" xmlns:r="http://schemas.openxmlformats.org/officeDocument/2006/relationships" r:dm="rId3" r:lo="rId4" r:qs="rId5" r:cs="rId6"/>
-          </a:graphicData>
-        </a:graphic>
-      </p:graphicFrame>
-      <p:pic>
-        <p:nvPicPr>
-          <p:cNvPr id="16" name="Graphic 15" descr="Checkbox Checked with solid fill">
-            <a:extLst>
-              <a:ext uri="{FF2B5EF4-FFF2-40B4-BE49-F238E27FC236}">
-                <a16:creationId xmlns:a16="http://schemas.microsoft.com/office/drawing/2014/main" id="{A3966D21-1CF3-1D43-40D9-98B7748A504A}"/>
-              </a:ext>
-            </a:extLst>
-          </p:cNvPr>
-          <p:cNvPicPr>
-            <a:picLocks noChangeAspect="1"/>
-          </p:cNvPicPr>
-          <p:nvPr/>
-        </p:nvPicPr>
-        <p:blipFill>
-          <a:blip r:embed="rId8">
-            <a:extLst>
-              <a:ext uri="{96DAC541-7B7A-43D3-8B79-37D633B846F1}">
-                <asvg:svgBlip xmlns:asvg="http://schemas.microsoft.com/office/drawing/2016/SVG/main" r:embed="rId9"/>
-              </a:ext>
-            </a:extLst>
-          </a:blip>
-          <a:stretch>
-            <a:fillRect/>
-          </a:stretch>
-        </p:blipFill>
-        <p:spPr>
-          <a:xfrm>
-            <a:off x="-71220" y="4161302"/>
-            <a:ext cx="872067" cy="702734"/>
-          </a:xfrm>
-          <a:prstGeom prst="rect">
-            <a:avLst/>
-          </a:prstGeom>
-        </p:spPr>
-      </p:pic>
-      <p:pic>
-        <p:nvPicPr>
-          <p:cNvPr id="17" name="Graphic 16" descr="Checkbox Checked with solid fill">
-            <a:extLst>
-              <a:ext uri="{FF2B5EF4-FFF2-40B4-BE49-F238E27FC236}">
-                <a16:creationId xmlns:a16="http://schemas.microsoft.com/office/drawing/2014/main" id="{B95ED1C8-4A62-DBFD-CE02-855C24C21438}"/>
-              </a:ext>
-            </a:extLst>
-          </p:cNvPr>
-          <p:cNvPicPr>
-            <a:picLocks noChangeAspect="1"/>
-          </p:cNvPicPr>
-          <p:nvPr/>
-        </p:nvPicPr>
-        <p:blipFill>
-          <a:blip r:embed="rId8">
-            <a:extLst>
-              <a:ext uri="{96DAC541-7B7A-43D3-8B79-37D633B846F1}">
-                <asvg:svgBlip xmlns:asvg="http://schemas.microsoft.com/office/drawing/2016/SVG/main" r:embed="rId9"/>
-              </a:ext>
-            </a:extLst>
-          </a:blip>
-          <a:stretch>
-            <a:fillRect/>
-          </a:stretch>
-        </p:blipFill>
-        <p:spPr>
-          <a:xfrm>
-            <a:off x="-71220" y="4665670"/>
-            <a:ext cx="872067" cy="730956"/>
-          </a:xfrm>
-          <a:prstGeom prst="rect">
-            <a:avLst/>
-          </a:prstGeom>
-        </p:spPr>
-      </p:pic>
-      <p:pic>
-        <p:nvPicPr>
-          <p:cNvPr id="21" name="Graphic 20" descr="Checkbox Checked with solid fill">
-            <a:extLst>
-              <a:ext uri="{FF2B5EF4-FFF2-40B4-BE49-F238E27FC236}">
-                <a16:creationId xmlns:a16="http://schemas.microsoft.com/office/drawing/2014/main" id="{DB185661-75C2-A1B2-4A02-07705A119AB2}"/>
-              </a:ext>
-            </a:extLst>
-          </p:cNvPr>
-          <p:cNvPicPr>
-            <a:picLocks noChangeAspect="1"/>
-          </p:cNvPicPr>
-          <p:nvPr/>
-        </p:nvPicPr>
-        <p:blipFill>
-          <a:blip r:embed="rId8">
-            <a:extLst>
-              <a:ext uri="{96DAC541-7B7A-43D3-8B79-37D633B846F1}">
-                <asvg:svgBlip xmlns:asvg="http://schemas.microsoft.com/office/drawing/2016/SVG/main" r:embed="rId9"/>
-              </a:ext>
-            </a:extLst>
-          </a:blip>
-          <a:stretch>
-            <a:fillRect/>
-          </a:stretch>
-        </p:blipFill>
-        <p:spPr>
-          <a:xfrm>
-            <a:off x="-80423" y="5283774"/>
-            <a:ext cx="879429" cy="699054"/>
-          </a:xfrm>
-          <a:prstGeom prst="rect">
-            <a:avLst/>
-          </a:prstGeom>
-        </p:spPr>
-      </p:pic>
-      <p:pic>
-        <p:nvPicPr>
-          <p:cNvPr id="3" name="Picture 2">
-            <a:extLst>
-              <a:ext uri="{FF2B5EF4-FFF2-40B4-BE49-F238E27FC236}">
-                <a16:creationId xmlns:a16="http://schemas.microsoft.com/office/drawing/2014/main" id="{68369CED-A39D-26D9-2F5E-AB6A02DE440E}"/>
-              </a:ext>
-            </a:extLst>
-          </p:cNvPr>
-          <p:cNvPicPr>
-            <a:picLocks noChangeAspect="1"/>
-          </p:cNvPicPr>
-          <p:nvPr/>
-        </p:nvPicPr>
-        <p:blipFill>
-          <a:blip r:embed="rId10"/>
-          <a:stretch>
-            <a:fillRect/>
-          </a:stretch>
-        </p:blipFill>
-        <p:spPr>
-          <a:xfrm>
-            <a:off x="9203" y="2224157"/>
-            <a:ext cx="829813" cy="773368"/>
-          </a:xfrm>
-          <a:prstGeom prst="rect">
-            <a:avLst/>
-          </a:prstGeom>
-        </p:spPr>
-      </p:pic>
-      <p:pic>
-        <p:nvPicPr>
-          <p:cNvPr id="218" name="Picture 217">
-            <a:extLst>
-              <a:ext uri="{FF2B5EF4-FFF2-40B4-BE49-F238E27FC236}">
-                <a16:creationId xmlns:a16="http://schemas.microsoft.com/office/drawing/2014/main" id="{D5CF8785-6EBC-6E2A-63C0-A5B673A65F4F}"/>
-              </a:ext>
-            </a:extLst>
-          </p:cNvPr>
-          <p:cNvPicPr>
-            <a:picLocks noChangeAspect="1"/>
-          </p:cNvPicPr>
-          <p:nvPr/>
-        </p:nvPicPr>
-        <p:blipFill>
-          <a:blip r:embed="rId10"/>
-          <a:stretch>
-            <a:fillRect/>
-          </a:stretch>
-        </p:blipFill>
-        <p:spPr>
-          <a:xfrm>
-            <a:off x="-32805" y="3475310"/>
-            <a:ext cx="842592" cy="684442"/>
-          </a:xfrm>
-          <a:prstGeom prst="rect">
-            <a:avLst/>
-          </a:prstGeom>
-        </p:spPr>
-      </p:pic>
-      <p:pic>
-        <p:nvPicPr>
-          <p:cNvPr id="227" name="Picture 226">
-            <a:extLst>
-              <a:ext uri="{FF2B5EF4-FFF2-40B4-BE49-F238E27FC236}">
-                <a16:creationId xmlns:a16="http://schemas.microsoft.com/office/drawing/2014/main" id="{59945A64-5374-F54E-71F7-DD8BEBC5AA8A}"/>
-              </a:ext>
-            </a:extLst>
-          </p:cNvPr>
-          <p:cNvPicPr>
-            <a:picLocks noChangeAspect="1"/>
-          </p:cNvPicPr>
-          <p:nvPr/>
-        </p:nvPicPr>
-        <p:blipFill>
-          <a:blip r:embed="rId10"/>
-          <a:stretch>
-            <a:fillRect/>
-          </a:stretch>
-        </p:blipFill>
-        <p:spPr>
-          <a:xfrm>
-            <a:off x="37159" y="2768898"/>
-            <a:ext cx="716924" cy="787480"/>
-          </a:xfrm>
-          <a:prstGeom prst="rect">
-            <a:avLst/>
-          </a:prstGeom>
-        </p:spPr>
-      </p:pic>
-    </p:spTree>
-    <p:extLst>
-      <p:ext uri="{BB962C8B-B14F-4D97-AF65-F5344CB8AC3E}">
-        <p14:creationId xmlns:p14="http://schemas.microsoft.com/office/powerpoint/2010/main" val="3197113900"/>
-      </p:ext>
-    </p:extLst>
-  </p:cSld>
-  <p:clrMapOvr>
-    <a:masterClrMapping/>
-  </p:clrMapOvr>
-</p:sld>
-</file>
-
-<file path=ppt/slides/slide3.xml><?xml version="1.0" encoding="utf-8"?>
-<p:sld xmlns:a="http://schemas.openxmlformats.org/drawingml/2006/main" xmlns:r="http://schemas.openxmlformats.org/officeDocument/2006/relationships" xmlns:p="http://schemas.openxmlformats.org/presentationml/2006/main">
-  <p:cSld>
-    <p:bg>
-      <p:bgPr>
-        <a:solidFill>
-          <a:schemeClr val="bg1"/>
-        </a:solidFill>
-        <a:effectLst/>
-      </p:bgPr>
-    </p:bg>
-    <p:spTree>
-      <p:nvGrpSpPr>
-        <p:cNvPr id="1" name=""/>
-        <p:cNvGrpSpPr/>
-        <p:nvPr/>
-      </p:nvGrpSpPr>
-      <p:grpSpPr>
-        <a:xfrm>
-          <a:off x="0" y="0"/>
-          <a:ext cx="0" cy="0"/>
-          <a:chOff x="0" y="0"/>
-          <a:chExt cx="0" cy="0"/>
-        </a:xfrm>
-      </p:grpSpPr>
       <p:sp useBgFill="1">
         <p:nvSpPr>
           <p:cNvPr id="23" name="Rectangle 22">
@@ -8334,20 +7434,30 @@
           <a:lstStyle/>
           <a:p>
             <a:r>
-              <a:rPr lang="en-US" sz="2400" dirty="0"/>
-              <a:t>Wrote up or sprint plans and kept up with the documentation for the project</a:t>
+              <a:rPr lang="en-US" dirty="0"/>
+              <a:t>Task:  Sprint Leading</a:t>
             </a:r>
           </a:p>
           <a:p>
+            <a:pPr marL="0" indent="0">
+              <a:buNone/>
+            </a:pPr>
             <a:r>
-              <a:rPr lang="en-US" sz="2400" dirty="0"/>
-              <a:t>Created a template presentation we can use going forward</a:t>
+              <a:rPr lang="en-US" dirty="0"/>
+              <a:t>	- Sprint planning with Stories</a:t>
             </a:r>
           </a:p>
           <a:p>
+            <a:pPr marL="0" indent="0">
+              <a:buNone/>
+            </a:pPr>
             <a:r>
-              <a:rPr lang="en-US" sz="2400" dirty="0"/>
-              <a:t>Jumped around to whichever position needed the most support</a:t>
+              <a:rPr lang="en-US"/>
+              <a:t>	- </a:t>
+            </a:r>
+            <a:r>
+              <a:rPr lang="en-US" dirty="0"/>
+              <a:t>Sprint Retrospective and Review</a:t>
             </a:r>
           </a:p>
         </p:txBody>
@@ -8417,7 +7527,7 @@
 </p:sld>
 </file>
 
-<file path=ppt/slides/slide4.xml><?xml version="1.0" encoding="utf-8"?>
+<file path=ppt/slides/slide3.xml><?xml version="1.0" encoding="utf-8"?>
 <p:sld xmlns:a="http://schemas.openxmlformats.org/drawingml/2006/main" xmlns:r="http://schemas.openxmlformats.org/officeDocument/2006/relationships" xmlns:p="http://schemas.openxmlformats.org/presentationml/2006/main">
   <p:cSld>
     <p:bg>
@@ -8854,53 +7964,31 @@
           <a:lstStyle/>
           <a:p>
             <a:r>
-              <a:rPr lang="en-US" sz="2400"/>
-              <a:t>Chose The Golden Machine and set it up</a:t>
+              <a:rPr lang="en-US" dirty="0"/>
+              <a:t>Task: </a:t>
             </a:r>
-          </a:p>
-          <a:p>
-            <a:pPr lvl="1"/>
-            <a:r>
-              <a:rPr lang="en-US" sz="2000"/>
-              <a:t>Golden Machine Specs:</a:t>
-            </a:r>
-          </a:p>
-          <a:p>
-            <a:pPr lvl="2"/>
-            <a:r>
-              <a:rPr lang="en-US" sz="1600">
-                <a:ea typeface="+mn-lt"/>
-                <a:cs typeface="+mn-lt"/>
-              </a:rPr>
-              <a:t>Windows 11 Processor Intel(R) Xeon(R) w3-2435 (3.10 GHz) Graphics Card: NVIDIA RTX A4000 (16GB) Installed RAM 32.0 GB (31.3 GB usable) System type 64-bit operating system, x64-based processor Unreal Engine Version 5.7.3 Python 3.9.13</a:t>
-            </a:r>
-          </a:p>
-          <a:p>
-            <a:r>
-              <a:rPr lang="en-US" sz="2400"/>
-              <a:t>Created Set up instructions and updated as our project grew in sprint 2</a:t>
-            </a:r>
-          </a:p>
-          <a:p>
-            <a:pPr lvl="1"/>
-            <a:r>
-              <a:rPr lang="en-US" sz="2000"/>
-              <a:t>Will need to be edited due to changes we decided to make due to week 2's results</a:t>
-            </a:r>
-          </a:p>
-          <a:p>
-            <a:pPr lvl="1"/>
-            <a:endParaRPr lang="en-US" sz="2000"/>
           </a:p>
           <a:p>
             <a:pPr marL="0" indent="0">
               <a:buNone/>
             </a:pPr>
-            <a:endParaRPr lang="en-US" sz="1600"/>
+            <a:r>
+              <a:rPr lang="en-US" dirty="0"/>
+              <a:t>	- Verify that our project works on a fresh install</a:t>
+            </a:r>
+          </a:p>
+          <a:p>
+            <a:pPr marL="0" indent="0">
+              <a:buNone/>
+            </a:pPr>
+            <a:r>
+              <a:rPr lang="en-US" dirty="0"/>
+              <a:t>	- Validate on a second machine</a:t>
+            </a:r>
           </a:p>
           <a:p>
             <a:pPr lvl="2"/>
-            <a:endParaRPr lang="en-US" sz="1600"/>
+            <a:endParaRPr lang="en-US" sz="1600" dirty="0"/>
           </a:p>
         </p:txBody>
       </p:sp>
@@ -8969,7 +8057,7 @@
 </p:sld>
 </file>
 
-<file path=ppt/slides/slide5.xml><?xml version="1.0" encoding="utf-8"?>
+<file path=ppt/slides/slide4.xml><?xml version="1.0" encoding="utf-8"?>
 <p:sld xmlns:a="http://schemas.openxmlformats.org/drawingml/2006/main" xmlns:r="http://schemas.openxmlformats.org/officeDocument/2006/relationships" xmlns:p="http://schemas.openxmlformats.org/presentationml/2006/main">
   <p:cSld>
     <p:bg>
@@ -10104,7 +9192,7 @@
 </p:sld>
 </file>
 
-<file path=ppt/slides/slide6.xml><?xml version="1.0" encoding="utf-8"?>
+<file path=ppt/slides/slide5.xml><?xml version="1.0" encoding="utf-8"?>
 <p:sld xmlns:a="http://schemas.openxmlformats.org/drawingml/2006/main" xmlns:r="http://schemas.openxmlformats.org/officeDocument/2006/relationships" xmlns:p="http://schemas.openxmlformats.org/presentationml/2006/main">
   <p:cSld>
     <p:bg>
@@ -10623,7 +9711,7 @@
 </p:sld>
 </file>
 
-<file path=ppt/slides/slide7.xml><?xml version="1.0" encoding="utf-8"?>
+<file path=ppt/slides/slide6.xml><?xml version="1.0" encoding="utf-8"?>
 <p:sld xmlns:a="http://schemas.openxmlformats.org/drawingml/2006/main" xmlns:r="http://schemas.openxmlformats.org/officeDocument/2006/relationships" xmlns:p="http://schemas.openxmlformats.org/presentationml/2006/main">
   <p:cSld>
     <p:bg>
@@ -11064,52 +10152,6 @@
           </a:bodyPr>
           <a:lstStyle/>
           <a:p>
-            <a:r>
-              <a:rPr lang="en-US" sz="2400" dirty="0"/>
-              <a:t>Imported and set up Microsoft </a:t>
-            </a:r>
-            <a:r>
-              <a:rPr lang="en-US" sz="2400" dirty="0" err="1"/>
-              <a:t>AirSim</a:t>
-            </a:r>
-            <a:r>
-              <a:rPr lang="en-US" sz="2400" dirty="0"/>
-              <a:t> into the project</a:t>
-            </a:r>
-            <a:endParaRPr lang="en-US" dirty="0"/>
-          </a:p>
-          <a:p>
-            <a:pPr lvl="1">
-              <a:buFont typeface="Courier New" panose="020B0604020202020204" pitchFamily="34" charset="0"/>
-              <a:buChar char="o"/>
-            </a:pPr>
-            <a:r>
-              <a:rPr lang="en-US" sz="2000" dirty="0"/>
-              <a:t>Microsoft </a:t>
-            </a:r>
-            <a:r>
-              <a:rPr lang="en-US" sz="2000" dirty="0" err="1"/>
-              <a:t>Airsim</a:t>
-            </a:r>
-            <a:r>
-              <a:rPr lang="en-US" sz="2000" dirty="0"/>
-              <a:t> and other SDK's are </a:t>
-            </a:r>
-            <a:r>
-              <a:rPr lang="en-US" sz="2000" dirty="0" err="1"/>
-              <a:t>likley</a:t>
-            </a:r>
-            <a:r>
-              <a:rPr lang="en-US" sz="2000" dirty="0"/>
-              <a:t> not going to work for this </a:t>
-            </a:r>
-            <a:r>
-              <a:rPr lang="en-US" sz="2000" dirty="0" err="1"/>
-              <a:t>projet</a:t>
-            </a:r>
-            <a:endParaRPr lang="en-US" sz="2000" dirty="0"/>
-          </a:p>
-          <a:p>
             <a:endParaRPr lang="en-US" sz="2400" dirty="0"/>
           </a:p>
         </p:txBody>
@@ -11179,7 +10221,7 @@
 </p:sld>
 </file>
 
-<file path=ppt/slides/slide8.xml><?xml version="1.0" encoding="utf-8"?>
+<file path=ppt/slides/slide7.xml><?xml version="1.0" encoding="utf-8"?>
 <p:sld xmlns:a="http://schemas.openxmlformats.org/drawingml/2006/main" xmlns:r="http://schemas.openxmlformats.org/officeDocument/2006/relationships" xmlns:p="http://schemas.openxmlformats.org/presentationml/2006/main">
   <p:cSld>
     <p:bg>
@@ -11654,6 +10696,187 @@
     <p:extLst>
       <p:ext uri="{BB962C8B-B14F-4D97-AF65-F5344CB8AC3E}">
         <p14:creationId xmlns:p14="http://schemas.microsoft.com/office/powerpoint/2010/main" val="3353221219"/>
+      </p:ext>
+    </p:extLst>
+  </p:cSld>
+  <p:clrMapOvr>
+    <a:masterClrMapping/>
+  </p:clrMapOvr>
+</p:sld>
+</file>
+
+<file path=ppt/slides/slide8.xml><?xml version="1.0" encoding="utf-8"?>
+<p:sld xmlns:a="http://schemas.openxmlformats.org/drawingml/2006/main" xmlns:r="http://schemas.openxmlformats.org/officeDocument/2006/relationships" xmlns:p="http://schemas.openxmlformats.org/presentationml/2006/main">
+  <p:cSld>
+    <p:bg>
+      <p:bgPr>
+        <a:solidFill>
+          <a:schemeClr val="bg1"/>
+        </a:solidFill>
+        <a:effectLst/>
+      </p:bgPr>
+    </p:bg>
+    <p:spTree>
+      <p:nvGrpSpPr>
+        <p:cNvPr id="1" name=""/>
+        <p:cNvGrpSpPr/>
+        <p:nvPr/>
+      </p:nvGrpSpPr>
+      <p:grpSpPr>
+        <a:xfrm>
+          <a:off x="0" y="0"/>
+          <a:ext cx="0" cy="0"/>
+          <a:chOff x="0" y="0"/>
+          <a:chExt cx="0" cy="0"/>
+        </a:xfrm>
+      </p:grpSpPr>
+      <p:sp>
+        <p:nvSpPr>
+          <p:cNvPr id="24" name="Rectangle 23">
+            <a:extLst>
+              <a:ext uri="{FF2B5EF4-FFF2-40B4-BE49-F238E27FC236}">
+                <a16:creationId xmlns:a16="http://schemas.microsoft.com/office/drawing/2014/main" id="{B50AB553-2A96-4A92-96F2-93548E096954}"/>
+              </a:ext>
+              <a:ext uri="{C183D7F6-B498-43B3-948B-1728B52AA6E4}">
+                <adec:decorative xmlns:adec="http://schemas.microsoft.com/office/drawing/2017/decorative" val="1"/>
+              </a:ext>
+            </a:extLst>
+          </p:cNvPr>
+          <p:cNvSpPr>
+            <a:spLocks noGrp="1" noRot="1" noChangeAspect="1" noMove="1" noResize="1" noEditPoints="1" noAdjustHandles="1" noChangeArrowheads="1" noChangeShapeType="1" noTextEdit="1"/>
+          </p:cNvSpPr>
+          <p:nvPr>
+            <p:extLst>
+              <p:ext uri="{386F3935-93C4-4BCD-93E2-E3B085C9AB24}">
+                <p16:designElem xmlns:p16="http://schemas.microsoft.com/office/powerpoint/2015/main" val="1"/>
+              </p:ext>
+            </p:extLst>
+          </p:nvPr>
+        </p:nvSpPr>
+        <p:spPr>
+          <a:xfrm>
+            <a:off x="0" y="0"/>
+            <a:ext cx="12192000" cy="6858000"/>
+          </a:xfrm>
+          <a:prstGeom prst="rect">
+            <a:avLst/>
+          </a:prstGeom>
+          <a:gradFill>
+            <a:gsLst>
+              <a:gs pos="10000">
+                <a:schemeClr val="bg2">
+                  <a:alpha val="68000"/>
+                </a:schemeClr>
+              </a:gs>
+              <a:gs pos="85000">
+                <a:schemeClr val="bg2">
+                  <a:alpha val="97000"/>
+                </a:schemeClr>
+              </a:gs>
+            </a:gsLst>
+            <a:path path="circle">
+              <a:fillToRect l="50000" t="50000" r="50000" b="50000"/>
+            </a:path>
+          </a:gradFill>
+          <a:ln>
+            <a:noFill/>
+          </a:ln>
+        </p:spPr>
+        <p:style>
+          <a:lnRef idx="2">
+            <a:schemeClr val="accent1">
+              <a:shade val="50000"/>
+            </a:schemeClr>
+          </a:lnRef>
+          <a:fillRef idx="1">
+            <a:schemeClr val="accent1"/>
+          </a:fillRef>
+          <a:effectRef idx="0">
+            <a:schemeClr val="accent1"/>
+          </a:effectRef>
+          <a:fontRef idx="minor">
+            <a:schemeClr val="lt1"/>
+          </a:fontRef>
+        </p:style>
+        <p:txBody>
+          <a:bodyPr rtlCol="0" anchor="ctr"/>
+          <a:lstStyle/>
+          <a:p>
+            <a:pPr algn="ctr"/>
+            <a:endParaRPr lang="en-US"/>
+          </a:p>
+        </p:txBody>
+      </p:sp>
+      <p:sp>
+        <p:nvSpPr>
+          <p:cNvPr id="2" name="Title 1">
+            <a:extLst>
+              <a:ext uri="{FF2B5EF4-FFF2-40B4-BE49-F238E27FC236}">
+                <a16:creationId xmlns:a16="http://schemas.microsoft.com/office/drawing/2014/main" id="{2D7AF4BD-C9E6-DD9E-8AD0-9DAD0F65147F}"/>
+              </a:ext>
+            </a:extLst>
+          </p:cNvPr>
+          <p:cNvSpPr>
+            <a:spLocks noGrp="1"/>
+          </p:cNvSpPr>
+          <p:nvPr>
+            <p:ph type="title"/>
+          </p:nvPr>
+        </p:nvSpPr>
+        <p:spPr>
+          <a:xfrm>
+            <a:off x="838200" y="365125"/>
+            <a:ext cx="10515600" cy="1325563"/>
+          </a:xfrm>
+        </p:spPr>
+        <p:txBody>
+          <a:bodyPr>
+            <a:normAutofit/>
+          </a:bodyPr>
+          <a:lstStyle/>
+          <a:p>
+            <a:r>
+              <a:rPr lang="en-US"/>
+              <a:t>Deliverables</a:t>
+            </a:r>
+          </a:p>
+        </p:txBody>
+      </p:sp>
+      <p:graphicFrame>
+        <p:nvGraphicFramePr>
+          <p:cNvPr id="14" name="Content Placeholder 2">
+            <a:extLst>
+              <a:ext uri="{FF2B5EF4-FFF2-40B4-BE49-F238E27FC236}">
+                <a16:creationId xmlns:a16="http://schemas.microsoft.com/office/drawing/2014/main" id="{CB9FB94D-28CA-B8AF-E99E-B55D35733884}"/>
+              </a:ext>
+            </a:extLst>
+          </p:cNvPr>
+          <p:cNvGraphicFramePr>
+            <a:graphicFrameLocks noGrp="1"/>
+          </p:cNvGraphicFramePr>
+          <p:nvPr>
+            <p:ph idx="1"/>
+            <p:extLst>
+              <p:ext uri="{D42A27DB-BD31-4B8C-83A1-F6EECF244321}">
+                <p14:modId xmlns:p14="http://schemas.microsoft.com/office/powerpoint/2010/main" val="1216432367"/>
+              </p:ext>
+            </p:extLst>
+          </p:nvPr>
+        </p:nvGraphicFramePr>
+        <p:xfrm>
+          <a:off x="805068" y="1648929"/>
+          <a:ext cx="10504557" cy="4351338"/>
+        </p:xfrm>
+        <a:graphic>
+          <a:graphicData uri="http://schemas.openxmlformats.org/drawingml/2006/diagram">
+            <dgm:relIds xmlns:dgm="http://schemas.openxmlformats.org/drawingml/2006/diagram" xmlns:r="http://schemas.openxmlformats.org/officeDocument/2006/relationships" r:dm="rId2" r:lo="rId3" r:qs="rId4" r:cs="rId5"/>
+          </a:graphicData>
+        </a:graphic>
+      </p:graphicFrame>
+    </p:spTree>
+    <p:extLst>
+      <p:ext uri="{BB962C8B-B14F-4D97-AF65-F5344CB8AC3E}">
+        <p14:creationId xmlns:p14="http://schemas.microsoft.com/office/powerpoint/2010/main" val="3197113900"/>
       </p:ext>
     </p:extLst>
   </p:cSld>
@@ -12208,9 +11431,14 @@
           <a:lstStyle/>
           <a:p>
             <a:r>
-              <a:rPr lang="en-US" sz="2000"/>
-              <a:t>Create our own SDK</a:t>
+              <a:rPr lang="en-US" sz="2000" dirty="0"/>
+              <a:t>Migrate to Project </a:t>
             </a:r>
+            <a:r>
+              <a:rPr lang="en-US" sz="2000" dirty="0" err="1"/>
+              <a:t>AirSim</a:t>
+            </a:r>
+            <a:endParaRPr lang="en-US" sz="2000" dirty="0"/>
           </a:p>
           <a:p>
             <a:pPr lvl="1">
@@ -12218,44 +11446,33 @@
               <a:buChar char="o"/>
             </a:pPr>
             <a:r>
-              <a:rPr lang="en-US" sz="1600"/>
-              <a:t>This is was our biggest bottleneck for week 2 tasks</a:t>
+              <a:rPr lang="en-US" sz="1600" dirty="0"/>
+              <a:t>The Successor to Microsoft </a:t>
             </a:r>
-          </a:p>
-          <a:p>
-            <a:pPr lvl="1">
-              <a:buFont typeface="Courier New" panose="020B0604020202020204" pitchFamily="34" charset="0"/>
-              <a:buChar char="o"/>
+            <a:r>
+              <a:rPr lang="en-US" sz="1600" dirty="0" err="1"/>
+              <a:t>Airsim</a:t>
+            </a:r>
+            <a:r>
+              <a:rPr lang="en-US" sz="1600" dirty="0"/>
+              <a:t> Managed by IAMAI.</a:t>
+            </a:r>
+          </a:p>
+          <a:p>
+            <a:pPr marL="457200" lvl="1" indent="0">
+              <a:buNone/>
             </a:pPr>
             <a:r>
-              <a:rPr lang="en-US" sz="1600"/>
-              <a:t>The 3rd party SDK's are not going to work for this project and make the set up long and difficult.</a:t>
+              <a:rPr lang="en-US" sz="1600" dirty="0"/>
+              <a:t>That’s pretty much it!!</a:t>
             </a:r>
-          </a:p>
-          <a:p>
-            <a:r>
-              <a:rPr lang="en-US" sz="2000"/>
-              <a:t>Update meeting times</a:t>
-            </a:r>
-          </a:p>
-          <a:p>
-            <a:pPr lvl="1">
-              <a:buFont typeface="Courier New" panose="020B0604020202020204" pitchFamily="34" charset="0"/>
-              <a:buChar char="o"/>
-            </a:pPr>
-            <a:r>
-              <a:rPr lang="en-US" sz="1600"/>
-              <a:t>We need to work around balancing our meetings times a little better to make sure that we are able to get work done consistently.</a:t>
-            </a:r>
-          </a:p>
-          <a:p>
-            <a:endParaRPr lang="en-US" sz="2000"/>
+            <a:endParaRPr lang="en-US" sz="2000" dirty="0"/>
           </a:p>
           <a:p>
             <a:pPr marL="914400" lvl="2" indent="0">
               <a:buNone/>
             </a:pPr>
-            <a:endParaRPr lang="en-US" sz="1200"/>
+            <a:endParaRPr lang="en-US" sz="1200" dirty="0"/>
           </a:p>
         </p:txBody>
       </p:sp>

--- a/docs/Presentation/W03_ PRESENTATION.pptx
+++ b/docs/Presentation/W03_ PRESENTATION.pptx
@@ -4,16 +4,20 @@
   <p:sldMasterIdLst>
     <p:sldMasterId id="2147483648" r:id="rId1"/>
   </p:sldMasterIdLst>
+  <p:notesMasterIdLst>
+    <p:notesMasterId r:id="rId12"/>
+  </p:notesMasterIdLst>
   <p:sldIdLst>
     <p:sldId id="256" r:id="rId2"/>
-    <p:sldId id="257" r:id="rId3"/>
-    <p:sldId id="264" r:id="rId4"/>
-    <p:sldId id="265" r:id="rId5"/>
-    <p:sldId id="266" r:id="rId6"/>
-    <p:sldId id="267" r:id="rId7"/>
-    <p:sldId id="262" r:id="rId8"/>
-    <p:sldId id="268" r:id="rId9"/>
-    <p:sldId id="263" r:id="rId10"/>
+    <p:sldId id="269" r:id="rId3"/>
+    <p:sldId id="257" r:id="rId4"/>
+    <p:sldId id="264" r:id="rId5"/>
+    <p:sldId id="265" r:id="rId6"/>
+    <p:sldId id="266" r:id="rId7"/>
+    <p:sldId id="267" r:id="rId8"/>
+    <p:sldId id="262" r:id="rId9"/>
+    <p:sldId id="268" r:id="rId10"/>
+    <p:sldId id="263" r:id="rId11"/>
   </p:sldIdLst>
   <p:sldSz cx="12192000" cy="6858000"/>
   <p:notesSz cx="6858000" cy="9144000"/>
@@ -118,6 +122,16 @@
     </p:ext>
   </p:extLst>
 </p:presentation>
+</file>
+
+<file path=ppt/revisionInfo.xml><?xml version="1.0" encoding="utf-8"?>
+<p1510:revInfo xmlns:a="http://schemas.openxmlformats.org/drawingml/2006/main" xmlns:r="http://schemas.openxmlformats.org/officeDocument/2006/relationships" xmlns:p1510="http://schemas.microsoft.com/office/powerpoint/2015/10/main">
+  <p1510:revLst>
+    <p1510:client id="{0F02E22B-2938-1CE5-50F1-696537930C4A}" v="80" dt="2026-03-06T04:43:51.859"/>
+    <p1510:client id="{37F6E3F6-8C61-B786-F3F5-FE30B07C9369}" v="8" dt="2026-03-05T21:55:12.268"/>
+    <p1510:client id="{6FD5B777-F645-4985-B580-DB80F77370EF}" v="1008" dt="2026-03-06T15:22:24.922"/>
+  </p1510:revLst>
+</p1510:revInfo>
 </file>
 
 <file path=ppt/diagrams/colors1.xml><?xml version="1.0" encoding="utf-8"?>
@@ -1122,7 +1136,7 @@
               <a:ea typeface="+mn-ea"/>
               <a:cs typeface="+mn-cs"/>
             </a:rPr>
-            <a:t> </a:t>
+            <a:t> sdk</a:t>
           </a:r>
           <a:r>
             <a:rPr lang="en-US" sz="2300" dirty="0">
@@ -1133,7 +1147,7 @@
               <a:ea typeface="+mn-ea"/>
               <a:cs typeface="+mn-cs"/>
             </a:rPr>
-            <a:t>examples/00_sdk_smoke.py</a:t>
+            <a:t>/UserControl.py</a:t>
           </a:r>
         </a:p>
       </dgm:t>
@@ -1181,29 +1195,7 @@
               <a:ea typeface="+mn-ea"/>
               <a:cs typeface="+mn-cs"/>
             </a:rPr>
-            <a:t>3d Drone </a:t>
-          </a:r>
-          <a:r>
-            <a:rPr lang="en-US" sz="2300" dirty="0" err="1">
-              <a:solidFill>
-                <a:srgbClr val="FFFFFF"/>
-              </a:solidFill>
-              <a:latin typeface="Aptos" panose="02110004020202020204"/>
-              <a:ea typeface="+mn-ea"/>
-              <a:cs typeface="+mn-cs"/>
-            </a:rPr>
-            <a:t>Drone</a:t>
-          </a:r>
-          <a:r>
-            <a:rPr lang="en-US" sz="2300" dirty="0">
-              <a:solidFill>
-                <a:srgbClr val="FFFFFF"/>
-              </a:solidFill>
-              <a:latin typeface="Aptos" panose="02110004020202020204"/>
-              <a:ea typeface="+mn-ea"/>
-              <a:cs typeface="+mn-cs"/>
-            </a:rPr>
-            <a:t> Model inside Project</a:t>
+            <a:t>3d Drone Model inside Project</a:t>
           </a:r>
         </a:p>
       </dgm:t>
@@ -1247,20 +1239,12 @@
               <a:solidFill>
                 <a:srgbClr val="FFFFFF"/>
               </a:solidFill>
-              <a:latin typeface="Calibri"/>
-              <a:ea typeface="Calibri"/>
-              <a:cs typeface="Calibri"/>
+              <a:latin typeface="Aptos"/>
+              <a:ea typeface="+mn-ea"/>
+              <a:cs typeface="+mn-cs"/>
             </a:rPr>
-            <a:t>docs/PROTOCOL.md (updated to match implemented messages)</a:t>
+            <a:t>Updated docs/Protocols.md(to reflect actual implemented Messages)</a:t>
           </a:r>
-          <a:endParaRPr lang="en-US" sz="2300" dirty="0">
-            <a:solidFill>
-              <a:srgbClr val="FFFFFF"/>
-            </a:solidFill>
-            <a:latin typeface="Aptos"/>
-            <a:ea typeface="+mn-ea"/>
-            <a:cs typeface="+mn-cs"/>
-          </a:endParaRPr>
         </a:p>
       </dgm:t>
     </dgm:pt>
@@ -1286,6 +1270,168 @@
         </a:p>
       </dgm:t>
     </dgm:pt>
+    <dgm:pt modelId="{76735826-E973-4461-95C0-C88F512E1F7D}">
+      <dgm:prSet/>
+      <dgm:spPr/>
+      <dgm:t>
+        <a:bodyPr/>
+        <a:lstStyle/>
+        <a:p>
+          <a:r>
+            <a:rPr lang="en-US" dirty="0"/>
+            <a:t>runs/</a:t>
+          </a:r>
+          <a:r>
+            <a:rPr lang="en-US" dirty="0" err="1"/>
+            <a:t>startup.json</a:t>
+          </a:r>
+          <a:endParaRPr lang="en-US" dirty="0"/>
+        </a:p>
+      </dgm:t>
+    </dgm:pt>
+    <dgm:pt modelId="{325FEE33-6DCC-4A24-96BE-65C619733924}" type="parTrans" cxnId="{880DFB76-A4BB-40A8-A130-147D920A42E7}">
+      <dgm:prSet/>
+      <dgm:spPr/>
+      <dgm:t>
+        <a:bodyPr/>
+        <a:lstStyle/>
+        <a:p>
+          <a:endParaRPr lang="en-US"/>
+        </a:p>
+      </dgm:t>
+    </dgm:pt>
+    <dgm:pt modelId="{BC458653-EC3A-446F-A8BC-7146D0C59439}" type="sibTrans" cxnId="{880DFB76-A4BB-40A8-A130-147D920A42E7}">
+      <dgm:prSet/>
+      <dgm:spPr/>
+      <dgm:t>
+        <a:bodyPr/>
+        <a:lstStyle/>
+        <a:p>
+          <a:endParaRPr lang="en-US"/>
+        </a:p>
+      </dgm:t>
+    </dgm:pt>
+    <dgm:pt modelId="{137FAEC8-B1AE-4CD4-B6A8-733D8A1ACC53}">
+      <dgm:prSet/>
+      <dgm:spPr/>
+      <dgm:t>
+        <a:bodyPr/>
+        <a:lstStyle/>
+        <a:p>
+          <a:r>
+            <a:rPr lang="en-US" dirty="0"/>
+            <a:t>runs\RunCommands\Run_0_Commands.csv</a:t>
+          </a:r>
+        </a:p>
+      </dgm:t>
+    </dgm:pt>
+    <dgm:pt modelId="{36CADE9E-65BC-4619-B40B-114E367411DB}" type="parTrans" cxnId="{A8CE9A6E-0D91-4C90-9823-86AB45327262}">
+      <dgm:prSet/>
+      <dgm:spPr/>
+      <dgm:t>
+        <a:bodyPr/>
+        <a:lstStyle/>
+        <a:p>
+          <a:endParaRPr lang="en-US"/>
+        </a:p>
+      </dgm:t>
+    </dgm:pt>
+    <dgm:pt modelId="{A3717D95-2790-4DAC-9987-30BD92EC8288}" type="sibTrans" cxnId="{A8CE9A6E-0D91-4C90-9823-86AB45327262}">
+      <dgm:prSet/>
+      <dgm:spPr/>
+      <dgm:t>
+        <a:bodyPr/>
+        <a:lstStyle/>
+        <a:p>
+          <a:endParaRPr lang="en-US"/>
+        </a:p>
+      </dgm:t>
+    </dgm:pt>
+    <dgm:pt modelId="{CCFA23D5-5993-4ECA-BE3A-2DD40B250D1E}">
+      <dgm:prSet/>
+      <dgm:spPr/>
+      <dgm:t>
+        <a:bodyPr/>
+        <a:lstStyle/>
+        <a:p>
+          <a:r>
+            <a:rPr lang="en-US" dirty="0"/>
+            <a:t>Docs/presentations/W03_PRESENTATION.pptx</a:t>
+          </a:r>
+        </a:p>
+      </dgm:t>
+    </dgm:pt>
+    <dgm:pt modelId="{D68A4B32-0F07-466D-9BDF-7083AE5D2F79}" type="parTrans" cxnId="{76DB26C0-25FC-4866-9B56-B2C41B3752E9}">
+      <dgm:prSet/>
+      <dgm:spPr/>
+      <dgm:t>
+        <a:bodyPr/>
+        <a:lstStyle/>
+        <a:p>
+          <a:endParaRPr lang="en-US"/>
+        </a:p>
+      </dgm:t>
+    </dgm:pt>
+    <dgm:pt modelId="{5B706BBD-61DC-4B23-A214-3BEFAFEBF922}" type="sibTrans" cxnId="{76DB26C0-25FC-4866-9B56-B2C41B3752E9}">
+      <dgm:prSet/>
+      <dgm:spPr/>
+      <dgm:t>
+        <a:bodyPr/>
+        <a:lstStyle/>
+        <a:p>
+          <a:endParaRPr lang="en-US"/>
+        </a:p>
+      </dgm:t>
+    </dgm:pt>
+    <dgm:pt modelId="{B828D73F-8130-4B4F-9572-16B2864D18EE}">
+      <dgm:prSet/>
+      <dgm:spPr/>
+      <dgm:t>
+        <a:bodyPr/>
+        <a:lstStyle/>
+        <a:p>
+          <a:r>
+            <a:rPr lang="en-US" dirty="0"/>
+            <a:t>In </a:t>
+          </a:r>
+          <a:r>
+            <a:rPr lang="en-US" dirty="0" err="1"/>
+            <a:t>old_model</a:t>
+          </a:r>
+          <a:r>
+            <a:rPr lang="en-US" dirty="0"/>
+            <a:t> branch :  sim/Codrone4.27/TestAirSim3/Plugins/</a:t>
+          </a:r>
+          <a:r>
+            <a:rPr lang="en-US" dirty="0" err="1"/>
+            <a:t>Airsim</a:t>
+          </a:r>
+          <a:endParaRPr lang="en-US" dirty="0"/>
+        </a:p>
+      </dgm:t>
+    </dgm:pt>
+    <dgm:pt modelId="{2E9D0D4F-FC3B-4BF6-B8F4-FC81B54167F2}" type="parTrans" cxnId="{3FE91E9F-49EB-4162-BDEF-B12DA343CA8E}">
+      <dgm:prSet/>
+      <dgm:spPr/>
+      <dgm:t>
+        <a:bodyPr/>
+        <a:lstStyle/>
+        <a:p>
+          <a:endParaRPr lang="en-US"/>
+        </a:p>
+      </dgm:t>
+    </dgm:pt>
+    <dgm:pt modelId="{54E2FCC6-B156-4CDF-B5BF-6FC46BCEDC55}" type="sibTrans" cxnId="{3FE91E9F-49EB-4162-BDEF-B12DA343CA8E}">
+      <dgm:prSet/>
+      <dgm:spPr/>
+      <dgm:t>
+        <a:bodyPr/>
+        <a:lstStyle/>
+        <a:p>
+          <a:endParaRPr lang="en-US"/>
+        </a:p>
+      </dgm:t>
+    </dgm:pt>
     <dgm:pt modelId="{072A07C3-6AAB-445D-80A7-249A004FADB9}" type="pres">
       <dgm:prSet presAssocID="{08C5620D-152A-4AB9-9F1D-AACA858352D5}" presName="linear" presStyleCnt="0">
         <dgm:presLayoutVars>
@@ -1295,8 +1441,21 @@
       </dgm:prSet>
       <dgm:spPr/>
     </dgm:pt>
+    <dgm:pt modelId="{75A111A7-2BD5-4054-BB07-59677DF236E4}" type="pres">
+      <dgm:prSet presAssocID="{CCFA23D5-5993-4ECA-BE3A-2DD40B250D1E}" presName="parentText" presStyleLbl="node1" presStyleIdx="0" presStyleCnt="8">
+        <dgm:presLayoutVars>
+          <dgm:chMax val="0"/>
+          <dgm:bulletEnabled val="1"/>
+        </dgm:presLayoutVars>
+      </dgm:prSet>
+      <dgm:spPr/>
+    </dgm:pt>
+    <dgm:pt modelId="{2BE242A3-E831-4DCE-B383-B4B2C076C70C}" type="pres">
+      <dgm:prSet presAssocID="{5B706BBD-61DC-4B23-A214-3BEFAFEBF922}" presName="spacer" presStyleCnt="0"/>
+      <dgm:spPr/>
+    </dgm:pt>
     <dgm:pt modelId="{8694ED8D-E215-4D76-857D-83338FC1B4B1}" type="pres">
-      <dgm:prSet presAssocID="{365D7F74-FFE5-482B-9D98-39CA7CA0513A}" presName="parentText" presStyleLbl="node1" presStyleIdx="0" presStyleCnt="4">
+      <dgm:prSet presAssocID="{365D7F74-FFE5-482B-9D98-39CA7CA0513A}" presName="parentText" presStyleLbl="node1" presStyleIdx="1" presStyleCnt="8">
         <dgm:presLayoutVars>
           <dgm:chMax val="0"/>
           <dgm:bulletEnabled val="1"/>
@@ -1308,8 +1467,47 @@
       <dgm:prSet presAssocID="{21339A53-A261-43CF-94D6-54DE839026A4}" presName="spacer" presStyleCnt="0"/>
       <dgm:spPr/>
     </dgm:pt>
+    <dgm:pt modelId="{4004F0E0-14BC-409F-9C52-0E8B2F1B625F}" type="pres">
+      <dgm:prSet presAssocID="{137FAEC8-B1AE-4CD4-B6A8-733D8A1ACC53}" presName="parentText" presStyleLbl="node1" presStyleIdx="2" presStyleCnt="8">
+        <dgm:presLayoutVars>
+          <dgm:chMax val="0"/>
+          <dgm:bulletEnabled val="1"/>
+        </dgm:presLayoutVars>
+      </dgm:prSet>
+      <dgm:spPr/>
+    </dgm:pt>
+    <dgm:pt modelId="{42DB485E-0DA8-48DB-8A88-EB16A33EEEF7}" type="pres">
+      <dgm:prSet presAssocID="{A3717D95-2790-4DAC-9987-30BD92EC8288}" presName="spacer" presStyleCnt="0"/>
+      <dgm:spPr/>
+    </dgm:pt>
+    <dgm:pt modelId="{13E21948-DA44-46B3-AA3C-E6B0F852DB03}" type="pres">
+      <dgm:prSet presAssocID="{B828D73F-8130-4B4F-9572-16B2864D18EE}" presName="parentText" presStyleLbl="node1" presStyleIdx="3" presStyleCnt="8">
+        <dgm:presLayoutVars>
+          <dgm:chMax val="0"/>
+          <dgm:bulletEnabled val="1"/>
+        </dgm:presLayoutVars>
+      </dgm:prSet>
+      <dgm:spPr/>
+    </dgm:pt>
+    <dgm:pt modelId="{12924ED0-FEEA-4DCA-93F7-80556D2D11BE}" type="pres">
+      <dgm:prSet presAssocID="{54E2FCC6-B156-4CDF-B5BF-6FC46BCEDC55}" presName="spacer" presStyleCnt="0"/>
+      <dgm:spPr/>
+    </dgm:pt>
+    <dgm:pt modelId="{C382A85B-1FCD-4742-AEFF-AABAB6C07C4A}" type="pres">
+      <dgm:prSet presAssocID="{76735826-E973-4461-95C0-C88F512E1F7D}" presName="parentText" presStyleLbl="node1" presStyleIdx="4" presStyleCnt="8">
+        <dgm:presLayoutVars>
+          <dgm:chMax val="0"/>
+          <dgm:bulletEnabled val="1"/>
+        </dgm:presLayoutVars>
+      </dgm:prSet>
+      <dgm:spPr/>
+    </dgm:pt>
+    <dgm:pt modelId="{0E9CEE8A-2854-446B-9641-7A6097802030}" type="pres">
+      <dgm:prSet presAssocID="{BC458653-EC3A-446F-A8BC-7146D0C59439}" presName="spacer" presStyleCnt="0"/>
+      <dgm:spPr/>
+    </dgm:pt>
     <dgm:pt modelId="{6D8FE49D-26DA-4425-8C7E-DCE94839AD71}" type="pres">
-      <dgm:prSet presAssocID="{EBC24022-F74C-44D4-B421-78DBA0FDC453}" presName="parentText" presStyleLbl="node1" presStyleIdx="1" presStyleCnt="4">
+      <dgm:prSet presAssocID="{EBC24022-F74C-44D4-B421-78DBA0FDC453}" presName="parentText" presStyleLbl="node1" presStyleIdx="5" presStyleCnt="8">
         <dgm:presLayoutVars>
           <dgm:chMax val="0"/>
           <dgm:bulletEnabled val="1"/>
@@ -1322,7 +1520,7 @@
       <dgm:spPr/>
     </dgm:pt>
     <dgm:pt modelId="{09E87734-5520-49F9-A61A-7BFE46AABF34}" type="pres">
-      <dgm:prSet presAssocID="{EDCA3F4A-F7A1-4D91-BF3B-FA626C83CB10}" presName="parentText" presStyleLbl="node1" presStyleIdx="2" presStyleCnt="4">
+      <dgm:prSet presAssocID="{EDCA3F4A-F7A1-4D91-BF3B-FA626C83CB10}" presName="parentText" presStyleLbl="node1" presStyleIdx="6" presStyleCnt="8">
         <dgm:presLayoutVars>
           <dgm:chMax val="0"/>
           <dgm:bulletEnabled val="1"/>
@@ -1335,7 +1533,7 @@
       <dgm:spPr/>
     </dgm:pt>
     <dgm:pt modelId="{8668C22C-39F1-4F13-A3C8-96243DD7C753}" type="pres">
-      <dgm:prSet presAssocID="{F4127BAC-F723-4BA7-9F31-71AEC6B631B0}" presName="parentText" presStyleLbl="node1" presStyleIdx="3" presStyleCnt="4">
+      <dgm:prSet presAssocID="{F4127BAC-F723-4BA7-9F31-71AEC6B631B0}" presName="parentText" presStyleLbl="node1" presStyleIdx="7" presStyleCnt="8">
         <dgm:presLayoutVars>
           <dgm:chMax val="0"/>
           <dgm:bulletEnabled val="1"/>
@@ -1345,22 +1543,38 @@
     </dgm:pt>
   </dgm:ptLst>
   <dgm:cxnLst>
-    <dgm:cxn modelId="{22274311-C138-44AB-B457-6F9EB8D5C2D4}" type="presOf" srcId="{EBC24022-F74C-44D4-B421-78DBA0FDC453}" destId="{6D8FE49D-26DA-4425-8C7E-DCE94839AD71}" srcOrd="0" destOrd="0" presId="urn:microsoft.com/office/officeart/2005/8/layout/vList2"/>
-    <dgm:cxn modelId="{18AB071C-64FA-45F1-B389-C0C680F20A45}" srcId="{08C5620D-152A-4AB9-9F1D-AACA858352D5}" destId="{F4127BAC-F723-4BA7-9F31-71AEC6B631B0}" srcOrd="3" destOrd="0" parTransId="{2755F71C-25C3-42FA-864F-0C3C8AFBE3C4}" sibTransId="{558E3C29-084D-4F27-83BF-79C3E09C0562}"/>
-    <dgm:cxn modelId="{43C3301C-6277-4228-9AF5-835ADEB7A39C}" srcId="{08C5620D-152A-4AB9-9F1D-AACA858352D5}" destId="{365D7F74-FFE5-482B-9D98-39CA7CA0513A}" srcOrd="0" destOrd="0" parTransId="{D17DA32A-B04F-4970-8E9F-C0DF6828DE5B}" sibTransId="{21339A53-A261-43CF-94D6-54DE839026A4}"/>
-    <dgm:cxn modelId="{1EA71A30-8CEE-4080-870A-60B941815164}" srcId="{08C5620D-152A-4AB9-9F1D-AACA858352D5}" destId="{EBC24022-F74C-44D4-B421-78DBA0FDC453}" srcOrd="1" destOrd="0" parTransId="{2DC771CA-2899-4F94-89F6-EED97E2DB446}" sibTransId="{649E8D30-3117-4174-9932-2B174D813E15}"/>
-    <dgm:cxn modelId="{A639098A-624F-4F4A-A760-59486A9A725E}" type="presOf" srcId="{365D7F74-FFE5-482B-9D98-39CA7CA0513A}" destId="{8694ED8D-E215-4D76-857D-83338FC1B4B1}" srcOrd="0" destOrd="0" presId="urn:microsoft.com/office/officeart/2005/8/layout/vList2"/>
-    <dgm:cxn modelId="{7191409F-7EDE-45BD-A6B4-8BA1BDABB0E3}" srcId="{08C5620D-152A-4AB9-9F1D-AACA858352D5}" destId="{EDCA3F4A-F7A1-4D91-BF3B-FA626C83CB10}" srcOrd="2" destOrd="0" parTransId="{E9693187-5B17-43E3-BA6E-69E9E9BEF533}" sibTransId="{7961C441-2E7D-4507-84CE-4BCD89F89971}"/>
+    <dgm:cxn modelId="{18AB071C-64FA-45F1-B389-C0C680F20A45}" srcId="{08C5620D-152A-4AB9-9F1D-AACA858352D5}" destId="{F4127BAC-F723-4BA7-9F31-71AEC6B631B0}" srcOrd="7" destOrd="0" parTransId="{2755F71C-25C3-42FA-864F-0C3C8AFBE3C4}" sibTransId="{558E3C29-084D-4F27-83BF-79C3E09C0562}"/>
+    <dgm:cxn modelId="{43C3301C-6277-4228-9AF5-835ADEB7A39C}" srcId="{08C5620D-152A-4AB9-9F1D-AACA858352D5}" destId="{365D7F74-FFE5-482B-9D98-39CA7CA0513A}" srcOrd="1" destOrd="0" parTransId="{D17DA32A-B04F-4970-8E9F-C0DF6828DE5B}" sibTransId="{21339A53-A261-43CF-94D6-54DE839026A4}"/>
+    <dgm:cxn modelId="{1EA71A30-8CEE-4080-870A-60B941815164}" srcId="{08C5620D-152A-4AB9-9F1D-AACA858352D5}" destId="{EBC24022-F74C-44D4-B421-78DBA0FDC453}" srcOrd="5" destOrd="0" parTransId="{2DC771CA-2899-4F94-89F6-EED97E2DB446}" sibTransId="{649E8D30-3117-4174-9932-2B174D813E15}"/>
+    <dgm:cxn modelId="{A8CE9A6E-0D91-4C90-9823-86AB45327262}" srcId="{08C5620D-152A-4AB9-9F1D-AACA858352D5}" destId="{137FAEC8-B1AE-4CD4-B6A8-733D8A1ACC53}" srcOrd="2" destOrd="0" parTransId="{36CADE9E-65BC-4619-B40B-114E367411DB}" sibTransId="{A3717D95-2790-4DAC-9987-30BD92EC8288}"/>
+    <dgm:cxn modelId="{880DFB76-A4BB-40A8-A130-147D920A42E7}" srcId="{08C5620D-152A-4AB9-9F1D-AACA858352D5}" destId="{76735826-E973-4461-95C0-C88F512E1F7D}" srcOrd="4" destOrd="0" parTransId="{325FEE33-6DCC-4A24-96BE-65C619733924}" sibTransId="{BC458653-EC3A-446F-A8BC-7146D0C59439}"/>
+    <dgm:cxn modelId="{EBA0B359-4E79-4C71-9884-7B591C3021B6}" type="presOf" srcId="{CCFA23D5-5993-4ECA-BE3A-2DD40B250D1E}" destId="{75A111A7-2BD5-4054-BB07-59677DF236E4}" srcOrd="0" destOrd="0" presId="urn:microsoft.com/office/officeart/2005/8/layout/vList2"/>
+    <dgm:cxn modelId="{78B23495-9A6C-44A6-B9A1-1D8DF2F1B3EC}" type="presOf" srcId="{137FAEC8-B1AE-4CD4-B6A8-733D8A1ACC53}" destId="{4004F0E0-14BC-409F-9C52-0E8B2F1B625F}" srcOrd="0" destOrd="0" presId="urn:microsoft.com/office/officeart/2005/8/layout/vList2"/>
+    <dgm:cxn modelId="{F197CD99-8F8F-4E64-AC74-206CE65732ED}" type="presOf" srcId="{EDCA3F4A-F7A1-4D91-BF3B-FA626C83CB10}" destId="{09E87734-5520-49F9-A61A-7BFE46AABF34}" srcOrd="0" destOrd="0" presId="urn:microsoft.com/office/officeart/2005/8/layout/vList2"/>
+    <dgm:cxn modelId="{3FE91E9F-49EB-4162-BDEF-B12DA343CA8E}" srcId="{08C5620D-152A-4AB9-9F1D-AACA858352D5}" destId="{B828D73F-8130-4B4F-9572-16B2864D18EE}" srcOrd="3" destOrd="0" parTransId="{2E9D0D4F-FC3B-4BF6-B8F4-FC81B54167F2}" sibTransId="{54E2FCC6-B156-4CDF-B5BF-6FC46BCEDC55}"/>
+    <dgm:cxn modelId="{7191409F-7EDE-45BD-A6B4-8BA1BDABB0E3}" srcId="{08C5620D-152A-4AB9-9F1D-AACA858352D5}" destId="{EDCA3F4A-F7A1-4D91-BF3B-FA626C83CB10}" srcOrd="6" destOrd="0" parTransId="{E9693187-5B17-43E3-BA6E-69E9E9BEF533}" sibTransId="{7961C441-2E7D-4507-84CE-4BCD89F89971}"/>
+    <dgm:cxn modelId="{6CF80AA3-1D41-4A35-B543-79146A83F2DB}" type="presOf" srcId="{EBC24022-F74C-44D4-B421-78DBA0FDC453}" destId="{6D8FE49D-26DA-4425-8C7E-DCE94839AD71}" srcOrd="0" destOrd="0" presId="urn:microsoft.com/office/officeart/2005/8/layout/vList2"/>
+    <dgm:cxn modelId="{52F7C1AF-C0B0-4A69-B1BF-C295E5BD72CA}" type="presOf" srcId="{365D7F74-FFE5-482B-9D98-39CA7CA0513A}" destId="{8694ED8D-E215-4D76-857D-83338FC1B4B1}" srcOrd="0" destOrd="0" presId="urn:microsoft.com/office/officeart/2005/8/layout/vList2"/>
     <dgm:cxn modelId="{397ECAB7-B016-4663-B04D-F0803B2B1935}" type="presOf" srcId="{08C5620D-152A-4AB9-9F1D-AACA858352D5}" destId="{072A07C3-6AAB-445D-80A7-249A004FADB9}" srcOrd="0" destOrd="0" presId="urn:microsoft.com/office/officeart/2005/8/layout/vList2"/>
-    <dgm:cxn modelId="{5FDCBEBE-0F92-47F6-9645-C56D7B959E67}" type="presOf" srcId="{F4127BAC-F723-4BA7-9F31-71AEC6B631B0}" destId="{8668C22C-39F1-4F13-A3C8-96243DD7C753}" srcOrd="0" destOrd="0" presId="urn:microsoft.com/office/officeart/2005/8/layout/vList2"/>
-    <dgm:cxn modelId="{7D1DBCEA-D836-4A8E-9475-061860F61421}" type="presOf" srcId="{EDCA3F4A-F7A1-4D91-BF3B-FA626C83CB10}" destId="{09E87734-5520-49F9-A61A-7BFE46AABF34}" srcOrd="0" destOrd="0" presId="urn:microsoft.com/office/officeart/2005/8/layout/vList2"/>
-    <dgm:cxn modelId="{68659AF1-62BB-488A-8C0D-9958A8C76943}" type="presParOf" srcId="{072A07C3-6AAB-445D-80A7-249A004FADB9}" destId="{8694ED8D-E215-4D76-857D-83338FC1B4B1}" srcOrd="0" destOrd="0" presId="urn:microsoft.com/office/officeart/2005/8/layout/vList2"/>
-    <dgm:cxn modelId="{3A81852A-F371-43F4-831D-275D1B78AFD1}" type="presParOf" srcId="{072A07C3-6AAB-445D-80A7-249A004FADB9}" destId="{EA64E464-7D77-455D-ACFC-01A130F78390}" srcOrd="1" destOrd="0" presId="urn:microsoft.com/office/officeart/2005/8/layout/vList2"/>
-    <dgm:cxn modelId="{0DDC444E-995D-4085-99AA-06C2BBC5C1EE}" type="presParOf" srcId="{072A07C3-6AAB-445D-80A7-249A004FADB9}" destId="{6D8FE49D-26DA-4425-8C7E-DCE94839AD71}" srcOrd="2" destOrd="0" presId="urn:microsoft.com/office/officeart/2005/8/layout/vList2"/>
-    <dgm:cxn modelId="{8C67D8E3-129C-4D72-94C9-70033AD1067C}" type="presParOf" srcId="{072A07C3-6AAB-445D-80A7-249A004FADB9}" destId="{6AB7D1FF-0E3B-4C3F-BD9E-BCB7095F48F1}" srcOrd="3" destOrd="0" presId="urn:microsoft.com/office/officeart/2005/8/layout/vList2"/>
-    <dgm:cxn modelId="{FF574833-8003-466B-9A1B-C2633A7E40F5}" type="presParOf" srcId="{072A07C3-6AAB-445D-80A7-249A004FADB9}" destId="{09E87734-5520-49F9-A61A-7BFE46AABF34}" srcOrd="4" destOrd="0" presId="urn:microsoft.com/office/officeart/2005/8/layout/vList2"/>
-    <dgm:cxn modelId="{5E9B9D1B-8F89-482D-BBF4-6005D6416C85}" type="presParOf" srcId="{072A07C3-6AAB-445D-80A7-249A004FADB9}" destId="{BE705CF8-4BBE-4F21-8F4A-F7B329CA02E3}" srcOrd="5" destOrd="0" presId="urn:microsoft.com/office/officeart/2005/8/layout/vList2"/>
-    <dgm:cxn modelId="{DAB782EE-45E3-4719-86AA-1F45A9F159B3}" type="presParOf" srcId="{072A07C3-6AAB-445D-80A7-249A004FADB9}" destId="{8668C22C-39F1-4F13-A3C8-96243DD7C753}" srcOrd="6" destOrd="0" presId="urn:microsoft.com/office/officeart/2005/8/layout/vList2"/>
+    <dgm:cxn modelId="{FC269EB8-E7BD-49A0-A569-CE61E35AE8B1}" type="presOf" srcId="{F4127BAC-F723-4BA7-9F31-71AEC6B631B0}" destId="{8668C22C-39F1-4F13-A3C8-96243DD7C753}" srcOrd="0" destOrd="0" presId="urn:microsoft.com/office/officeart/2005/8/layout/vList2"/>
+    <dgm:cxn modelId="{A7D068BE-3F4B-4DF9-8382-2F38ECAC692B}" type="presOf" srcId="{B828D73F-8130-4B4F-9572-16B2864D18EE}" destId="{13E21948-DA44-46B3-AA3C-E6B0F852DB03}" srcOrd="0" destOrd="0" presId="urn:microsoft.com/office/officeart/2005/8/layout/vList2"/>
+    <dgm:cxn modelId="{76DB26C0-25FC-4866-9B56-B2C41B3752E9}" srcId="{08C5620D-152A-4AB9-9F1D-AACA858352D5}" destId="{CCFA23D5-5993-4ECA-BE3A-2DD40B250D1E}" srcOrd="0" destOrd="0" parTransId="{D68A4B32-0F07-466D-9BDF-7083AE5D2F79}" sibTransId="{5B706BBD-61DC-4B23-A214-3BEFAFEBF922}"/>
+    <dgm:cxn modelId="{4086CBED-1FE7-4FD8-B47C-085AA9E39C11}" type="presOf" srcId="{76735826-E973-4461-95C0-C88F512E1F7D}" destId="{C382A85B-1FCD-4742-AEFF-AABAB6C07C4A}" srcOrd="0" destOrd="0" presId="urn:microsoft.com/office/officeart/2005/8/layout/vList2"/>
+    <dgm:cxn modelId="{923D6590-C226-4471-B031-E45873686BE4}" type="presParOf" srcId="{072A07C3-6AAB-445D-80A7-249A004FADB9}" destId="{75A111A7-2BD5-4054-BB07-59677DF236E4}" srcOrd="0" destOrd="0" presId="urn:microsoft.com/office/officeart/2005/8/layout/vList2"/>
+    <dgm:cxn modelId="{E6C378E4-13AD-4EDD-AD57-C7A7B00D9EBD}" type="presParOf" srcId="{072A07C3-6AAB-445D-80A7-249A004FADB9}" destId="{2BE242A3-E831-4DCE-B383-B4B2C076C70C}" srcOrd="1" destOrd="0" presId="urn:microsoft.com/office/officeart/2005/8/layout/vList2"/>
+    <dgm:cxn modelId="{6A708BA2-6045-4FDD-AA29-FFCCDA44998A}" type="presParOf" srcId="{072A07C3-6AAB-445D-80A7-249A004FADB9}" destId="{8694ED8D-E215-4D76-857D-83338FC1B4B1}" srcOrd="2" destOrd="0" presId="urn:microsoft.com/office/officeart/2005/8/layout/vList2"/>
+    <dgm:cxn modelId="{BE2EA13B-EC5A-4247-8A38-287106749BD6}" type="presParOf" srcId="{072A07C3-6AAB-445D-80A7-249A004FADB9}" destId="{EA64E464-7D77-455D-ACFC-01A130F78390}" srcOrd="3" destOrd="0" presId="urn:microsoft.com/office/officeart/2005/8/layout/vList2"/>
+    <dgm:cxn modelId="{91E85F48-156E-4469-A089-4BAFE4D9034E}" type="presParOf" srcId="{072A07C3-6AAB-445D-80A7-249A004FADB9}" destId="{4004F0E0-14BC-409F-9C52-0E8B2F1B625F}" srcOrd="4" destOrd="0" presId="urn:microsoft.com/office/officeart/2005/8/layout/vList2"/>
+    <dgm:cxn modelId="{B02E6483-66A6-4D07-AD61-3741C1282C74}" type="presParOf" srcId="{072A07C3-6AAB-445D-80A7-249A004FADB9}" destId="{42DB485E-0DA8-48DB-8A88-EB16A33EEEF7}" srcOrd="5" destOrd="0" presId="urn:microsoft.com/office/officeart/2005/8/layout/vList2"/>
+    <dgm:cxn modelId="{92FCE666-A810-4E42-BB87-DBFA50F65A93}" type="presParOf" srcId="{072A07C3-6AAB-445D-80A7-249A004FADB9}" destId="{13E21948-DA44-46B3-AA3C-E6B0F852DB03}" srcOrd="6" destOrd="0" presId="urn:microsoft.com/office/officeart/2005/8/layout/vList2"/>
+    <dgm:cxn modelId="{2E4EC03E-3E1D-485F-8671-3AD6FA2D1225}" type="presParOf" srcId="{072A07C3-6AAB-445D-80A7-249A004FADB9}" destId="{12924ED0-FEEA-4DCA-93F7-80556D2D11BE}" srcOrd="7" destOrd="0" presId="urn:microsoft.com/office/officeart/2005/8/layout/vList2"/>
+    <dgm:cxn modelId="{2F18F362-EA30-4177-9DC9-266E5CC78369}" type="presParOf" srcId="{072A07C3-6AAB-445D-80A7-249A004FADB9}" destId="{C382A85B-1FCD-4742-AEFF-AABAB6C07C4A}" srcOrd="8" destOrd="0" presId="urn:microsoft.com/office/officeart/2005/8/layout/vList2"/>
+    <dgm:cxn modelId="{CCCE3095-4C37-41D0-883E-63128D07B577}" type="presParOf" srcId="{072A07C3-6AAB-445D-80A7-249A004FADB9}" destId="{0E9CEE8A-2854-446B-9641-7A6097802030}" srcOrd="9" destOrd="0" presId="urn:microsoft.com/office/officeart/2005/8/layout/vList2"/>
+    <dgm:cxn modelId="{1A9026EE-8667-4188-88EC-C3669312C19A}" type="presParOf" srcId="{072A07C3-6AAB-445D-80A7-249A004FADB9}" destId="{6D8FE49D-26DA-4425-8C7E-DCE94839AD71}" srcOrd="10" destOrd="0" presId="urn:microsoft.com/office/officeart/2005/8/layout/vList2"/>
+    <dgm:cxn modelId="{F877F8E9-F50E-490D-AAE4-F11B8AE5FD07}" type="presParOf" srcId="{072A07C3-6AAB-445D-80A7-249A004FADB9}" destId="{6AB7D1FF-0E3B-4C3F-BD9E-BCB7095F48F1}" srcOrd="11" destOrd="0" presId="urn:microsoft.com/office/officeart/2005/8/layout/vList2"/>
+    <dgm:cxn modelId="{76AC8752-62F9-41C7-BD22-2FD4975BE378}" type="presParOf" srcId="{072A07C3-6AAB-445D-80A7-249A004FADB9}" destId="{09E87734-5520-49F9-A61A-7BFE46AABF34}" srcOrd="12" destOrd="0" presId="urn:microsoft.com/office/officeart/2005/8/layout/vList2"/>
+    <dgm:cxn modelId="{FC938905-F889-414A-B51E-4E8F86E635FE}" type="presParOf" srcId="{072A07C3-6AAB-445D-80A7-249A004FADB9}" destId="{BE705CF8-4BBE-4F21-8F4A-F7B329CA02E3}" srcOrd="13" destOrd="0" presId="urn:microsoft.com/office/officeart/2005/8/layout/vList2"/>
+    <dgm:cxn modelId="{1D51B0D5-3FAC-455A-B926-26D613869CA2}" type="presParOf" srcId="{072A07C3-6AAB-445D-80A7-249A004FADB9}" destId="{8668C22C-39F1-4F13-A3C8-96243DD7C753}" srcOrd="14" destOrd="0" presId="urn:microsoft.com/office/officeart/2005/8/layout/vList2"/>
   </dgm:cxnLst>
   <dgm:bg/>
   <dgm:whole/>
@@ -1380,15 +1594,15 @@
       <dsp:cNvGrpSpPr/>
     </dsp:nvGrpSpPr>
     <dsp:grpSpPr/>
-    <dsp:sp modelId="{8694ED8D-E215-4D76-857D-83338FC1B4B1}">
+    <dsp:sp modelId="{75A111A7-2BD5-4054-BB07-59677DF236E4}">
       <dsp:nvSpPr>
         <dsp:cNvPr id="0" name=""/>
         <dsp:cNvSpPr/>
       </dsp:nvSpPr>
       <dsp:spPr>
         <a:xfrm>
-          <a:off x="0" y="571869"/>
-          <a:ext cx="10504557" cy="737099"/>
+          <a:off x="0" y="8469"/>
+          <a:ext cx="10504557" cy="491400"/>
         </a:xfrm>
         <a:prstGeom prst="roundRect">
           <a:avLst/>
@@ -1457,12 +1671,12 @@
         </a:fontRef>
       </dsp:style>
       <dsp:txBody>
-        <a:bodyPr spcFirstLastPara="0" vert="horz" wrap="square" lIns="114300" tIns="114300" rIns="114300" bIns="114300" numCol="1" spcCol="1270" anchor="ctr" anchorCtr="0">
+        <a:bodyPr spcFirstLastPara="0" vert="horz" wrap="square" lIns="76200" tIns="76200" rIns="76200" bIns="76200" numCol="1" spcCol="1270" anchor="ctr" anchorCtr="0">
           <a:noAutofit/>
         </a:bodyPr>
         <a:lstStyle/>
         <a:p>
-          <a:pPr marL="0" lvl="0" indent="0" algn="l" defTabSz="1333500">
+          <a:pPr marL="0" lvl="0" indent="0" algn="l" defTabSz="889000">
             <a:lnSpc>
               <a:spcPct val="90000"/>
             </a:lnSpc>
@@ -1475,32 +1689,25 @@
             <a:buNone/>
           </a:pPr>
           <a:r>
-            <a:rPr lang="en-US" sz="3000" kern="1200" dirty="0">
-              <a:solidFill>
-                <a:srgbClr val="FFFFFF"/>
-              </a:solidFill>
-              <a:latin typeface="Aptos" panose="02110004020202020204"/>
-              <a:ea typeface="+mn-ea"/>
-              <a:cs typeface="+mn-cs"/>
-            </a:rPr>
-            <a:t>docs/sprints/W03/plan.md</a:t>
+            <a:rPr lang="en-US" sz="2000" kern="1200" dirty="0"/>
+            <a:t>Docs/presentations/W03_PRESENTATION.pptx</a:t>
           </a:r>
         </a:p>
       </dsp:txBody>
       <dsp:txXfrm>
-        <a:off x="35982" y="607851"/>
-        <a:ext cx="10432593" cy="665135"/>
+        <a:off x="23988" y="32457"/>
+        <a:ext cx="10456581" cy="443424"/>
       </dsp:txXfrm>
     </dsp:sp>
-    <dsp:sp modelId="{6D8FE49D-26DA-4425-8C7E-DCE94839AD71}">
+    <dsp:sp modelId="{8694ED8D-E215-4D76-857D-83338FC1B4B1}">
       <dsp:nvSpPr>
         <dsp:cNvPr id="0" name=""/>
         <dsp:cNvSpPr/>
       </dsp:nvSpPr>
       <dsp:spPr>
         <a:xfrm>
-          <a:off x="0" y="1395369"/>
-          <a:ext cx="10504557" cy="737099"/>
+          <a:off x="0" y="557469"/>
+          <a:ext cx="10504557" cy="491400"/>
         </a:xfrm>
         <a:prstGeom prst="roundRect">
           <a:avLst/>
@@ -1569,12 +1776,12 @@
         </a:fontRef>
       </dsp:style>
       <dsp:txBody>
-        <a:bodyPr spcFirstLastPara="0" vert="horz" wrap="square" lIns="114300" tIns="114300" rIns="114300" bIns="114300" numCol="1" spcCol="1270" anchor="ctr" anchorCtr="0">
+        <a:bodyPr spcFirstLastPara="0" vert="horz" wrap="square" lIns="76200" tIns="76200" rIns="76200" bIns="76200" numCol="1" spcCol="1270" anchor="ctr" anchorCtr="0">
           <a:noAutofit/>
         </a:bodyPr>
         <a:lstStyle/>
         <a:p>
-          <a:pPr marL="0" lvl="0" indent="0" algn="l" defTabSz="1333500">
+          <a:pPr marL="0" lvl="0" indent="0" algn="l" defTabSz="889000">
             <a:lnSpc>
               <a:spcPct val="90000"/>
             </a:lnSpc>
@@ -1587,7 +1794,7 @@
             <a:buNone/>
           </a:pPr>
           <a:r>
-            <a:rPr lang="en-US" sz="3000" b="1" kern="1200" dirty="0">
+            <a:rPr lang="en-US" sz="2000" kern="1200" dirty="0">
               <a:solidFill>
                 <a:srgbClr val="FFFFFF"/>
               </a:solidFill>
@@ -1595,35 +1802,24 @@
               <a:ea typeface="+mn-ea"/>
               <a:cs typeface="+mn-cs"/>
             </a:rPr>
-            <a:t> </a:t>
-          </a:r>
-          <a:r>
-            <a:rPr lang="en-US" sz="3000" kern="1200" dirty="0">
-              <a:solidFill>
-                <a:srgbClr val="FFFFFF"/>
-              </a:solidFill>
-              <a:latin typeface="Aptos" panose="02110004020202020204"/>
-              <a:ea typeface="+mn-ea"/>
-              <a:cs typeface="+mn-cs"/>
-            </a:rPr>
-            <a:t>examples/00_sdk_smoke.py</a:t>
+            <a:t>docs/sprints/W03/plan.md</a:t>
           </a:r>
         </a:p>
       </dsp:txBody>
       <dsp:txXfrm>
-        <a:off x="35982" y="1431351"/>
-        <a:ext cx="10432593" cy="665135"/>
+        <a:off x="23988" y="581457"/>
+        <a:ext cx="10456581" cy="443424"/>
       </dsp:txXfrm>
     </dsp:sp>
-    <dsp:sp modelId="{09E87734-5520-49F9-A61A-7BFE46AABF34}">
+    <dsp:sp modelId="{4004F0E0-14BC-409F-9C52-0E8B2F1B625F}">
       <dsp:nvSpPr>
         <dsp:cNvPr id="0" name=""/>
         <dsp:cNvSpPr/>
       </dsp:nvSpPr>
       <dsp:spPr>
         <a:xfrm>
-          <a:off x="0" y="2218869"/>
-          <a:ext cx="10504557" cy="737099"/>
+          <a:off x="0" y="1106469"/>
+          <a:ext cx="10504557" cy="491400"/>
         </a:xfrm>
         <a:prstGeom prst="roundRect">
           <a:avLst/>
@@ -1692,12 +1888,12 @@
         </a:fontRef>
       </dsp:style>
       <dsp:txBody>
-        <a:bodyPr spcFirstLastPara="0" vert="horz" wrap="square" lIns="114300" tIns="114300" rIns="114300" bIns="114300" numCol="1" spcCol="1270" anchor="ctr" anchorCtr="0">
+        <a:bodyPr spcFirstLastPara="0" vert="horz" wrap="square" lIns="76200" tIns="76200" rIns="76200" bIns="76200" numCol="1" spcCol="1270" anchor="ctr" anchorCtr="0">
           <a:noAutofit/>
         </a:bodyPr>
         <a:lstStyle/>
         <a:p>
-          <a:pPr marL="0" lvl="0" indent="0" algn="l" defTabSz="1333500">
+          <a:pPr marL="0" lvl="0" indent="0" algn="l" defTabSz="889000">
             <a:lnSpc>
               <a:spcPct val="90000"/>
             </a:lnSpc>
@@ -1710,54 +1906,25 @@
             <a:buNone/>
           </a:pPr>
           <a:r>
-            <a:rPr lang="en-US" sz="3000" kern="1200" dirty="0">
-              <a:solidFill>
-                <a:srgbClr val="FFFFFF"/>
-              </a:solidFill>
-              <a:latin typeface="Aptos" panose="02110004020202020204"/>
-              <a:ea typeface="+mn-ea"/>
-              <a:cs typeface="+mn-cs"/>
-            </a:rPr>
-            <a:t>3d Drone </a:t>
-          </a:r>
-          <a:r>
-            <a:rPr lang="en-US" sz="3000" kern="1200" dirty="0" err="1">
-              <a:solidFill>
-                <a:srgbClr val="FFFFFF"/>
-              </a:solidFill>
-              <a:latin typeface="Aptos" panose="02110004020202020204"/>
-              <a:ea typeface="+mn-ea"/>
-              <a:cs typeface="+mn-cs"/>
-            </a:rPr>
-            <a:t>Drone</a:t>
-          </a:r>
-          <a:r>
-            <a:rPr lang="en-US" sz="3000" kern="1200" dirty="0">
-              <a:solidFill>
-                <a:srgbClr val="FFFFFF"/>
-              </a:solidFill>
-              <a:latin typeface="Aptos" panose="02110004020202020204"/>
-              <a:ea typeface="+mn-ea"/>
-              <a:cs typeface="+mn-cs"/>
-            </a:rPr>
-            <a:t> Model inside Project</a:t>
+            <a:rPr lang="en-US" sz="2000" kern="1200" dirty="0"/>
+            <a:t>runs\RunCommands\Run_0_Commands.csv</a:t>
           </a:r>
         </a:p>
       </dsp:txBody>
       <dsp:txXfrm>
-        <a:off x="35982" y="2254851"/>
-        <a:ext cx="10432593" cy="665135"/>
+        <a:off x="23988" y="1130457"/>
+        <a:ext cx="10456581" cy="443424"/>
       </dsp:txXfrm>
     </dsp:sp>
-    <dsp:sp modelId="{8668C22C-39F1-4F13-A3C8-96243DD7C753}">
+    <dsp:sp modelId="{13E21948-DA44-46B3-AA3C-E6B0F852DB03}">
       <dsp:nvSpPr>
         <dsp:cNvPr id="0" name=""/>
         <dsp:cNvSpPr/>
       </dsp:nvSpPr>
       <dsp:spPr>
         <a:xfrm>
-          <a:off x="0" y="3042369"/>
-          <a:ext cx="10504557" cy="737099"/>
+          <a:off x="0" y="1655469"/>
+          <a:ext cx="10504557" cy="491400"/>
         </a:xfrm>
         <a:prstGeom prst="roundRect">
           <a:avLst/>
@@ -1826,12 +1993,12 @@
         </a:fontRef>
       </dsp:style>
       <dsp:txBody>
-        <a:bodyPr spcFirstLastPara="0" vert="horz" wrap="square" lIns="114300" tIns="114300" rIns="114300" bIns="114300" numCol="1" spcCol="1270" anchor="ctr" anchorCtr="0">
+        <a:bodyPr spcFirstLastPara="0" vert="horz" wrap="square" lIns="76200" tIns="76200" rIns="76200" bIns="76200" numCol="1" spcCol="1270" anchor="ctr" anchorCtr="0">
           <a:noAutofit/>
         </a:bodyPr>
         <a:lstStyle/>
         <a:p>
-          <a:pPr marL="0" lvl="0" indent="0" algn="l" defTabSz="1333500">
+          <a:pPr marL="0" lvl="0" indent="0" algn="l" defTabSz="889000">
             <a:lnSpc>
               <a:spcPct val="90000"/>
             </a:lnSpc>
@@ -1844,29 +2011,484 @@
             <a:buNone/>
           </a:pPr>
           <a:r>
-            <a:rPr lang="en-US" sz="3000" kern="1200" dirty="0">
+            <a:rPr lang="en-US" sz="2000" kern="1200" dirty="0"/>
+            <a:t>In </a:t>
+          </a:r>
+          <a:r>
+            <a:rPr lang="en-US" sz="2000" kern="1200" dirty="0" err="1"/>
+            <a:t>old_model</a:t>
+          </a:r>
+          <a:r>
+            <a:rPr lang="en-US" sz="2000" kern="1200" dirty="0"/>
+            <a:t> branch :  sim/Codrone4.27/TestAirSim3/Plugins/</a:t>
+          </a:r>
+          <a:r>
+            <a:rPr lang="en-US" sz="2000" kern="1200" dirty="0" err="1"/>
+            <a:t>Airsim</a:t>
+          </a:r>
+          <a:endParaRPr lang="en-US" sz="2000" kern="1200" dirty="0"/>
+        </a:p>
+      </dsp:txBody>
+      <dsp:txXfrm>
+        <a:off x="23988" y="1679457"/>
+        <a:ext cx="10456581" cy="443424"/>
+      </dsp:txXfrm>
+    </dsp:sp>
+    <dsp:sp modelId="{C382A85B-1FCD-4742-AEFF-AABAB6C07C4A}">
+      <dsp:nvSpPr>
+        <dsp:cNvPr id="0" name=""/>
+        <dsp:cNvSpPr/>
+      </dsp:nvSpPr>
+      <dsp:spPr>
+        <a:xfrm>
+          <a:off x="0" y="2204469"/>
+          <a:ext cx="10504557" cy="491400"/>
+        </a:xfrm>
+        <a:prstGeom prst="roundRect">
+          <a:avLst/>
+        </a:prstGeom>
+        <a:gradFill rotWithShape="0">
+          <a:gsLst>
+            <a:gs pos="0">
+              <a:schemeClr val="accent6">
+                <a:hueOff val="0"/>
+                <a:satOff val="0"/>
+                <a:lumOff val="0"/>
+                <a:alphaOff val="0"/>
+                <a:satMod val="103000"/>
+                <a:lumMod val="102000"/>
+                <a:tint val="94000"/>
+              </a:schemeClr>
+            </a:gs>
+            <a:gs pos="50000">
+              <a:schemeClr val="accent6">
+                <a:hueOff val="0"/>
+                <a:satOff val="0"/>
+                <a:lumOff val="0"/>
+                <a:alphaOff val="0"/>
+                <a:satMod val="110000"/>
+                <a:lumMod val="100000"/>
+                <a:shade val="100000"/>
+              </a:schemeClr>
+            </a:gs>
+            <a:gs pos="100000">
+              <a:schemeClr val="accent6">
+                <a:hueOff val="0"/>
+                <a:satOff val="0"/>
+                <a:lumOff val="0"/>
+                <a:alphaOff val="0"/>
+                <a:lumMod val="99000"/>
+                <a:satMod val="120000"/>
+                <a:shade val="78000"/>
+              </a:schemeClr>
+            </a:gs>
+          </a:gsLst>
+          <a:lin ang="5400000" scaled="0"/>
+        </a:gradFill>
+        <a:ln>
+          <a:noFill/>
+        </a:ln>
+        <a:effectLst>
+          <a:outerShdw blurRad="57150" dist="19050" dir="5400000" algn="ctr" rotWithShape="0">
+            <a:srgbClr val="000000">
+              <a:alpha val="63000"/>
+            </a:srgbClr>
+          </a:outerShdw>
+        </a:effectLst>
+      </dsp:spPr>
+      <dsp:style>
+        <a:lnRef idx="0">
+          <a:scrgbClr r="0" g="0" b="0"/>
+        </a:lnRef>
+        <a:fillRef idx="3">
+          <a:scrgbClr r="0" g="0" b="0"/>
+        </a:fillRef>
+        <a:effectRef idx="3">
+          <a:scrgbClr r="0" g="0" b="0"/>
+        </a:effectRef>
+        <a:fontRef idx="minor">
+          <a:schemeClr val="lt1"/>
+        </a:fontRef>
+      </dsp:style>
+      <dsp:txBody>
+        <a:bodyPr spcFirstLastPara="0" vert="horz" wrap="square" lIns="76200" tIns="76200" rIns="76200" bIns="76200" numCol="1" spcCol="1270" anchor="ctr" anchorCtr="0">
+          <a:noAutofit/>
+        </a:bodyPr>
+        <a:lstStyle/>
+        <a:p>
+          <a:pPr marL="0" lvl="0" indent="0" algn="l" defTabSz="889000">
+            <a:lnSpc>
+              <a:spcPct val="90000"/>
+            </a:lnSpc>
+            <a:spcBef>
+              <a:spcPct val="0"/>
+            </a:spcBef>
+            <a:spcAft>
+              <a:spcPct val="35000"/>
+            </a:spcAft>
+            <a:buNone/>
+          </a:pPr>
+          <a:r>
+            <a:rPr lang="en-US" sz="2000" kern="1200" dirty="0"/>
+            <a:t>runs/</a:t>
+          </a:r>
+          <a:r>
+            <a:rPr lang="en-US" sz="2000" kern="1200" dirty="0" err="1"/>
+            <a:t>startup.json</a:t>
+          </a:r>
+          <a:endParaRPr lang="en-US" sz="2000" kern="1200" dirty="0"/>
+        </a:p>
+      </dsp:txBody>
+      <dsp:txXfrm>
+        <a:off x="23988" y="2228457"/>
+        <a:ext cx="10456581" cy="443424"/>
+      </dsp:txXfrm>
+    </dsp:sp>
+    <dsp:sp modelId="{6D8FE49D-26DA-4425-8C7E-DCE94839AD71}">
+      <dsp:nvSpPr>
+        <dsp:cNvPr id="0" name=""/>
+        <dsp:cNvSpPr/>
+      </dsp:nvSpPr>
+      <dsp:spPr>
+        <a:xfrm>
+          <a:off x="0" y="2753469"/>
+          <a:ext cx="10504557" cy="491400"/>
+        </a:xfrm>
+        <a:prstGeom prst="roundRect">
+          <a:avLst/>
+        </a:prstGeom>
+        <a:gradFill rotWithShape="0">
+          <a:gsLst>
+            <a:gs pos="0">
+              <a:schemeClr val="accent2">
+                <a:hueOff val="0"/>
+                <a:satOff val="0"/>
+                <a:lumOff val="0"/>
+                <a:alphaOff val="0"/>
+                <a:satMod val="103000"/>
+                <a:lumMod val="102000"/>
+                <a:tint val="94000"/>
+              </a:schemeClr>
+            </a:gs>
+            <a:gs pos="50000">
+              <a:schemeClr val="accent2">
+                <a:hueOff val="0"/>
+                <a:satOff val="0"/>
+                <a:lumOff val="0"/>
+                <a:alphaOff val="0"/>
+                <a:satMod val="110000"/>
+                <a:lumMod val="100000"/>
+                <a:shade val="100000"/>
+              </a:schemeClr>
+            </a:gs>
+            <a:gs pos="100000">
+              <a:schemeClr val="accent2">
+                <a:hueOff val="0"/>
+                <a:satOff val="0"/>
+                <a:lumOff val="0"/>
+                <a:alphaOff val="0"/>
+                <a:lumMod val="99000"/>
+                <a:satMod val="120000"/>
+                <a:shade val="78000"/>
+              </a:schemeClr>
+            </a:gs>
+          </a:gsLst>
+          <a:lin ang="5400000" scaled="0"/>
+        </a:gradFill>
+        <a:ln>
+          <a:noFill/>
+        </a:ln>
+        <a:effectLst>
+          <a:outerShdw blurRad="57150" dist="19050" dir="5400000" algn="ctr" rotWithShape="0">
+            <a:srgbClr val="000000">
+              <a:alpha val="63000"/>
+            </a:srgbClr>
+          </a:outerShdw>
+        </a:effectLst>
+      </dsp:spPr>
+      <dsp:style>
+        <a:lnRef idx="0">
+          <a:scrgbClr r="0" g="0" b="0"/>
+        </a:lnRef>
+        <a:fillRef idx="3">
+          <a:scrgbClr r="0" g="0" b="0"/>
+        </a:fillRef>
+        <a:effectRef idx="3">
+          <a:scrgbClr r="0" g="0" b="0"/>
+        </a:effectRef>
+        <a:fontRef idx="minor">
+          <a:schemeClr val="lt1"/>
+        </a:fontRef>
+      </dsp:style>
+      <dsp:txBody>
+        <a:bodyPr spcFirstLastPara="0" vert="horz" wrap="square" lIns="76200" tIns="76200" rIns="76200" bIns="76200" numCol="1" spcCol="1270" anchor="ctr" anchorCtr="0">
+          <a:noAutofit/>
+        </a:bodyPr>
+        <a:lstStyle/>
+        <a:p>
+          <a:pPr marL="0" lvl="0" indent="0" algn="l" defTabSz="889000">
+            <a:lnSpc>
+              <a:spcPct val="90000"/>
+            </a:lnSpc>
+            <a:spcBef>
+              <a:spcPct val="0"/>
+            </a:spcBef>
+            <a:spcAft>
+              <a:spcPct val="35000"/>
+            </a:spcAft>
+            <a:buNone/>
+          </a:pPr>
+          <a:r>
+            <a:rPr lang="en-US" sz="2000" b="1" kern="1200" dirty="0">
               <a:solidFill>
                 <a:srgbClr val="FFFFFF"/>
               </a:solidFill>
-              <a:latin typeface="Calibri"/>
-              <a:ea typeface="Calibri"/>
-              <a:cs typeface="Calibri"/>
+              <a:latin typeface="Aptos" panose="02110004020202020204"/>
+              <a:ea typeface="+mn-ea"/>
+              <a:cs typeface="+mn-cs"/>
             </a:rPr>
-            <a:t>docs/PROTOCOL.md (updated to match implemented messages)</a:t>
+            <a:t> sdk</a:t>
           </a:r>
-          <a:endParaRPr lang="en-US" sz="3000" kern="1200" dirty="0">
-            <a:solidFill>
-              <a:srgbClr val="FFFFFF"/>
-            </a:solidFill>
-            <a:latin typeface="Aptos"/>
-            <a:ea typeface="+mn-ea"/>
-            <a:cs typeface="+mn-cs"/>
-          </a:endParaRPr>
+          <a:r>
+            <a:rPr lang="en-US" sz="2000" kern="1200" dirty="0">
+              <a:solidFill>
+                <a:srgbClr val="FFFFFF"/>
+              </a:solidFill>
+              <a:latin typeface="Aptos" panose="02110004020202020204"/>
+              <a:ea typeface="+mn-ea"/>
+              <a:cs typeface="+mn-cs"/>
+            </a:rPr>
+            <a:t>/UserControl.py</a:t>
+          </a:r>
         </a:p>
       </dsp:txBody>
       <dsp:txXfrm>
-        <a:off x="35982" y="3078351"/>
-        <a:ext cx="10432593" cy="665135"/>
+        <a:off x="23988" y="2777457"/>
+        <a:ext cx="10456581" cy="443424"/>
+      </dsp:txXfrm>
+    </dsp:sp>
+    <dsp:sp modelId="{09E87734-5520-49F9-A61A-7BFE46AABF34}">
+      <dsp:nvSpPr>
+        <dsp:cNvPr id="0" name=""/>
+        <dsp:cNvSpPr/>
+      </dsp:nvSpPr>
+      <dsp:spPr>
+        <a:xfrm>
+          <a:off x="0" y="3302469"/>
+          <a:ext cx="10504557" cy="491400"/>
+        </a:xfrm>
+        <a:prstGeom prst="roundRect">
+          <a:avLst/>
+        </a:prstGeom>
+        <a:gradFill rotWithShape="0">
+          <a:gsLst>
+            <a:gs pos="0">
+              <a:schemeClr val="accent3">
+                <a:hueOff val="0"/>
+                <a:satOff val="0"/>
+                <a:lumOff val="0"/>
+                <a:alphaOff val="0"/>
+                <a:satMod val="103000"/>
+                <a:lumMod val="102000"/>
+                <a:tint val="94000"/>
+              </a:schemeClr>
+            </a:gs>
+            <a:gs pos="50000">
+              <a:schemeClr val="accent3">
+                <a:hueOff val="0"/>
+                <a:satOff val="0"/>
+                <a:lumOff val="0"/>
+                <a:alphaOff val="0"/>
+                <a:satMod val="110000"/>
+                <a:lumMod val="100000"/>
+                <a:shade val="100000"/>
+              </a:schemeClr>
+            </a:gs>
+            <a:gs pos="100000">
+              <a:schemeClr val="accent3">
+                <a:hueOff val="0"/>
+                <a:satOff val="0"/>
+                <a:lumOff val="0"/>
+                <a:alphaOff val="0"/>
+                <a:lumMod val="99000"/>
+                <a:satMod val="120000"/>
+                <a:shade val="78000"/>
+              </a:schemeClr>
+            </a:gs>
+          </a:gsLst>
+          <a:lin ang="5400000" scaled="0"/>
+        </a:gradFill>
+        <a:ln>
+          <a:noFill/>
+        </a:ln>
+        <a:effectLst>
+          <a:outerShdw blurRad="57150" dist="19050" dir="5400000" algn="ctr" rotWithShape="0">
+            <a:srgbClr val="000000">
+              <a:alpha val="63000"/>
+            </a:srgbClr>
+          </a:outerShdw>
+        </a:effectLst>
+      </dsp:spPr>
+      <dsp:style>
+        <a:lnRef idx="0">
+          <a:scrgbClr r="0" g="0" b="0"/>
+        </a:lnRef>
+        <a:fillRef idx="3">
+          <a:scrgbClr r="0" g="0" b="0"/>
+        </a:fillRef>
+        <a:effectRef idx="3">
+          <a:scrgbClr r="0" g="0" b="0"/>
+        </a:effectRef>
+        <a:fontRef idx="minor">
+          <a:schemeClr val="lt1"/>
+        </a:fontRef>
+      </dsp:style>
+      <dsp:txBody>
+        <a:bodyPr spcFirstLastPara="0" vert="horz" wrap="square" lIns="76200" tIns="76200" rIns="76200" bIns="76200" numCol="1" spcCol="1270" anchor="ctr" anchorCtr="0">
+          <a:noAutofit/>
+        </a:bodyPr>
+        <a:lstStyle/>
+        <a:p>
+          <a:pPr marL="0" lvl="0" indent="0" algn="l" defTabSz="889000">
+            <a:lnSpc>
+              <a:spcPct val="90000"/>
+            </a:lnSpc>
+            <a:spcBef>
+              <a:spcPct val="0"/>
+            </a:spcBef>
+            <a:spcAft>
+              <a:spcPct val="35000"/>
+            </a:spcAft>
+            <a:buNone/>
+          </a:pPr>
+          <a:r>
+            <a:rPr lang="en-US" sz="2000" kern="1200" dirty="0">
+              <a:solidFill>
+                <a:srgbClr val="FFFFFF"/>
+              </a:solidFill>
+              <a:latin typeface="Aptos" panose="02110004020202020204"/>
+              <a:ea typeface="+mn-ea"/>
+              <a:cs typeface="+mn-cs"/>
+            </a:rPr>
+            <a:t>3d Drone Model inside Project</a:t>
+          </a:r>
+        </a:p>
+      </dsp:txBody>
+      <dsp:txXfrm>
+        <a:off x="23988" y="3326457"/>
+        <a:ext cx="10456581" cy="443424"/>
+      </dsp:txXfrm>
+    </dsp:sp>
+    <dsp:sp modelId="{8668C22C-39F1-4F13-A3C8-96243DD7C753}">
+      <dsp:nvSpPr>
+        <dsp:cNvPr id="0" name=""/>
+        <dsp:cNvSpPr/>
+      </dsp:nvSpPr>
+      <dsp:spPr>
+        <a:xfrm>
+          <a:off x="0" y="3851469"/>
+          <a:ext cx="10504557" cy="491400"/>
+        </a:xfrm>
+        <a:prstGeom prst="roundRect">
+          <a:avLst/>
+        </a:prstGeom>
+        <a:gradFill rotWithShape="0">
+          <a:gsLst>
+            <a:gs pos="0">
+              <a:schemeClr val="accent4">
+                <a:hueOff val="0"/>
+                <a:satOff val="0"/>
+                <a:lumOff val="0"/>
+                <a:alphaOff val="0"/>
+                <a:satMod val="103000"/>
+                <a:lumMod val="102000"/>
+                <a:tint val="94000"/>
+              </a:schemeClr>
+            </a:gs>
+            <a:gs pos="50000">
+              <a:schemeClr val="accent4">
+                <a:hueOff val="0"/>
+                <a:satOff val="0"/>
+                <a:lumOff val="0"/>
+                <a:alphaOff val="0"/>
+                <a:satMod val="110000"/>
+                <a:lumMod val="100000"/>
+                <a:shade val="100000"/>
+              </a:schemeClr>
+            </a:gs>
+            <a:gs pos="100000">
+              <a:schemeClr val="accent4">
+                <a:hueOff val="0"/>
+                <a:satOff val="0"/>
+                <a:lumOff val="0"/>
+                <a:alphaOff val="0"/>
+                <a:lumMod val="99000"/>
+                <a:satMod val="120000"/>
+                <a:shade val="78000"/>
+              </a:schemeClr>
+            </a:gs>
+          </a:gsLst>
+          <a:lin ang="5400000" scaled="0"/>
+        </a:gradFill>
+        <a:ln>
+          <a:noFill/>
+        </a:ln>
+        <a:effectLst>
+          <a:outerShdw blurRad="57150" dist="19050" dir="5400000" algn="ctr" rotWithShape="0">
+            <a:srgbClr val="000000">
+              <a:alpha val="63000"/>
+            </a:srgbClr>
+          </a:outerShdw>
+        </a:effectLst>
+      </dsp:spPr>
+      <dsp:style>
+        <a:lnRef idx="0">
+          <a:scrgbClr r="0" g="0" b="0"/>
+        </a:lnRef>
+        <a:fillRef idx="3">
+          <a:scrgbClr r="0" g="0" b="0"/>
+        </a:fillRef>
+        <a:effectRef idx="3">
+          <a:scrgbClr r="0" g="0" b="0"/>
+        </a:effectRef>
+        <a:fontRef idx="minor">
+          <a:schemeClr val="lt1"/>
+        </a:fontRef>
+      </dsp:style>
+      <dsp:txBody>
+        <a:bodyPr spcFirstLastPara="0" vert="horz" wrap="square" lIns="76200" tIns="76200" rIns="76200" bIns="76200" numCol="1" spcCol="1270" anchor="ctr" anchorCtr="0">
+          <a:noAutofit/>
+        </a:bodyPr>
+        <a:lstStyle/>
+        <a:p>
+          <a:pPr marL="0" lvl="0" indent="0" algn="l" defTabSz="889000">
+            <a:lnSpc>
+              <a:spcPct val="90000"/>
+            </a:lnSpc>
+            <a:spcBef>
+              <a:spcPct val="0"/>
+            </a:spcBef>
+            <a:spcAft>
+              <a:spcPct val="35000"/>
+            </a:spcAft>
+            <a:buNone/>
+          </a:pPr>
+          <a:r>
+            <a:rPr lang="en-US" sz="2000" kern="1200" dirty="0">
+              <a:solidFill>
+                <a:srgbClr val="FFFFFF"/>
+              </a:solidFill>
+              <a:latin typeface="Aptos"/>
+              <a:ea typeface="+mn-ea"/>
+              <a:cs typeface="+mn-cs"/>
+            </a:rPr>
+            <a:t>Updated docs/Protocols.md(to reflect actual implemented Messages)</a:t>
+          </a:r>
+        </a:p>
+      </dsp:txBody>
+      <dsp:txXfrm>
+        <a:off x="23988" y="3875457"/>
+        <a:ext cx="10456581" cy="443424"/>
       </dsp:txXfrm>
     </dsp:sp>
   </dsp:spTree>
@@ -3072,6 +3694,439 @@
     </dgm:style>
   </dgm:styleLbl>
 </dgm:styleDef>
+</file>
+
+<file path=ppt/notesMasters/notesMaster1.xml><?xml version="1.0" encoding="utf-8"?>
+<p:notesMaster xmlns:a="http://schemas.openxmlformats.org/drawingml/2006/main" xmlns:r="http://schemas.openxmlformats.org/officeDocument/2006/relationships" xmlns:p="http://schemas.openxmlformats.org/presentationml/2006/main">
+  <p:cSld>
+    <p:bg>
+      <p:bgRef idx="1001">
+        <a:schemeClr val="bg1"/>
+      </p:bgRef>
+    </p:bg>
+    <p:spTree>
+      <p:nvGrpSpPr>
+        <p:cNvPr id="1" name=""/>
+        <p:cNvGrpSpPr/>
+        <p:nvPr/>
+      </p:nvGrpSpPr>
+      <p:grpSpPr>
+        <a:xfrm>
+          <a:off x="0" y="0"/>
+          <a:ext cx="0" cy="0"/>
+          <a:chOff x="0" y="0"/>
+          <a:chExt cx="0" cy="0"/>
+        </a:xfrm>
+      </p:grpSpPr>
+      <p:sp>
+        <p:nvSpPr>
+          <p:cNvPr id="2" name="Header Placeholder 1"/>
+          <p:cNvSpPr>
+            <a:spLocks noGrp="1"/>
+          </p:cNvSpPr>
+          <p:nvPr>
+            <p:ph type="hdr" sz="quarter"/>
+          </p:nvPr>
+        </p:nvSpPr>
+        <p:spPr>
+          <a:xfrm>
+            <a:off x="0" y="0"/>
+            <a:ext cx="2971800" cy="458788"/>
+          </a:xfrm>
+          <a:prstGeom prst="rect">
+            <a:avLst/>
+          </a:prstGeom>
+        </p:spPr>
+        <p:txBody>
+          <a:bodyPr vert="horz" lIns="91440" tIns="45720" rIns="91440" bIns="45720" rtlCol="0"/>
+          <a:lstStyle>
+            <a:lvl1pPr algn="l">
+              <a:defRPr sz="1200"/>
+            </a:lvl1pPr>
+          </a:lstStyle>
+          <a:p>
+            <a:endParaRPr lang="en-US"/>
+          </a:p>
+        </p:txBody>
+      </p:sp>
+      <p:sp>
+        <p:nvSpPr>
+          <p:cNvPr id="3" name="Date Placeholder 2"/>
+          <p:cNvSpPr>
+            <a:spLocks noGrp="1"/>
+          </p:cNvSpPr>
+          <p:nvPr>
+            <p:ph type="dt" idx="1"/>
+          </p:nvPr>
+        </p:nvSpPr>
+        <p:spPr>
+          <a:xfrm>
+            <a:off x="3884613" y="0"/>
+            <a:ext cx="2971800" cy="458788"/>
+          </a:xfrm>
+          <a:prstGeom prst="rect">
+            <a:avLst/>
+          </a:prstGeom>
+        </p:spPr>
+        <p:txBody>
+          <a:bodyPr vert="horz" lIns="91440" tIns="45720" rIns="91440" bIns="45720" rtlCol="0"/>
+          <a:lstStyle>
+            <a:lvl1pPr algn="r">
+              <a:defRPr sz="1200"/>
+            </a:lvl1pPr>
+          </a:lstStyle>
+          <a:p>
+            <a:fld id="{119BC318-CBBA-44F7-92E6-5D3B8717FDA8}" type="datetimeFigureOut">
+              <a:rPr lang="en-US" smtClean="0"/>
+              <a:t>3/5/2026</a:t>
+            </a:fld>
+            <a:endParaRPr lang="en-US"/>
+          </a:p>
+        </p:txBody>
+      </p:sp>
+      <p:sp>
+        <p:nvSpPr>
+          <p:cNvPr id="4" name="Slide Image Placeholder 3"/>
+          <p:cNvSpPr>
+            <a:spLocks noGrp="1" noRot="1" noChangeAspect="1"/>
+          </p:cNvSpPr>
+          <p:nvPr>
+            <p:ph type="sldImg" idx="2"/>
+          </p:nvPr>
+        </p:nvSpPr>
+        <p:spPr>
+          <a:xfrm>
+            <a:off x="685800" y="1143000"/>
+            <a:ext cx="5486400" cy="3086100"/>
+          </a:xfrm>
+          <a:prstGeom prst="rect">
+            <a:avLst/>
+          </a:prstGeom>
+          <a:noFill/>
+          <a:ln w="12700">
+            <a:solidFill>
+              <a:prstClr val="black"/>
+            </a:solidFill>
+          </a:ln>
+        </p:spPr>
+        <p:txBody>
+          <a:bodyPr vert="horz" lIns="91440" tIns="45720" rIns="91440" bIns="45720" rtlCol="0" anchor="ctr"/>
+          <a:lstStyle/>
+          <a:p>
+            <a:endParaRPr lang="en-US"/>
+          </a:p>
+        </p:txBody>
+      </p:sp>
+      <p:sp>
+        <p:nvSpPr>
+          <p:cNvPr id="5" name="Notes Placeholder 4"/>
+          <p:cNvSpPr>
+            <a:spLocks noGrp="1"/>
+          </p:cNvSpPr>
+          <p:nvPr>
+            <p:ph type="body" sz="quarter" idx="3"/>
+          </p:nvPr>
+        </p:nvSpPr>
+        <p:spPr>
+          <a:xfrm>
+            <a:off x="685800" y="4400550"/>
+            <a:ext cx="5486400" cy="3600450"/>
+          </a:xfrm>
+          <a:prstGeom prst="rect">
+            <a:avLst/>
+          </a:prstGeom>
+        </p:spPr>
+        <p:txBody>
+          <a:bodyPr vert="horz" lIns="91440" tIns="45720" rIns="91440" bIns="45720" rtlCol="0"/>
+          <a:lstStyle/>
+          <a:p>
+            <a:pPr lvl="0"/>
+            <a:r>
+              <a:rPr lang="en-US"/>
+              <a:t>Click to edit Master text styles</a:t>
+            </a:r>
+          </a:p>
+          <a:p>
+            <a:pPr lvl="1"/>
+            <a:r>
+              <a:rPr lang="en-US"/>
+              <a:t>Second level</a:t>
+            </a:r>
+          </a:p>
+          <a:p>
+            <a:pPr lvl="2"/>
+            <a:r>
+              <a:rPr lang="en-US"/>
+              <a:t>Third level</a:t>
+            </a:r>
+          </a:p>
+          <a:p>
+            <a:pPr lvl="3"/>
+            <a:r>
+              <a:rPr lang="en-US"/>
+              <a:t>Fourth level</a:t>
+            </a:r>
+          </a:p>
+          <a:p>
+            <a:pPr lvl="4"/>
+            <a:r>
+              <a:rPr lang="en-US"/>
+              <a:t>Fifth level</a:t>
+            </a:r>
+          </a:p>
+        </p:txBody>
+      </p:sp>
+      <p:sp>
+        <p:nvSpPr>
+          <p:cNvPr id="6" name="Footer Placeholder 5"/>
+          <p:cNvSpPr>
+            <a:spLocks noGrp="1"/>
+          </p:cNvSpPr>
+          <p:nvPr>
+            <p:ph type="ftr" sz="quarter" idx="4"/>
+          </p:nvPr>
+        </p:nvSpPr>
+        <p:spPr>
+          <a:xfrm>
+            <a:off x="0" y="8685213"/>
+            <a:ext cx="2971800" cy="458787"/>
+          </a:xfrm>
+          <a:prstGeom prst="rect">
+            <a:avLst/>
+          </a:prstGeom>
+        </p:spPr>
+        <p:txBody>
+          <a:bodyPr vert="horz" lIns="91440" tIns="45720" rIns="91440" bIns="45720" rtlCol="0" anchor="b"/>
+          <a:lstStyle>
+            <a:lvl1pPr algn="l">
+              <a:defRPr sz="1200"/>
+            </a:lvl1pPr>
+          </a:lstStyle>
+          <a:p>
+            <a:endParaRPr lang="en-US"/>
+          </a:p>
+        </p:txBody>
+      </p:sp>
+      <p:sp>
+        <p:nvSpPr>
+          <p:cNvPr id="7" name="Slide Number Placeholder 6"/>
+          <p:cNvSpPr>
+            <a:spLocks noGrp="1"/>
+          </p:cNvSpPr>
+          <p:nvPr>
+            <p:ph type="sldNum" sz="quarter" idx="5"/>
+          </p:nvPr>
+        </p:nvSpPr>
+        <p:spPr>
+          <a:xfrm>
+            <a:off x="3884613" y="8685213"/>
+            <a:ext cx="2971800" cy="458787"/>
+          </a:xfrm>
+          <a:prstGeom prst="rect">
+            <a:avLst/>
+          </a:prstGeom>
+        </p:spPr>
+        <p:txBody>
+          <a:bodyPr vert="horz" lIns="91440" tIns="45720" rIns="91440" bIns="45720" rtlCol="0" anchor="b"/>
+          <a:lstStyle>
+            <a:lvl1pPr algn="r">
+              <a:defRPr sz="1200"/>
+            </a:lvl1pPr>
+          </a:lstStyle>
+          <a:p>
+            <a:fld id="{A4EE17CE-C29A-402B-A3D2-8CA3BD10EA55}" type="slidenum">
+              <a:rPr lang="en-US" smtClean="0"/>
+              <a:t>‹#›</a:t>
+            </a:fld>
+            <a:endParaRPr lang="en-US"/>
+          </a:p>
+        </p:txBody>
+      </p:sp>
+    </p:spTree>
+    <p:extLst>
+      <p:ext uri="{BB962C8B-B14F-4D97-AF65-F5344CB8AC3E}">
+        <p14:creationId xmlns:p14="http://schemas.microsoft.com/office/powerpoint/2010/main" val="2014608063"/>
+      </p:ext>
+    </p:extLst>
+  </p:cSld>
+  <p:clrMap bg1="lt1" tx1="dk1" bg2="lt2" tx2="dk2" accent1="accent1" accent2="accent2" accent3="accent3" accent4="accent4" accent5="accent5" accent6="accent6" hlink="hlink" folHlink="folHlink"/>
+  <p:notesStyle>
+    <a:lvl1pPr marL="0" algn="l" defTabSz="914400" rtl="0" eaLnBrk="1" latinLnBrk="0" hangingPunct="1">
+      <a:defRPr sz="1200" kern="1200">
+        <a:solidFill>
+          <a:schemeClr val="tx1"/>
+        </a:solidFill>
+        <a:latin typeface="+mn-lt"/>
+        <a:ea typeface="+mn-ea"/>
+        <a:cs typeface="+mn-cs"/>
+      </a:defRPr>
+    </a:lvl1pPr>
+    <a:lvl2pPr marL="457200" algn="l" defTabSz="914400" rtl="0" eaLnBrk="1" latinLnBrk="0" hangingPunct="1">
+      <a:defRPr sz="1200" kern="1200">
+        <a:solidFill>
+          <a:schemeClr val="tx1"/>
+        </a:solidFill>
+        <a:latin typeface="+mn-lt"/>
+        <a:ea typeface="+mn-ea"/>
+        <a:cs typeface="+mn-cs"/>
+      </a:defRPr>
+    </a:lvl2pPr>
+    <a:lvl3pPr marL="914400" algn="l" defTabSz="914400" rtl="0" eaLnBrk="1" latinLnBrk="0" hangingPunct="1">
+      <a:defRPr sz="1200" kern="1200">
+        <a:solidFill>
+          <a:schemeClr val="tx1"/>
+        </a:solidFill>
+        <a:latin typeface="+mn-lt"/>
+        <a:ea typeface="+mn-ea"/>
+        <a:cs typeface="+mn-cs"/>
+      </a:defRPr>
+    </a:lvl3pPr>
+    <a:lvl4pPr marL="1371600" algn="l" defTabSz="914400" rtl="0" eaLnBrk="1" latinLnBrk="0" hangingPunct="1">
+      <a:defRPr sz="1200" kern="1200">
+        <a:solidFill>
+          <a:schemeClr val="tx1"/>
+        </a:solidFill>
+        <a:latin typeface="+mn-lt"/>
+        <a:ea typeface="+mn-ea"/>
+        <a:cs typeface="+mn-cs"/>
+      </a:defRPr>
+    </a:lvl4pPr>
+    <a:lvl5pPr marL="1828800" algn="l" defTabSz="914400" rtl="0" eaLnBrk="1" latinLnBrk="0" hangingPunct="1">
+      <a:defRPr sz="1200" kern="1200">
+        <a:solidFill>
+          <a:schemeClr val="tx1"/>
+        </a:solidFill>
+        <a:latin typeface="+mn-lt"/>
+        <a:ea typeface="+mn-ea"/>
+        <a:cs typeface="+mn-cs"/>
+      </a:defRPr>
+    </a:lvl5pPr>
+    <a:lvl6pPr marL="2286000" algn="l" defTabSz="914400" rtl="0" eaLnBrk="1" latinLnBrk="0" hangingPunct="1">
+      <a:defRPr sz="1200" kern="1200">
+        <a:solidFill>
+          <a:schemeClr val="tx1"/>
+        </a:solidFill>
+        <a:latin typeface="+mn-lt"/>
+        <a:ea typeface="+mn-ea"/>
+        <a:cs typeface="+mn-cs"/>
+      </a:defRPr>
+    </a:lvl6pPr>
+    <a:lvl7pPr marL="2743200" algn="l" defTabSz="914400" rtl="0" eaLnBrk="1" latinLnBrk="0" hangingPunct="1">
+      <a:defRPr sz="1200" kern="1200">
+        <a:solidFill>
+          <a:schemeClr val="tx1"/>
+        </a:solidFill>
+        <a:latin typeface="+mn-lt"/>
+        <a:ea typeface="+mn-ea"/>
+        <a:cs typeface="+mn-cs"/>
+      </a:defRPr>
+    </a:lvl7pPr>
+    <a:lvl8pPr marL="3200400" algn="l" defTabSz="914400" rtl="0" eaLnBrk="1" latinLnBrk="0" hangingPunct="1">
+      <a:defRPr sz="1200" kern="1200">
+        <a:solidFill>
+          <a:schemeClr val="tx1"/>
+        </a:solidFill>
+        <a:latin typeface="+mn-lt"/>
+        <a:ea typeface="+mn-ea"/>
+        <a:cs typeface="+mn-cs"/>
+      </a:defRPr>
+    </a:lvl8pPr>
+    <a:lvl9pPr marL="3657600" algn="l" defTabSz="914400" rtl="0" eaLnBrk="1" latinLnBrk="0" hangingPunct="1">
+      <a:defRPr sz="1200" kern="1200">
+        <a:solidFill>
+          <a:schemeClr val="tx1"/>
+        </a:solidFill>
+        <a:latin typeface="+mn-lt"/>
+        <a:ea typeface="+mn-ea"/>
+        <a:cs typeface="+mn-cs"/>
+      </a:defRPr>
+    </a:lvl9pPr>
+  </p:notesStyle>
+</p:notesMaster>
+</file>
+
+<file path=ppt/notesSlides/notesSlide1.xml><?xml version="1.0" encoding="utf-8"?>
+<p:notes xmlns:a="http://schemas.openxmlformats.org/drawingml/2006/main" xmlns:r="http://schemas.openxmlformats.org/officeDocument/2006/relationships" xmlns:p="http://schemas.openxmlformats.org/presentationml/2006/main">
+  <p:cSld>
+    <p:spTree>
+      <p:nvGrpSpPr>
+        <p:cNvPr id="1" name=""/>
+        <p:cNvGrpSpPr/>
+        <p:nvPr/>
+      </p:nvGrpSpPr>
+      <p:grpSpPr>
+        <a:xfrm>
+          <a:off x="0" y="0"/>
+          <a:ext cx="0" cy="0"/>
+          <a:chOff x="0" y="0"/>
+          <a:chExt cx="0" cy="0"/>
+        </a:xfrm>
+      </p:grpSpPr>
+      <p:sp>
+        <p:nvSpPr>
+          <p:cNvPr id="2" name="Slide Image Placeholder 1"/>
+          <p:cNvSpPr>
+            <a:spLocks noGrp="1" noRot="1" noChangeAspect="1"/>
+          </p:cNvSpPr>
+          <p:nvPr>
+            <p:ph type="sldImg"/>
+          </p:nvPr>
+        </p:nvSpPr>
+        <p:spPr/>
+      </p:sp>
+      <p:sp>
+        <p:nvSpPr>
+          <p:cNvPr id="3" name="Notes Placeholder 2"/>
+          <p:cNvSpPr>
+            <a:spLocks noGrp="1"/>
+          </p:cNvSpPr>
+          <p:nvPr>
+            <p:ph type="body" idx="1"/>
+          </p:nvPr>
+        </p:nvSpPr>
+        <p:spPr/>
+        <p:txBody>
+          <a:bodyPr/>
+          <a:lstStyle/>
+          <a:p>
+            <a:endParaRPr lang="en-US" dirty="0"/>
+          </a:p>
+        </p:txBody>
+      </p:sp>
+      <p:sp>
+        <p:nvSpPr>
+          <p:cNvPr id="4" name="Slide Number Placeholder 3"/>
+          <p:cNvSpPr>
+            <a:spLocks noGrp="1"/>
+          </p:cNvSpPr>
+          <p:nvPr>
+            <p:ph type="sldNum" sz="quarter" idx="5"/>
+          </p:nvPr>
+        </p:nvSpPr>
+        <p:spPr/>
+        <p:txBody>
+          <a:bodyPr/>
+          <a:lstStyle/>
+          <a:p>
+            <a:fld id="{A4EE17CE-C29A-402B-A3D2-8CA3BD10EA55}" type="slidenum">
+              <a:rPr lang="en-US" smtClean="0"/>
+              <a:t>6</a:t>
+            </a:fld>
+            <a:endParaRPr lang="en-US"/>
+          </a:p>
+        </p:txBody>
+      </p:sp>
+    </p:spTree>
+    <p:extLst>
+      <p:ext uri="{BB962C8B-B14F-4D97-AF65-F5344CB8AC3E}">
+        <p14:creationId xmlns:p14="http://schemas.microsoft.com/office/powerpoint/2010/main" val="273341005"/>
+      </p:ext>
+    </p:extLst>
+  </p:cSld>
+  <p:clrMapOvr>
+    <a:masterClrMapping/>
+  </p:clrMapOvr>
+</p:notes>
 </file>
 
 <file path=ppt/slideLayouts/slideLayout1.xml><?xml version="1.0" encoding="utf-8"?>
@@ -6995,7 +8050,1688 @@
 </p:sld>
 </file>
 
+<file path=ppt/slides/slide10.xml><?xml version="1.0" encoding="utf-8"?>
+<p:sld xmlns:a="http://schemas.openxmlformats.org/drawingml/2006/main" xmlns:r="http://schemas.openxmlformats.org/officeDocument/2006/relationships" xmlns:p="http://schemas.openxmlformats.org/presentationml/2006/main">
+  <p:cSld>
+    <p:bg>
+      <p:bgPr>
+        <a:solidFill>
+          <a:schemeClr val="bg1"/>
+        </a:solidFill>
+        <a:effectLst/>
+      </p:bgPr>
+    </p:bg>
+    <p:spTree>
+      <p:nvGrpSpPr>
+        <p:cNvPr id="1" name=""/>
+        <p:cNvGrpSpPr/>
+        <p:nvPr/>
+      </p:nvGrpSpPr>
+      <p:grpSpPr>
+        <a:xfrm>
+          <a:off x="0" y="0"/>
+          <a:ext cx="0" cy="0"/>
+          <a:chOff x="0" y="0"/>
+          <a:chExt cx="0" cy="0"/>
+        </a:xfrm>
+      </p:grpSpPr>
+      <p:sp useBgFill="1">
+        <p:nvSpPr>
+          <p:cNvPr id="8" name="Rectangle 7">
+            <a:extLst>
+              <a:ext uri="{FF2B5EF4-FFF2-40B4-BE49-F238E27FC236}">
+                <a16:creationId xmlns:a16="http://schemas.microsoft.com/office/drawing/2014/main" id="{DEE2AD96-B495-4E06-9291-B71706F728CB}"/>
+              </a:ext>
+              <a:ext uri="{C183D7F6-B498-43B3-948B-1728B52AA6E4}">
+                <adec:decorative xmlns:adec="http://schemas.microsoft.com/office/drawing/2017/decorative" val="1"/>
+              </a:ext>
+            </a:extLst>
+          </p:cNvPr>
+          <p:cNvSpPr>
+            <a:spLocks noGrp="1" noRot="1" noChangeAspect="1" noMove="1" noResize="1" noEditPoints="1" noAdjustHandles="1" noChangeArrowheads="1" noChangeShapeType="1" noTextEdit="1"/>
+          </p:cNvSpPr>
+          <p:nvPr>
+            <p:extLst>
+              <p:ext uri="{386F3935-93C4-4BCD-93E2-E3B085C9AB24}">
+                <p16:designElem xmlns:p16="http://schemas.microsoft.com/office/powerpoint/2015/main" val="1"/>
+              </p:ext>
+            </p:extLst>
+          </p:nvPr>
+        </p:nvSpPr>
+        <p:spPr>
+          <a:xfrm>
+            <a:off x="0" y="0"/>
+            <a:ext cx="12192000" cy="6858000"/>
+          </a:xfrm>
+          <a:prstGeom prst="rect">
+            <a:avLst/>
+          </a:prstGeom>
+          <a:ln w="12700" cap="flat" cmpd="sng" algn="ctr">
+            <a:noFill/>
+            <a:prstDash val="solid"/>
+            <a:miter lim="800000"/>
+          </a:ln>
+          <a:effectLst/>
+          <a:extLst>
+            <a:ext uri="{91240B29-F687-4F45-9708-019B960494DF}">
+              <a14:hiddenLine xmlns:a14="http://schemas.microsoft.com/office/drawing/2010/main" w="12700" cap="flat" cmpd="sng" algn="ctr">
+                <a:solidFill>
+                  <a:schemeClr val="accent1">
+                    <a:shade val="50000"/>
+                  </a:schemeClr>
+                </a:solidFill>
+                <a:prstDash val="solid"/>
+                <a:miter lim="800000"/>
+              </a14:hiddenLine>
+            </a:ext>
+          </a:extLst>
+        </p:spPr>
+        <p:style>
+          <a:lnRef idx="2">
+            <a:schemeClr val="accent1">
+              <a:shade val="50000"/>
+            </a:schemeClr>
+          </a:lnRef>
+          <a:fillRef idx="1">
+            <a:schemeClr val="accent1"/>
+          </a:fillRef>
+          <a:effectRef idx="0">
+            <a:schemeClr val="accent1"/>
+          </a:effectRef>
+          <a:fontRef idx="minor">
+            <a:schemeClr val="lt1"/>
+          </a:fontRef>
+        </p:style>
+        <p:txBody>
+          <a:bodyPr rtlCol="0" anchor="ctr"/>
+          <a:lstStyle/>
+          <a:p>
+            <a:pPr algn="ctr"/>
+            <a:endParaRPr lang="en-US"/>
+          </a:p>
+        </p:txBody>
+      </p:sp>
+      <p:sp>
+        <p:nvSpPr>
+          <p:cNvPr id="10" name="Rectangle 9">
+            <a:extLst>
+              <a:ext uri="{FF2B5EF4-FFF2-40B4-BE49-F238E27FC236}">
+                <a16:creationId xmlns:a16="http://schemas.microsoft.com/office/drawing/2014/main" id="{53CF6D67-C5A8-4ADD-9E8E-1E38CA1D3166}"/>
+              </a:ext>
+              <a:ext uri="{C183D7F6-B498-43B3-948B-1728B52AA6E4}">
+                <adec:decorative xmlns:adec="http://schemas.microsoft.com/office/drawing/2017/decorative" val="1"/>
+              </a:ext>
+            </a:extLst>
+          </p:cNvPr>
+          <p:cNvSpPr>
+            <a:spLocks noGrp="1" noRot="1" noChangeAspect="1" noMove="1" noResize="1" noEditPoints="1" noAdjustHandles="1" noChangeArrowheads="1" noChangeShapeType="1" noTextEdit="1"/>
+          </p:cNvSpPr>
+          <p:nvPr>
+            <p:extLst>
+              <p:ext uri="{386F3935-93C4-4BCD-93E2-E3B085C9AB24}">
+                <p16:designElem xmlns:p16="http://schemas.microsoft.com/office/powerpoint/2015/main" val="1"/>
+              </p:ext>
+            </p:extLst>
+          </p:nvPr>
+        </p:nvSpPr>
+        <p:spPr>
+          <a:xfrm rot="5400000" flipH="1">
+            <a:off x="-638515" y="639280"/>
+            <a:ext cx="6858000" cy="5579440"/>
+          </a:xfrm>
+          <a:prstGeom prst="rect">
+            <a:avLst/>
+          </a:prstGeom>
+          <a:gradFill>
+            <a:gsLst>
+              <a:gs pos="8000">
+                <a:srgbClr val="000000"/>
+              </a:gs>
+              <a:gs pos="100000">
+                <a:schemeClr val="accent1">
+                  <a:lumMod val="75000"/>
+                </a:schemeClr>
+              </a:gs>
+            </a:gsLst>
+            <a:lin ang="3000000" scaled="0"/>
+          </a:gradFill>
+          <a:ln>
+            <a:noFill/>
+          </a:ln>
+        </p:spPr>
+        <p:style>
+          <a:lnRef idx="2">
+            <a:schemeClr val="accent1">
+              <a:shade val="50000"/>
+            </a:schemeClr>
+          </a:lnRef>
+          <a:fillRef idx="1">
+            <a:schemeClr val="accent1"/>
+          </a:fillRef>
+          <a:effectRef idx="0">
+            <a:schemeClr val="accent1"/>
+          </a:effectRef>
+          <a:fontRef idx="minor">
+            <a:schemeClr val="lt1"/>
+          </a:fontRef>
+        </p:style>
+        <p:txBody>
+          <a:bodyPr rtlCol="0" anchor="ctr"/>
+          <a:lstStyle/>
+          <a:p>
+            <a:pPr algn="ctr"/>
+            <a:endParaRPr lang="en-US"/>
+          </a:p>
+        </p:txBody>
+      </p:sp>
+      <p:sp>
+        <p:nvSpPr>
+          <p:cNvPr id="12" name="Rectangle 11">
+            <a:extLst>
+              <a:ext uri="{FF2B5EF4-FFF2-40B4-BE49-F238E27FC236}">
+                <a16:creationId xmlns:a16="http://schemas.microsoft.com/office/drawing/2014/main" id="{86909FA0-B515-4681-B7A8-FA281D133B94}"/>
+              </a:ext>
+              <a:ext uri="{C183D7F6-B498-43B3-948B-1728B52AA6E4}">
+                <adec:decorative xmlns:adec="http://schemas.microsoft.com/office/drawing/2017/decorative" val="1"/>
+              </a:ext>
+            </a:extLst>
+          </p:cNvPr>
+          <p:cNvSpPr>
+            <a:spLocks noGrp="1" noRot="1" noChangeAspect="1" noMove="1" noResize="1" noEditPoints="1" noAdjustHandles="1" noChangeArrowheads="1" noChangeShapeType="1" noTextEdit="1"/>
+          </p:cNvSpPr>
+          <p:nvPr>
+            <p:extLst>
+              <p:ext uri="{386F3935-93C4-4BCD-93E2-E3B085C9AB24}">
+                <p16:designElem xmlns:p16="http://schemas.microsoft.com/office/powerpoint/2015/main" val="1"/>
+              </p:ext>
+            </p:extLst>
+          </p:nvPr>
+        </p:nvSpPr>
+        <p:spPr>
+          <a:xfrm rot="5400000" flipH="1">
+            <a:off x="-393206" y="395206"/>
+            <a:ext cx="6346209" cy="5576080"/>
+          </a:xfrm>
+          <a:prstGeom prst="rect">
+            <a:avLst/>
+          </a:prstGeom>
+          <a:gradFill>
+            <a:gsLst>
+              <a:gs pos="0">
+                <a:srgbClr val="000000">
+                  <a:alpha val="0"/>
+                </a:srgbClr>
+              </a:gs>
+              <a:gs pos="99000">
+                <a:schemeClr val="accent1">
+                  <a:alpha val="0"/>
+                </a:schemeClr>
+              </a:gs>
+            </a:gsLst>
+            <a:lin ang="1800000" scaled="0"/>
+          </a:gradFill>
+          <a:ln>
+            <a:noFill/>
+          </a:ln>
+        </p:spPr>
+        <p:style>
+          <a:lnRef idx="2">
+            <a:schemeClr val="accent1">
+              <a:shade val="50000"/>
+            </a:schemeClr>
+          </a:lnRef>
+          <a:fillRef idx="1">
+            <a:schemeClr val="accent1"/>
+          </a:fillRef>
+          <a:effectRef idx="0">
+            <a:schemeClr val="accent1"/>
+          </a:effectRef>
+          <a:fontRef idx="minor">
+            <a:schemeClr val="lt1"/>
+          </a:fontRef>
+        </p:style>
+        <p:txBody>
+          <a:bodyPr rtlCol="0" anchor="ctr"/>
+          <a:lstStyle/>
+          <a:p>
+            <a:pPr algn="ctr"/>
+            <a:endParaRPr lang="en-US"/>
+          </a:p>
+        </p:txBody>
+      </p:sp>
+      <p:sp>
+        <p:nvSpPr>
+          <p:cNvPr id="14" name="Rectangle 13">
+            <a:extLst>
+              <a:ext uri="{FF2B5EF4-FFF2-40B4-BE49-F238E27FC236}">
+                <a16:creationId xmlns:a16="http://schemas.microsoft.com/office/drawing/2014/main" id="{21C9FE86-FCC3-4A31-AA1C-C882262B7FE7}"/>
+              </a:ext>
+              <a:ext uri="{C183D7F6-B498-43B3-948B-1728B52AA6E4}">
+                <adec:decorative xmlns:adec="http://schemas.microsoft.com/office/drawing/2017/decorative" val="1"/>
+              </a:ext>
+            </a:extLst>
+          </p:cNvPr>
+          <p:cNvSpPr>
+            <a:spLocks noGrp="1" noRot="1" noChangeAspect="1" noMove="1" noResize="1" noEditPoints="1" noAdjustHandles="1" noChangeArrowheads="1" noChangeShapeType="1" noTextEdit="1"/>
+          </p:cNvSpPr>
+          <p:nvPr>
+            <p:extLst>
+              <p:ext uri="{386F3935-93C4-4BCD-93E2-E3B085C9AB24}">
+                <p16:designElem xmlns:p16="http://schemas.microsoft.com/office/powerpoint/2015/main" val="1"/>
+              </p:ext>
+            </p:extLst>
+          </p:nvPr>
+        </p:nvSpPr>
+        <p:spPr>
+          <a:xfrm rot="5400000" flipH="1">
+            <a:off x="1528907" y="2818967"/>
+            <a:ext cx="2501979" cy="5576080"/>
+          </a:xfrm>
+          <a:prstGeom prst="rect">
+            <a:avLst/>
+          </a:prstGeom>
+          <a:gradFill>
+            <a:gsLst>
+              <a:gs pos="2000">
+                <a:schemeClr val="accent1">
+                  <a:alpha val="29000"/>
+                </a:schemeClr>
+              </a:gs>
+              <a:gs pos="100000">
+                <a:srgbClr val="000000">
+                  <a:alpha val="30000"/>
+                </a:srgbClr>
+              </a:gs>
+            </a:gsLst>
+            <a:lin ang="7800000" scaled="0"/>
+          </a:gradFill>
+          <a:ln>
+            <a:noFill/>
+          </a:ln>
+        </p:spPr>
+        <p:style>
+          <a:lnRef idx="2">
+            <a:schemeClr val="accent1">
+              <a:shade val="50000"/>
+            </a:schemeClr>
+          </a:lnRef>
+          <a:fillRef idx="1">
+            <a:schemeClr val="accent1"/>
+          </a:fillRef>
+          <a:effectRef idx="0">
+            <a:schemeClr val="accent1"/>
+          </a:effectRef>
+          <a:fontRef idx="minor">
+            <a:schemeClr val="lt1"/>
+          </a:fontRef>
+        </p:style>
+        <p:txBody>
+          <a:bodyPr rtlCol="0" anchor="ctr"/>
+          <a:lstStyle/>
+          <a:p>
+            <a:pPr algn="ctr"/>
+            <a:endParaRPr lang="en-US"/>
+          </a:p>
+        </p:txBody>
+      </p:sp>
+      <p:sp>
+        <p:nvSpPr>
+          <p:cNvPr id="16" name="Rectangle 15">
+            <a:extLst>
+              <a:ext uri="{FF2B5EF4-FFF2-40B4-BE49-F238E27FC236}">
+                <a16:creationId xmlns:a16="http://schemas.microsoft.com/office/drawing/2014/main" id="{7D96243B-ECED-4B71-8E06-AE9A285EAD20}"/>
+              </a:ext>
+              <a:ext uri="{C183D7F6-B498-43B3-948B-1728B52AA6E4}">
+                <adec:decorative xmlns:adec="http://schemas.microsoft.com/office/drawing/2017/decorative" val="1"/>
+              </a:ext>
+            </a:extLst>
+          </p:cNvPr>
+          <p:cNvSpPr>
+            <a:spLocks noGrp="1" noRot="1" noChangeAspect="1" noMove="1" noResize="1" noEditPoints="1" noAdjustHandles="1" noChangeArrowheads="1" noChangeShapeType="1" noTextEdit="1"/>
+          </p:cNvSpPr>
+          <p:nvPr>
+            <p:extLst>
+              <p:ext uri="{386F3935-93C4-4BCD-93E2-E3B085C9AB24}">
+                <p16:designElem xmlns:p16="http://schemas.microsoft.com/office/powerpoint/2015/main" val="1"/>
+              </p:ext>
+            </p:extLst>
+          </p:nvPr>
+        </p:nvSpPr>
+        <p:spPr>
+          <a:xfrm rot="5400000" flipH="1">
+            <a:off x="-425002" y="852793"/>
+            <a:ext cx="6858001" cy="5152412"/>
+          </a:xfrm>
+          <a:prstGeom prst="rect">
+            <a:avLst/>
+          </a:prstGeom>
+          <a:gradFill>
+            <a:gsLst>
+              <a:gs pos="0">
+                <a:srgbClr val="000000">
+                  <a:alpha val="0"/>
+                </a:srgbClr>
+              </a:gs>
+              <a:gs pos="99000">
+                <a:schemeClr val="accent1">
+                  <a:alpha val="11000"/>
+                </a:schemeClr>
+              </a:gs>
+            </a:gsLst>
+            <a:lin ang="7800000" scaled="0"/>
+          </a:gradFill>
+          <a:ln>
+            <a:noFill/>
+          </a:ln>
+        </p:spPr>
+        <p:style>
+          <a:lnRef idx="2">
+            <a:schemeClr val="accent1">
+              <a:shade val="50000"/>
+            </a:schemeClr>
+          </a:lnRef>
+          <a:fillRef idx="1">
+            <a:schemeClr val="accent1"/>
+          </a:fillRef>
+          <a:effectRef idx="0">
+            <a:schemeClr val="accent1"/>
+          </a:effectRef>
+          <a:fontRef idx="minor">
+            <a:schemeClr val="lt1"/>
+          </a:fontRef>
+        </p:style>
+        <p:txBody>
+          <a:bodyPr rtlCol="0" anchor="ctr"/>
+          <a:lstStyle/>
+          <a:p>
+            <a:pPr algn="ctr"/>
+            <a:endParaRPr lang="en-US"/>
+          </a:p>
+        </p:txBody>
+      </p:sp>
+      <p:sp>
+        <p:nvSpPr>
+          <p:cNvPr id="18" name="Oval 17">
+            <a:extLst>
+              <a:ext uri="{FF2B5EF4-FFF2-40B4-BE49-F238E27FC236}">
+                <a16:creationId xmlns:a16="http://schemas.microsoft.com/office/drawing/2014/main" id="{A09989E4-EFDC-4A90-A633-E0525FB4139E}"/>
+              </a:ext>
+              <a:ext uri="{C183D7F6-B498-43B3-948B-1728B52AA6E4}">
+                <adec:decorative xmlns:adec="http://schemas.microsoft.com/office/drawing/2017/decorative" val="1"/>
+              </a:ext>
+            </a:extLst>
+          </p:cNvPr>
+          <p:cNvSpPr>
+            <a:spLocks noGrp="1" noRot="1" noChangeAspect="1" noMove="1" noResize="1" noEditPoints="1" noAdjustHandles="1" noChangeArrowheads="1" noChangeShapeType="1" noTextEdit="1"/>
+          </p:cNvSpPr>
+          <p:nvPr>
+            <p:extLst>
+              <p:ext uri="{386F3935-93C4-4BCD-93E2-E3B085C9AB24}">
+                <p16:designElem xmlns:p16="http://schemas.microsoft.com/office/powerpoint/2015/main" val="1"/>
+              </p:ext>
+            </p:extLst>
+          </p:nvPr>
+        </p:nvSpPr>
+        <p:spPr>
+          <a:xfrm rot="6097846">
+            <a:off x="818753" y="1128497"/>
+            <a:ext cx="4318303" cy="4318303"/>
+          </a:xfrm>
+          <a:prstGeom prst="ellipse">
+            <a:avLst/>
+          </a:prstGeom>
+          <a:gradFill>
+            <a:gsLst>
+              <a:gs pos="39000">
+                <a:schemeClr val="accent1">
+                  <a:alpha val="0"/>
+                </a:schemeClr>
+              </a:gs>
+              <a:gs pos="100000">
+                <a:schemeClr val="accent1">
+                  <a:lumMod val="60000"/>
+                  <a:lumOff val="40000"/>
+                  <a:alpha val="15000"/>
+                </a:schemeClr>
+              </a:gs>
+            </a:gsLst>
+            <a:lin ang="17400000" scaled="0"/>
+          </a:gradFill>
+          <a:ln>
+            <a:noFill/>
+          </a:ln>
+        </p:spPr>
+        <p:style>
+          <a:lnRef idx="2">
+            <a:schemeClr val="accent1">
+              <a:shade val="50000"/>
+            </a:schemeClr>
+          </a:lnRef>
+          <a:fillRef idx="1">
+            <a:schemeClr val="accent1"/>
+          </a:fillRef>
+          <a:effectRef idx="0">
+            <a:schemeClr val="accent1"/>
+          </a:effectRef>
+          <a:fontRef idx="minor">
+            <a:schemeClr val="lt1"/>
+          </a:fontRef>
+        </p:style>
+        <p:txBody>
+          <a:bodyPr rtlCol="0" anchor="ctr"/>
+          <a:lstStyle/>
+          <a:p>
+            <a:pPr algn="ctr"/>
+            <a:endParaRPr lang="en-US"/>
+          </a:p>
+        </p:txBody>
+      </p:sp>
+      <p:sp>
+        <p:nvSpPr>
+          <p:cNvPr id="2" name="Title 1">
+            <a:extLst>
+              <a:ext uri="{FF2B5EF4-FFF2-40B4-BE49-F238E27FC236}">
+                <a16:creationId xmlns:a16="http://schemas.microsoft.com/office/drawing/2014/main" id="{19B99161-CF3F-3482-840E-53756302768D}"/>
+              </a:ext>
+            </a:extLst>
+          </p:cNvPr>
+          <p:cNvSpPr>
+            <a:spLocks noGrp="1"/>
+          </p:cNvSpPr>
+          <p:nvPr>
+            <p:ph type="title"/>
+          </p:nvPr>
+        </p:nvSpPr>
+        <p:spPr>
+          <a:xfrm>
+            <a:off x="826396" y="586855"/>
+            <a:ext cx="4230100" cy="3387497"/>
+          </a:xfrm>
+        </p:spPr>
+        <p:txBody>
+          <a:bodyPr anchor="b">
+            <a:normAutofit/>
+          </a:bodyPr>
+          <a:lstStyle/>
+          <a:p>
+            <a:pPr algn="r"/>
+            <a:r>
+              <a:rPr lang="en-US" sz="4000">
+                <a:solidFill>
+                  <a:srgbClr val="FFFFFF"/>
+                </a:solidFill>
+              </a:rPr>
+              <a:t>What we plan to change next sprint</a:t>
+            </a:r>
+          </a:p>
+        </p:txBody>
+      </p:sp>
+      <p:sp>
+        <p:nvSpPr>
+          <p:cNvPr id="3" name="Content Placeholder 2">
+            <a:extLst>
+              <a:ext uri="{FF2B5EF4-FFF2-40B4-BE49-F238E27FC236}">
+                <a16:creationId xmlns:a16="http://schemas.microsoft.com/office/drawing/2014/main" id="{9C21ADEC-A271-6C08-CE13-326274AD1660}"/>
+              </a:ext>
+            </a:extLst>
+          </p:cNvPr>
+          <p:cNvSpPr>
+            <a:spLocks noGrp="1"/>
+          </p:cNvSpPr>
+          <p:nvPr>
+            <p:ph idx="1"/>
+          </p:nvPr>
+        </p:nvSpPr>
+        <p:spPr>
+          <a:xfrm>
+            <a:off x="6503158" y="649480"/>
+            <a:ext cx="4862447" cy="5546047"/>
+          </a:xfrm>
+        </p:spPr>
+        <p:txBody>
+          <a:bodyPr anchor="ctr">
+            <a:normAutofit/>
+          </a:bodyPr>
+          <a:lstStyle/>
+          <a:p>
+            <a:r>
+              <a:rPr lang="en-US" sz="2000" dirty="0"/>
+              <a:t>Migrate to Project </a:t>
+            </a:r>
+            <a:r>
+              <a:rPr lang="en-US" sz="2000" dirty="0" err="1"/>
+              <a:t>AirSim</a:t>
+            </a:r>
+            <a:endParaRPr lang="en-US" sz="2000" dirty="0"/>
+          </a:p>
+          <a:p>
+            <a:pPr lvl="1">
+              <a:buFont typeface="Courier New" panose="020B0604020202020204" pitchFamily="34" charset="0"/>
+              <a:buChar char="o"/>
+            </a:pPr>
+            <a:r>
+              <a:rPr lang="en-US" sz="1600" dirty="0"/>
+              <a:t>The Successor to Microsoft </a:t>
+            </a:r>
+            <a:r>
+              <a:rPr lang="en-US" sz="1600" dirty="0" err="1"/>
+              <a:t>Airsim</a:t>
+            </a:r>
+            <a:r>
+              <a:rPr lang="en-US" sz="1600" dirty="0"/>
+              <a:t> Managed by IAMAI.</a:t>
+            </a:r>
+          </a:p>
+          <a:p>
+            <a:pPr marL="457200" lvl="1" indent="0">
+              <a:buNone/>
+            </a:pPr>
+            <a:r>
+              <a:rPr lang="en-US" sz="1600" dirty="0"/>
+              <a:t>That’s pretty much it!!</a:t>
+            </a:r>
+          </a:p>
+          <a:p>
+            <a:pPr marL="457200" lvl="1" indent="0">
+              <a:buNone/>
+            </a:pPr>
+            <a:endParaRPr lang="en-US" sz="2000" dirty="0"/>
+          </a:p>
+          <a:p>
+            <a:pPr marL="914400" lvl="2" indent="0">
+              <a:buNone/>
+            </a:pPr>
+            <a:endParaRPr lang="en-US" sz="1200" dirty="0"/>
+          </a:p>
+        </p:txBody>
+      </p:sp>
+    </p:spTree>
+    <p:extLst>
+      <p:ext uri="{BB962C8B-B14F-4D97-AF65-F5344CB8AC3E}">
+        <p14:creationId xmlns:p14="http://schemas.microsoft.com/office/powerpoint/2010/main" val="1048493380"/>
+      </p:ext>
+    </p:extLst>
+  </p:cSld>
+  <p:clrMapOvr>
+    <a:masterClrMapping/>
+  </p:clrMapOvr>
+</p:sld>
+</file>
+
 <file path=ppt/slides/slide2.xml><?xml version="1.0" encoding="utf-8"?>
+<p:sld xmlns:a="http://schemas.openxmlformats.org/drawingml/2006/main" xmlns:r="http://schemas.openxmlformats.org/officeDocument/2006/relationships" xmlns:p="http://schemas.openxmlformats.org/presentationml/2006/main">
+  <p:cSld>
+    <p:bg>
+      <p:bgPr>
+        <a:solidFill>
+          <a:schemeClr val="bg1"/>
+        </a:solidFill>
+        <a:effectLst/>
+      </p:bgPr>
+    </p:bg>
+    <p:spTree>
+      <p:nvGrpSpPr>
+        <p:cNvPr id="1" name=""/>
+        <p:cNvGrpSpPr/>
+        <p:nvPr/>
+      </p:nvGrpSpPr>
+      <p:grpSpPr>
+        <a:xfrm>
+          <a:off x="0" y="0"/>
+          <a:ext cx="0" cy="0"/>
+          <a:chOff x="0" y="0"/>
+          <a:chExt cx="0" cy="0"/>
+        </a:xfrm>
+      </p:grpSpPr>
+      <p:sp useBgFill="1">
+        <p:nvSpPr>
+          <p:cNvPr id="8" name="Rectangle 7">
+            <a:extLst>
+              <a:ext uri="{FF2B5EF4-FFF2-40B4-BE49-F238E27FC236}">
+                <a16:creationId xmlns:a16="http://schemas.microsoft.com/office/drawing/2014/main" id="{AC17DE74-01C9-4859-B65A-85CF999E8580}"/>
+              </a:ext>
+              <a:ext uri="{C183D7F6-B498-43B3-948B-1728B52AA6E4}">
+                <adec:decorative xmlns:adec="http://schemas.microsoft.com/office/drawing/2017/decorative" val="1"/>
+              </a:ext>
+            </a:extLst>
+          </p:cNvPr>
+          <p:cNvSpPr>
+            <a:spLocks noGrp="1" noRot="1" noChangeAspect="1" noMove="1" noResize="1" noEditPoints="1" noAdjustHandles="1" noChangeArrowheads="1" noChangeShapeType="1" noTextEdit="1"/>
+          </p:cNvSpPr>
+          <p:nvPr>
+            <p:extLst>
+              <p:ext uri="{386F3935-93C4-4BCD-93E2-E3B085C9AB24}">
+                <p16:designElem xmlns:p16="http://schemas.microsoft.com/office/powerpoint/2015/main" val="1"/>
+              </p:ext>
+            </p:extLst>
+          </p:nvPr>
+        </p:nvSpPr>
+        <p:spPr>
+          <a:xfrm>
+            <a:off x="0" y="0"/>
+            <a:ext cx="12188952" cy="6858000"/>
+          </a:xfrm>
+          <a:prstGeom prst="rect">
+            <a:avLst/>
+          </a:prstGeom>
+          <a:ln>
+            <a:noFill/>
+          </a:ln>
+        </p:spPr>
+        <p:style>
+          <a:lnRef idx="2">
+            <a:schemeClr val="accent1">
+              <a:shade val="50000"/>
+            </a:schemeClr>
+          </a:lnRef>
+          <a:fillRef idx="1">
+            <a:schemeClr val="accent1"/>
+          </a:fillRef>
+          <a:effectRef idx="0">
+            <a:schemeClr val="accent1"/>
+          </a:effectRef>
+          <a:fontRef idx="minor">
+            <a:schemeClr val="lt1"/>
+          </a:fontRef>
+        </p:style>
+        <p:txBody>
+          <a:bodyPr rtlCol="0" anchor="ctr"/>
+          <a:lstStyle/>
+          <a:p>
+            <a:pPr algn="ctr"/>
+            <a:endParaRPr lang="en-US"/>
+          </a:p>
+        </p:txBody>
+      </p:sp>
+      <p:sp>
+        <p:nvSpPr>
+          <p:cNvPr id="10" name="Freeform: Shape 9">
+            <a:extLst>
+              <a:ext uri="{FF2B5EF4-FFF2-40B4-BE49-F238E27FC236}">
+                <a16:creationId xmlns:a16="http://schemas.microsoft.com/office/drawing/2014/main" id="{068C0432-0E90-4CC1-8CD3-D44A90DF07EF}"/>
+              </a:ext>
+              <a:ext uri="{C183D7F6-B498-43B3-948B-1728B52AA6E4}">
+                <adec:decorative xmlns:adec="http://schemas.microsoft.com/office/drawing/2017/decorative" val="1"/>
+              </a:ext>
+            </a:extLst>
+          </p:cNvPr>
+          <p:cNvSpPr>
+            <a:spLocks noGrp="1" noRot="1" noChangeAspect="1" noMove="1" noResize="1" noEditPoints="1" noAdjustHandles="1" noChangeArrowheads="1" noChangeShapeType="1" noTextEdit="1"/>
+          </p:cNvSpPr>
+          <p:nvPr>
+            <p:extLst>
+              <p:ext uri="{386F3935-93C4-4BCD-93E2-E3B085C9AB24}">
+                <p16:designElem xmlns:p16="http://schemas.microsoft.com/office/powerpoint/2015/main" val="1"/>
+              </p:ext>
+            </p:extLst>
+          </p:nvPr>
+        </p:nvSpPr>
+        <p:spPr>
+          <a:xfrm>
+            <a:off x="0" y="0"/>
+            <a:ext cx="12192000" cy="2347414"/>
+          </a:xfrm>
+          <a:custGeom>
+            <a:avLst/>
+            <a:gdLst>
+              <a:gd name="connsiteX0" fmla="*/ 0 w 12192000"/>
+              <a:gd name="connsiteY0" fmla="*/ 0 h 2347414"/>
+              <a:gd name="connsiteX1" fmla="*/ 12192000 w 12192000"/>
+              <a:gd name="connsiteY1" fmla="*/ 0 h 2347414"/>
+              <a:gd name="connsiteX2" fmla="*/ 12192000 w 12192000"/>
+              <a:gd name="connsiteY2" fmla="*/ 1736458 h 2347414"/>
+              <a:gd name="connsiteX3" fmla="*/ 11967601 w 12192000"/>
+              <a:gd name="connsiteY3" fmla="*/ 1784034 h 2347414"/>
+              <a:gd name="connsiteX4" fmla="*/ 10829000 w 12192000"/>
+              <a:gd name="connsiteY4" fmla="*/ 1983294 h 2347414"/>
+              <a:gd name="connsiteX5" fmla="*/ 10743779 w 12192000"/>
+              <a:gd name="connsiteY5" fmla="*/ 1996027 h 2347414"/>
+              <a:gd name="connsiteX6" fmla="*/ 10829254 w 12192000"/>
+              <a:gd name="connsiteY6" fmla="*/ 1987751 h 2347414"/>
+              <a:gd name="connsiteX7" fmla="*/ 10847162 w 12192000"/>
+              <a:gd name="connsiteY7" fmla="*/ 1988388 h 2347414"/>
+              <a:gd name="connsiteX8" fmla="*/ 11575155 w 12192000"/>
+              <a:gd name="connsiteY8" fmla="*/ 1921415 h 2347414"/>
+              <a:gd name="connsiteX9" fmla="*/ 12192000 w 12192000"/>
+              <a:gd name="connsiteY9" fmla="*/ 1851213 h 2347414"/>
+              <a:gd name="connsiteX10" fmla="*/ 12192000 w 12192000"/>
+              <a:gd name="connsiteY10" fmla="*/ 1907356 h 2347414"/>
+              <a:gd name="connsiteX11" fmla="*/ 12035532 w 12192000"/>
+              <a:gd name="connsiteY11" fmla="*/ 1927033 h 2347414"/>
+              <a:gd name="connsiteX12" fmla="*/ 11576932 w 12192000"/>
+              <a:gd name="connsiteY12" fmla="*/ 1976291 h 2347414"/>
+              <a:gd name="connsiteX13" fmla="*/ 10627316 w 12192000"/>
+              <a:gd name="connsiteY13" fmla="*/ 2061470 h 2347414"/>
+              <a:gd name="connsiteX14" fmla="*/ 9804196 w 12192000"/>
+              <a:gd name="connsiteY14" fmla="*/ 2123478 h 2347414"/>
+              <a:gd name="connsiteX15" fmla="*/ 9243851 w 12192000"/>
+              <a:gd name="connsiteY15" fmla="*/ 2180008 h 2347414"/>
+              <a:gd name="connsiteX16" fmla="*/ 8731259 w 12192000"/>
+              <a:gd name="connsiteY16" fmla="*/ 2225081 h 2347414"/>
+              <a:gd name="connsiteX17" fmla="*/ 8065752 w 12192000"/>
+              <a:gd name="connsiteY17" fmla="*/ 2271681 h 2347414"/>
+              <a:gd name="connsiteX18" fmla="*/ 7658065 w 12192000"/>
+              <a:gd name="connsiteY18" fmla="*/ 2292562 h 2347414"/>
+              <a:gd name="connsiteX19" fmla="*/ 6531024 w 12192000"/>
+              <a:gd name="connsiteY19" fmla="*/ 2324138 h 2347414"/>
+              <a:gd name="connsiteX20" fmla="*/ 6178331 w 12192000"/>
+              <a:gd name="connsiteY20" fmla="*/ 2345655 h 2347414"/>
+              <a:gd name="connsiteX21" fmla="*/ 5977282 w 12192000"/>
+              <a:gd name="connsiteY21" fmla="*/ 2344127 h 2347414"/>
+              <a:gd name="connsiteX22" fmla="*/ 5367658 w 12192000"/>
+              <a:gd name="connsiteY22" fmla="*/ 2329230 h 2347414"/>
+              <a:gd name="connsiteX23" fmla="*/ 4387306 w 12192000"/>
+              <a:gd name="connsiteY23" fmla="*/ 2288614 h 2347414"/>
+              <a:gd name="connsiteX24" fmla="*/ 4180287 w 12192000"/>
+              <a:gd name="connsiteY24" fmla="*/ 2280211 h 2347414"/>
+              <a:gd name="connsiteX25" fmla="*/ 3842199 w 12192000"/>
+              <a:gd name="connsiteY25" fmla="*/ 2257039 h 2347414"/>
+              <a:gd name="connsiteX26" fmla="*/ 3730309 w 12192000"/>
+              <a:gd name="connsiteY26" fmla="*/ 2251182 h 2347414"/>
+              <a:gd name="connsiteX27" fmla="*/ 3425496 w 12192000"/>
+              <a:gd name="connsiteY27" fmla="*/ 2231320 h 2347414"/>
+              <a:gd name="connsiteX28" fmla="*/ 3076106 w 12192000"/>
+              <a:gd name="connsiteY28" fmla="*/ 2201781 h 2347414"/>
+              <a:gd name="connsiteX29" fmla="*/ 2819682 w 12192000"/>
+              <a:gd name="connsiteY29" fmla="*/ 2182427 h 2347414"/>
+              <a:gd name="connsiteX30" fmla="*/ 2525539 w 12192000"/>
+              <a:gd name="connsiteY30" fmla="*/ 2152888 h 2347414"/>
+              <a:gd name="connsiteX31" fmla="*/ 2311915 w 12192000"/>
+              <a:gd name="connsiteY31" fmla="*/ 2133536 h 2347414"/>
+              <a:gd name="connsiteX32" fmla="*/ 2054223 w 12192000"/>
+              <a:gd name="connsiteY32" fmla="*/ 2104760 h 2347414"/>
+              <a:gd name="connsiteX33" fmla="*/ 1865367 w 12192000"/>
+              <a:gd name="connsiteY33" fmla="*/ 2084770 h 2347414"/>
+              <a:gd name="connsiteX34" fmla="*/ 1629263 w 12192000"/>
+              <a:gd name="connsiteY34" fmla="*/ 2055996 h 2347414"/>
+              <a:gd name="connsiteX35" fmla="*/ 1458823 w 12192000"/>
+              <a:gd name="connsiteY35" fmla="*/ 2035751 h 2347414"/>
+              <a:gd name="connsiteX36" fmla="*/ 1241390 w 12192000"/>
+              <a:gd name="connsiteY36" fmla="*/ 2007103 h 2347414"/>
+              <a:gd name="connsiteX37" fmla="*/ 1047453 w 12192000"/>
+              <a:gd name="connsiteY37" fmla="*/ 1980748 h 2347414"/>
+              <a:gd name="connsiteX38" fmla="*/ 814907 w 12192000"/>
+              <a:gd name="connsiteY38" fmla="*/ 1949045 h 2347414"/>
+              <a:gd name="connsiteX39" fmla="*/ 592649 w 12192000"/>
+              <a:gd name="connsiteY39" fmla="*/ 1913776 h 2347414"/>
+              <a:gd name="connsiteX40" fmla="*/ 343591 w 12192000"/>
+              <a:gd name="connsiteY40" fmla="*/ 1872650 h 2347414"/>
+              <a:gd name="connsiteX41" fmla="*/ 35731 w 12192000"/>
+              <a:gd name="connsiteY41" fmla="*/ 1821722 h 2347414"/>
+              <a:gd name="connsiteX42" fmla="*/ 0 w 12192000"/>
+              <a:gd name="connsiteY42" fmla="*/ 1814848 h 2347414"/>
+              <a:gd name="connsiteX43" fmla="*/ 0 w 12192000"/>
+              <a:gd name="connsiteY43" fmla="*/ 1758489 h 2347414"/>
+              <a:gd name="connsiteX44" fmla="*/ 274248 w 12192000"/>
+              <a:gd name="connsiteY44" fmla="*/ 1808735 h 2347414"/>
+              <a:gd name="connsiteX45" fmla="*/ 498157 w 12192000"/>
+              <a:gd name="connsiteY45" fmla="*/ 1846167 h 2347414"/>
+              <a:gd name="connsiteX46" fmla="*/ 722828 w 12192000"/>
+              <a:gd name="connsiteY46" fmla="*/ 1878635 h 2347414"/>
+              <a:gd name="connsiteX47" fmla="*/ 949913 w 12192000"/>
+              <a:gd name="connsiteY47" fmla="*/ 1912375 h 2347414"/>
+              <a:gd name="connsiteX48" fmla="*/ 1195414 w 12192000"/>
+              <a:gd name="connsiteY48" fmla="*/ 1947516 h 2347414"/>
+              <a:gd name="connsiteX49" fmla="*/ 1342867 w 12192000"/>
+              <a:gd name="connsiteY49" fmla="*/ 1968397 h 2347414"/>
+              <a:gd name="connsiteX50" fmla="*/ 1518007 w 12192000"/>
+              <a:gd name="connsiteY50" fmla="*/ 1988006 h 2347414"/>
+              <a:gd name="connsiteX51" fmla="*/ 1701403 w 12192000"/>
+              <a:gd name="connsiteY51" fmla="*/ 2010669 h 2347414"/>
+              <a:gd name="connsiteX52" fmla="*/ 1879210 w 12192000"/>
+              <a:gd name="connsiteY52" fmla="*/ 2031167 h 2347414"/>
+              <a:gd name="connsiteX53" fmla="*/ 2068702 w 12192000"/>
+              <a:gd name="connsiteY53" fmla="*/ 2052940 h 2347414"/>
+              <a:gd name="connsiteX54" fmla="*/ 2212090 w 12192000"/>
+              <a:gd name="connsiteY54" fmla="*/ 2067583 h 2347414"/>
+              <a:gd name="connsiteX55" fmla="*/ 2416949 w 12192000"/>
+              <a:gd name="connsiteY55" fmla="*/ 2089609 h 2347414"/>
+              <a:gd name="connsiteX56" fmla="*/ 2582055 w 12192000"/>
+              <a:gd name="connsiteY56" fmla="*/ 2105397 h 2347414"/>
+              <a:gd name="connsiteX57" fmla="*/ 2802282 w 12192000"/>
+              <a:gd name="connsiteY57" fmla="*/ 2126405 h 2347414"/>
+              <a:gd name="connsiteX58" fmla="*/ 2984916 w 12192000"/>
+              <a:gd name="connsiteY58" fmla="*/ 2141684 h 2347414"/>
+              <a:gd name="connsiteX59" fmla="*/ 3241847 w 12192000"/>
+              <a:gd name="connsiteY59" fmla="*/ 2164094 h 2347414"/>
+              <a:gd name="connsiteX60" fmla="*/ 3439848 w 12192000"/>
+              <a:gd name="connsiteY60" fmla="*/ 2176826 h 2347414"/>
+              <a:gd name="connsiteX61" fmla="*/ 3658678 w 12192000"/>
+              <a:gd name="connsiteY61" fmla="*/ 2194523 h 2347414"/>
+              <a:gd name="connsiteX62" fmla="*/ 3881317 w 12192000"/>
+              <a:gd name="connsiteY62" fmla="*/ 2206491 h 2347414"/>
+              <a:gd name="connsiteX63" fmla="*/ 4148916 w 12192000"/>
+              <a:gd name="connsiteY63" fmla="*/ 2225081 h 2347414"/>
+              <a:gd name="connsiteX64" fmla="*/ 4468337 w 12192000"/>
+              <a:gd name="connsiteY64" fmla="*/ 2237813 h 2347414"/>
+              <a:gd name="connsiteX65" fmla="*/ 4605375 w 12192000"/>
+              <a:gd name="connsiteY65" fmla="*/ 2240232 h 2347414"/>
+              <a:gd name="connsiteX66" fmla="*/ 4527647 w 12192000"/>
+              <a:gd name="connsiteY66" fmla="*/ 2236412 h 2347414"/>
+              <a:gd name="connsiteX67" fmla="*/ 4175589 w 12192000"/>
+              <a:gd name="connsiteY67" fmla="*/ 2212985 h 2347414"/>
+              <a:gd name="connsiteX68" fmla="*/ 3988255 w 12192000"/>
+              <a:gd name="connsiteY68" fmla="*/ 2200253 h 2347414"/>
+              <a:gd name="connsiteX69" fmla="*/ 3686492 w 12192000"/>
+              <a:gd name="connsiteY69" fmla="*/ 2176062 h 2347414"/>
+              <a:gd name="connsiteX70" fmla="*/ 3517320 w 12192000"/>
+              <a:gd name="connsiteY70" fmla="*/ 2163330 h 2347414"/>
+              <a:gd name="connsiteX71" fmla="*/ 3258357 w 12192000"/>
+              <a:gd name="connsiteY71" fmla="*/ 2139519 h 2347414"/>
+              <a:gd name="connsiteX72" fmla="*/ 3101506 w 12192000"/>
+              <a:gd name="connsiteY72" fmla="*/ 2126787 h 2347414"/>
+              <a:gd name="connsiteX73" fmla="*/ 2809395 w 12192000"/>
+              <a:gd name="connsiteY73" fmla="*/ 2097502 h 2347414"/>
+              <a:gd name="connsiteX74" fmla="*/ 2598566 w 12192000"/>
+              <a:gd name="connsiteY74" fmla="*/ 2078532 h 2347414"/>
+              <a:gd name="connsiteX75" fmla="*/ 2337444 w 12192000"/>
+              <a:gd name="connsiteY75" fmla="*/ 2048611 h 2347414"/>
+              <a:gd name="connsiteX76" fmla="*/ 2091054 w 12192000"/>
+              <a:gd name="connsiteY76" fmla="*/ 2023146 h 2347414"/>
+              <a:gd name="connsiteX77" fmla="*/ 1755761 w 12192000"/>
+              <a:gd name="connsiteY77" fmla="*/ 1981384 h 2347414"/>
+              <a:gd name="connsiteX78" fmla="*/ 1441169 w 12192000"/>
+              <a:gd name="connsiteY78" fmla="*/ 1943824 h 2347414"/>
+              <a:gd name="connsiteX79" fmla="*/ 1017607 w 12192000"/>
+              <a:gd name="connsiteY79" fmla="*/ 1883345 h 2347414"/>
+              <a:gd name="connsiteX80" fmla="*/ 594427 w 12192000"/>
+              <a:gd name="connsiteY80" fmla="*/ 1821849 h 2347414"/>
+              <a:gd name="connsiteX81" fmla="*/ 200711 w 12192000"/>
+              <a:gd name="connsiteY81" fmla="*/ 1755132 h 2347414"/>
+              <a:gd name="connsiteX82" fmla="*/ 0 w 12192000"/>
+              <a:gd name="connsiteY82" fmla="*/ 1718743 h 2347414"/>
+            </a:gdLst>
+            <a:ahLst/>
+            <a:cxnLst>
+              <a:cxn ang="0">
+                <a:pos x="connsiteX0" y="connsiteY0"/>
+              </a:cxn>
+              <a:cxn ang="0">
+                <a:pos x="connsiteX1" y="connsiteY1"/>
+              </a:cxn>
+              <a:cxn ang="0">
+                <a:pos x="connsiteX2" y="connsiteY2"/>
+              </a:cxn>
+              <a:cxn ang="0">
+                <a:pos x="connsiteX3" y="connsiteY3"/>
+              </a:cxn>
+              <a:cxn ang="0">
+                <a:pos x="connsiteX4" y="connsiteY4"/>
+              </a:cxn>
+              <a:cxn ang="0">
+                <a:pos x="connsiteX5" y="connsiteY5"/>
+              </a:cxn>
+              <a:cxn ang="0">
+                <a:pos x="connsiteX6" y="connsiteY6"/>
+              </a:cxn>
+              <a:cxn ang="0">
+                <a:pos x="connsiteX7" y="connsiteY7"/>
+              </a:cxn>
+              <a:cxn ang="0">
+                <a:pos x="connsiteX8" y="connsiteY8"/>
+              </a:cxn>
+              <a:cxn ang="0">
+                <a:pos x="connsiteX9" y="connsiteY9"/>
+              </a:cxn>
+              <a:cxn ang="0">
+                <a:pos x="connsiteX10" y="connsiteY10"/>
+              </a:cxn>
+              <a:cxn ang="0">
+                <a:pos x="connsiteX11" y="connsiteY11"/>
+              </a:cxn>
+              <a:cxn ang="0">
+                <a:pos x="connsiteX12" y="connsiteY12"/>
+              </a:cxn>
+              <a:cxn ang="0">
+                <a:pos x="connsiteX13" y="connsiteY13"/>
+              </a:cxn>
+              <a:cxn ang="0">
+                <a:pos x="connsiteX14" y="connsiteY14"/>
+              </a:cxn>
+              <a:cxn ang="0">
+                <a:pos x="connsiteX15" y="connsiteY15"/>
+              </a:cxn>
+              <a:cxn ang="0">
+                <a:pos x="connsiteX16" y="connsiteY16"/>
+              </a:cxn>
+              <a:cxn ang="0">
+                <a:pos x="connsiteX17" y="connsiteY17"/>
+              </a:cxn>
+              <a:cxn ang="0">
+                <a:pos x="connsiteX18" y="connsiteY18"/>
+              </a:cxn>
+              <a:cxn ang="0">
+                <a:pos x="connsiteX19" y="connsiteY19"/>
+              </a:cxn>
+              <a:cxn ang="0">
+                <a:pos x="connsiteX20" y="connsiteY20"/>
+              </a:cxn>
+              <a:cxn ang="0">
+                <a:pos x="connsiteX21" y="connsiteY21"/>
+              </a:cxn>
+              <a:cxn ang="0">
+                <a:pos x="connsiteX22" y="connsiteY22"/>
+              </a:cxn>
+              <a:cxn ang="0">
+                <a:pos x="connsiteX23" y="connsiteY23"/>
+              </a:cxn>
+              <a:cxn ang="0">
+                <a:pos x="connsiteX24" y="connsiteY24"/>
+              </a:cxn>
+              <a:cxn ang="0">
+                <a:pos x="connsiteX25" y="connsiteY25"/>
+              </a:cxn>
+              <a:cxn ang="0">
+                <a:pos x="connsiteX26" y="connsiteY26"/>
+              </a:cxn>
+              <a:cxn ang="0">
+                <a:pos x="connsiteX27" y="connsiteY27"/>
+              </a:cxn>
+              <a:cxn ang="0">
+                <a:pos x="connsiteX28" y="connsiteY28"/>
+              </a:cxn>
+              <a:cxn ang="0">
+                <a:pos x="connsiteX29" y="connsiteY29"/>
+              </a:cxn>
+              <a:cxn ang="0">
+                <a:pos x="connsiteX30" y="connsiteY30"/>
+              </a:cxn>
+              <a:cxn ang="0">
+                <a:pos x="connsiteX31" y="connsiteY31"/>
+              </a:cxn>
+              <a:cxn ang="0">
+                <a:pos x="connsiteX32" y="connsiteY32"/>
+              </a:cxn>
+              <a:cxn ang="0">
+                <a:pos x="connsiteX33" y="connsiteY33"/>
+              </a:cxn>
+              <a:cxn ang="0">
+                <a:pos x="connsiteX34" y="connsiteY34"/>
+              </a:cxn>
+              <a:cxn ang="0">
+                <a:pos x="connsiteX35" y="connsiteY35"/>
+              </a:cxn>
+              <a:cxn ang="0">
+                <a:pos x="connsiteX36" y="connsiteY36"/>
+              </a:cxn>
+              <a:cxn ang="0">
+                <a:pos x="connsiteX37" y="connsiteY37"/>
+              </a:cxn>
+              <a:cxn ang="0">
+                <a:pos x="connsiteX38" y="connsiteY38"/>
+              </a:cxn>
+              <a:cxn ang="0">
+                <a:pos x="connsiteX39" y="connsiteY39"/>
+              </a:cxn>
+              <a:cxn ang="0">
+                <a:pos x="connsiteX40" y="connsiteY40"/>
+              </a:cxn>
+              <a:cxn ang="0">
+                <a:pos x="connsiteX41" y="connsiteY41"/>
+              </a:cxn>
+              <a:cxn ang="0">
+                <a:pos x="connsiteX42" y="connsiteY42"/>
+              </a:cxn>
+              <a:cxn ang="0">
+                <a:pos x="connsiteX43" y="connsiteY43"/>
+              </a:cxn>
+              <a:cxn ang="0">
+                <a:pos x="connsiteX44" y="connsiteY44"/>
+              </a:cxn>
+              <a:cxn ang="0">
+                <a:pos x="connsiteX45" y="connsiteY45"/>
+              </a:cxn>
+              <a:cxn ang="0">
+                <a:pos x="connsiteX46" y="connsiteY46"/>
+              </a:cxn>
+              <a:cxn ang="0">
+                <a:pos x="connsiteX47" y="connsiteY47"/>
+              </a:cxn>
+              <a:cxn ang="0">
+                <a:pos x="connsiteX48" y="connsiteY48"/>
+              </a:cxn>
+              <a:cxn ang="0">
+                <a:pos x="connsiteX49" y="connsiteY49"/>
+              </a:cxn>
+              <a:cxn ang="0">
+                <a:pos x="connsiteX50" y="connsiteY50"/>
+              </a:cxn>
+              <a:cxn ang="0">
+                <a:pos x="connsiteX51" y="connsiteY51"/>
+              </a:cxn>
+              <a:cxn ang="0">
+                <a:pos x="connsiteX52" y="connsiteY52"/>
+              </a:cxn>
+              <a:cxn ang="0">
+                <a:pos x="connsiteX53" y="connsiteY53"/>
+              </a:cxn>
+              <a:cxn ang="0">
+                <a:pos x="connsiteX54" y="connsiteY54"/>
+              </a:cxn>
+              <a:cxn ang="0">
+                <a:pos x="connsiteX55" y="connsiteY55"/>
+              </a:cxn>
+              <a:cxn ang="0">
+                <a:pos x="connsiteX56" y="connsiteY56"/>
+              </a:cxn>
+              <a:cxn ang="0">
+                <a:pos x="connsiteX57" y="connsiteY57"/>
+              </a:cxn>
+              <a:cxn ang="0">
+                <a:pos x="connsiteX58" y="connsiteY58"/>
+              </a:cxn>
+              <a:cxn ang="0">
+                <a:pos x="connsiteX59" y="connsiteY59"/>
+              </a:cxn>
+              <a:cxn ang="0">
+                <a:pos x="connsiteX60" y="connsiteY60"/>
+              </a:cxn>
+              <a:cxn ang="0">
+                <a:pos x="connsiteX61" y="connsiteY61"/>
+              </a:cxn>
+              <a:cxn ang="0">
+                <a:pos x="connsiteX62" y="connsiteY62"/>
+              </a:cxn>
+              <a:cxn ang="0">
+                <a:pos x="connsiteX63" y="connsiteY63"/>
+              </a:cxn>
+              <a:cxn ang="0">
+                <a:pos x="connsiteX64" y="connsiteY64"/>
+              </a:cxn>
+              <a:cxn ang="0">
+                <a:pos x="connsiteX65" y="connsiteY65"/>
+              </a:cxn>
+              <a:cxn ang="0">
+                <a:pos x="connsiteX66" y="connsiteY66"/>
+              </a:cxn>
+              <a:cxn ang="0">
+                <a:pos x="connsiteX67" y="connsiteY67"/>
+              </a:cxn>
+              <a:cxn ang="0">
+                <a:pos x="connsiteX68" y="connsiteY68"/>
+              </a:cxn>
+              <a:cxn ang="0">
+                <a:pos x="connsiteX69" y="connsiteY69"/>
+              </a:cxn>
+              <a:cxn ang="0">
+                <a:pos x="connsiteX70" y="connsiteY70"/>
+              </a:cxn>
+              <a:cxn ang="0">
+                <a:pos x="connsiteX71" y="connsiteY71"/>
+              </a:cxn>
+              <a:cxn ang="0">
+                <a:pos x="connsiteX72" y="connsiteY72"/>
+              </a:cxn>
+              <a:cxn ang="0">
+                <a:pos x="connsiteX73" y="connsiteY73"/>
+              </a:cxn>
+              <a:cxn ang="0">
+                <a:pos x="connsiteX74" y="connsiteY74"/>
+              </a:cxn>
+              <a:cxn ang="0">
+                <a:pos x="connsiteX75" y="connsiteY75"/>
+              </a:cxn>
+              <a:cxn ang="0">
+                <a:pos x="connsiteX76" y="connsiteY76"/>
+              </a:cxn>
+              <a:cxn ang="0">
+                <a:pos x="connsiteX77" y="connsiteY77"/>
+              </a:cxn>
+              <a:cxn ang="0">
+                <a:pos x="connsiteX78" y="connsiteY78"/>
+              </a:cxn>
+              <a:cxn ang="0">
+                <a:pos x="connsiteX79" y="connsiteY79"/>
+              </a:cxn>
+              <a:cxn ang="0">
+                <a:pos x="connsiteX80" y="connsiteY80"/>
+              </a:cxn>
+              <a:cxn ang="0">
+                <a:pos x="connsiteX81" y="connsiteY81"/>
+              </a:cxn>
+              <a:cxn ang="0">
+                <a:pos x="connsiteX82" y="connsiteY82"/>
+              </a:cxn>
+            </a:cxnLst>
+            <a:rect l="l" t="t" r="r" b="b"/>
+            <a:pathLst>
+              <a:path w="12192000" h="2347414">
+                <a:moveTo>
+                  <a:pt x="0" y="0"/>
+                </a:moveTo>
+                <a:lnTo>
+                  <a:pt x="12192000" y="0"/>
+                </a:lnTo>
+                <a:lnTo>
+                  <a:pt x="12192000" y="1736458"/>
+                </a:lnTo>
+                <a:lnTo>
+                  <a:pt x="11967601" y="1784034"/>
+                </a:lnTo>
+                <a:cubicBezTo>
+                  <a:pt x="11589888" y="1859409"/>
+                  <a:pt x="11209762" y="1923961"/>
+                  <a:pt x="10829000" y="1983294"/>
+                </a:cubicBezTo>
+                <a:lnTo>
+                  <a:pt x="10743779" y="1996027"/>
+                </a:lnTo>
+                <a:cubicBezTo>
+                  <a:pt x="10772495" y="1996778"/>
+                  <a:pt x="10801211" y="1993989"/>
+                  <a:pt x="10829254" y="1987751"/>
+                </a:cubicBezTo>
+                <a:cubicBezTo>
+                  <a:pt x="10835198" y="1988337"/>
+                  <a:pt x="10841180" y="1988553"/>
+                  <a:pt x="10847162" y="1988388"/>
+                </a:cubicBezTo>
+                <a:cubicBezTo>
+                  <a:pt x="11090123" y="1968907"/>
+                  <a:pt x="11332703" y="1945734"/>
+                  <a:pt x="11575155" y="1921415"/>
+                </a:cubicBezTo>
+                <a:lnTo>
+                  <a:pt x="12192000" y="1851213"/>
+                </a:lnTo>
+                <a:lnTo>
+                  <a:pt x="12192000" y="1907356"/>
+                </a:lnTo>
+                <a:lnTo>
+                  <a:pt x="12035532" y="1927033"/>
+                </a:lnTo>
+                <a:cubicBezTo>
+                  <a:pt x="11882793" y="1944747"/>
+                  <a:pt x="11729910" y="1961077"/>
+                  <a:pt x="11576932" y="1976291"/>
+                </a:cubicBezTo>
+                <a:cubicBezTo>
+                  <a:pt x="11260690" y="2008122"/>
+                  <a:pt x="10944193" y="2037279"/>
+                  <a:pt x="10627316" y="2061470"/>
+                </a:cubicBezTo>
+                <a:cubicBezTo>
+                  <a:pt x="10352985" y="2082351"/>
+                  <a:pt x="10078401" y="2100431"/>
+                  <a:pt x="9804196" y="2123478"/>
+                </a:cubicBezTo>
+                <a:cubicBezTo>
+                  <a:pt x="9617118" y="2139137"/>
+                  <a:pt x="9430675" y="2161674"/>
+                  <a:pt x="9243851" y="2180008"/>
+                </a:cubicBezTo>
+                <a:cubicBezTo>
+                  <a:pt x="9073157" y="2196433"/>
+                  <a:pt x="8902207" y="2211966"/>
+                  <a:pt x="8731259" y="2225081"/>
+                </a:cubicBezTo>
+                <a:cubicBezTo>
+                  <a:pt x="8509507" y="2242054"/>
+                  <a:pt x="8287667" y="2257586"/>
+                  <a:pt x="8065752" y="2271681"/>
+                </a:cubicBezTo>
+                <a:cubicBezTo>
+                  <a:pt x="7929984" y="2280466"/>
+                  <a:pt x="7793961" y="2285814"/>
+                  <a:pt x="7658065" y="2292562"/>
+                </a:cubicBezTo>
+                <a:cubicBezTo>
+                  <a:pt x="7282640" y="2311661"/>
+                  <a:pt x="6906704" y="2314208"/>
+                  <a:pt x="6531024" y="2324138"/>
+                </a:cubicBezTo>
+                <a:cubicBezTo>
+                  <a:pt x="6413417" y="2327322"/>
+                  <a:pt x="6295937" y="2338399"/>
+                  <a:pt x="6178331" y="2345655"/>
+                </a:cubicBezTo>
+                <a:cubicBezTo>
+                  <a:pt x="6111271" y="2349730"/>
+                  <a:pt x="6044342" y="2345655"/>
+                  <a:pt x="5977282" y="2344127"/>
+                </a:cubicBezTo>
+                <a:cubicBezTo>
+                  <a:pt x="5774073" y="2338908"/>
+                  <a:pt x="5570866" y="2334960"/>
+                  <a:pt x="5367658" y="2329230"/>
+                </a:cubicBezTo>
+                <a:cubicBezTo>
+                  <a:pt x="5040746" y="2319809"/>
+                  <a:pt x="4713963" y="2306274"/>
+                  <a:pt x="4387306" y="2288614"/>
+                </a:cubicBezTo>
+                <a:cubicBezTo>
+                  <a:pt x="4318342" y="2284796"/>
+                  <a:pt x="4249253" y="2284286"/>
+                  <a:pt x="4180287" y="2280211"/>
+                </a:cubicBezTo>
+                <a:cubicBezTo>
+                  <a:pt x="4067634" y="2273463"/>
+                  <a:pt x="3954980" y="2265060"/>
+                  <a:pt x="3842199" y="2257039"/>
+                </a:cubicBezTo>
+                <a:cubicBezTo>
+                  <a:pt x="3804988" y="2254492"/>
+                  <a:pt x="3767648" y="2254620"/>
+                  <a:pt x="3730309" y="2251182"/>
+                </a:cubicBezTo>
+                <a:cubicBezTo>
+                  <a:pt x="3628704" y="2242142"/>
+                  <a:pt x="3527101" y="2238449"/>
+                  <a:pt x="3425496" y="2231320"/>
+                </a:cubicBezTo>
+                <a:cubicBezTo>
+                  <a:pt x="3308906" y="2222534"/>
+                  <a:pt x="3192569" y="2211330"/>
+                  <a:pt x="3076106" y="2201781"/>
+                </a:cubicBezTo>
+                <a:cubicBezTo>
+                  <a:pt x="2990757" y="2194905"/>
+                  <a:pt x="2905157" y="2190067"/>
+                  <a:pt x="2819682" y="2182427"/>
+                </a:cubicBezTo>
+                <a:cubicBezTo>
+                  <a:pt x="2721507" y="2173515"/>
+                  <a:pt x="2623586" y="2162311"/>
+                  <a:pt x="2525539" y="2152888"/>
+                </a:cubicBezTo>
+                <a:cubicBezTo>
+                  <a:pt x="2454289" y="2145886"/>
+                  <a:pt x="2383038" y="2140920"/>
+                  <a:pt x="2311915" y="2133536"/>
+                </a:cubicBezTo>
+                <a:cubicBezTo>
+                  <a:pt x="2225933" y="2124749"/>
+                  <a:pt x="2140204" y="2114182"/>
+                  <a:pt x="2054223" y="2104760"/>
+                </a:cubicBezTo>
+                <a:cubicBezTo>
+                  <a:pt x="1990719" y="2097758"/>
+                  <a:pt x="1928233" y="2092028"/>
+                  <a:pt x="1865367" y="2084770"/>
+                </a:cubicBezTo>
+                <a:cubicBezTo>
+                  <a:pt x="1786622" y="2075603"/>
+                  <a:pt x="1708006" y="2065545"/>
+                  <a:pt x="1629263" y="2055996"/>
+                </a:cubicBezTo>
+                <a:cubicBezTo>
+                  <a:pt x="1572492" y="2049120"/>
+                  <a:pt x="1515595" y="2043264"/>
+                  <a:pt x="1458823" y="2035751"/>
+                </a:cubicBezTo>
+                <a:cubicBezTo>
+                  <a:pt x="1386303" y="2026585"/>
+                  <a:pt x="1313784" y="2016780"/>
+                  <a:pt x="1241390" y="2007103"/>
+                </a:cubicBezTo>
+                <a:lnTo>
+                  <a:pt x="1047453" y="1980748"/>
+                </a:lnTo>
+                <a:cubicBezTo>
+                  <a:pt x="969980" y="1970180"/>
+                  <a:pt x="892254" y="1960377"/>
+                  <a:pt x="814907" y="1949045"/>
+                </a:cubicBezTo>
+                <a:cubicBezTo>
+                  <a:pt x="740609" y="1938094"/>
+                  <a:pt x="666692" y="1925744"/>
+                  <a:pt x="592649" y="1913776"/>
+                </a:cubicBezTo>
+                <a:cubicBezTo>
+                  <a:pt x="509587" y="1900280"/>
+                  <a:pt x="426653" y="1886274"/>
+                  <a:pt x="343591" y="1872650"/>
+                </a:cubicBezTo>
+                <a:cubicBezTo>
+                  <a:pt x="240972" y="1855716"/>
+                  <a:pt x="138225" y="1839673"/>
+                  <a:pt x="35731" y="1821722"/>
+                </a:cubicBezTo>
+                <a:lnTo>
+                  <a:pt x="0" y="1814848"/>
+                </a:lnTo>
+                <a:lnTo>
+                  <a:pt x="0" y="1758489"/>
+                </a:lnTo>
+                <a:lnTo>
+                  <a:pt x="274248" y="1808735"/>
+                </a:lnTo>
+                <a:cubicBezTo>
+                  <a:pt x="348926" y="1821467"/>
+                  <a:pt x="423604" y="1832798"/>
+                  <a:pt x="498157" y="1846167"/>
+                </a:cubicBezTo>
+                <a:cubicBezTo>
+                  <a:pt x="572708" y="1859536"/>
+                  <a:pt x="647896" y="1867813"/>
+                  <a:pt x="722828" y="1878635"/>
+                </a:cubicBezTo>
+                <a:cubicBezTo>
+                  <a:pt x="797762" y="1889457"/>
+                  <a:pt x="874219" y="1901426"/>
+                  <a:pt x="949913" y="1912375"/>
+                </a:cubicBezTo>
+                <a:cubicBezTo>
+                  <a:pt x="1031704" y="1924343"/>
+                  <a:pt x="1113496" y="1935802"/>
+                  <a:pt x="1195414" y="1947516"/>
+                </a:cubicBezTo>
+                <a:cubicBezTo>
+                  <a:pt x="1244566" y="1954519"/>
+                  <a:pt x="1293589" y="1962285"/>
+                  <a:pt x="1342867" y="1968397"/>
+                </a:cubicBezTo>
+                <a:cubicBezTo>
+                  <a:pt x="1401162" y="1975656"/>
+                  <a:pt x="1459712" y="1981130"/>
+                  <a:pt x="1518007" y="1988006"/>
+                </a:cubicBezTo>
+                <a:cubicBezTo>
+                  <a:pt x="1579224" y="1995263"/>
+                  <a:pt x="1640186" y="2003411"/>
+                  <a:pt x="1701403" y="2010669"/>
+                </a:cubicBezTo>
+                <a:cubicBezTo>
+                  <a:pt x="1762618" y="2017926"/>
+                  <a:pt x="1820279" y="2024292"/>
+                  <a:pt x="1879210" y="2031167"/>
+                </a:cubicBezTo>
+                <a:cubicBezTo>
+                  <a:pt x="1942712" y="2038425"/>
+                  <a:pt x="2006214" y="2046064"/>
+                  <a:pt x="2068702" y="2052940"/>
+                </a:cubicBezTo>
+                <a:cubicBezTo>
+                  <a:pt x="2116455" y="2058160"/>
+                  <a:pt x="2164335" y="2062362"/>
+                  <a:pt x="2212090" y="2067583"/>
+                </a:cubicBezTo>
+                <a:cubicBezTo>
+                  <a:pt x="2280419" y="2074967"/>
+                  <a:pt x="2348493" y="2085152"/>
+                  <a:pt x="2416949" y="2089609"/>
+                </a:cubicBezTo>
+                <a:cubicBezTo>
+                  <a:pt x="2472070" y="2093302"/>
+                  <a:pt x="2526936" y="2099540"/>
+                  <a:pt x="2582055" y="2105397"/>
+                </a:cubicBezTo>
+                <a:cubicBezTo>
+                  <a:pt x="2655337" y="2113291"/>
+                  <a:pt x="2729001" y="2119785"/>
+                  <a:pt x="2802282" y="2126405"/>
+                </a:cubicBezTo>
+                <a:cubicBezTo>
+                  <a:pt x="2862991" y="2131753"/>
+                  <a:pt x="2924207" y="2136337"/>
+                  <a:pt x="2984916" y="2141684"/>
+                </a:cubicBezTo>
+                <a:cubicBezTo>
+                  <a:pt x="3070516" y="2149324"/>
+                  <a:pt x="3156373" y="2152888"/>
+                  <a:pt x="3241847" y="2164094"/>
+                </a:cubicBezTo>
+                <a:cubicBezTo>
+                  <a:pt x="3307255" y="2172624"/>
+                  <a:pt x="3374060" y="2169822"/>
+                  <a:pt x="3439848" y="2176826"/>
+                </a:cubicBezTo>
+                <a:cubicBezTo>
+                  <a:pt x="3512622" y="2184592"/>
+                  <a:pt x="3585777" y="2186247"/>
+                  <a:pt x="3658678" y="2194523"/>
+                </a:cubicBezTo>
+                <a:cubicBezTo>
+                  <a:pt x="3731578" y="2202800"/>
+                  <a:pt x="3807019" y="2201781"/>
+                  <a:pt x="3881317" y="2206491"/>
+                </a:cubicBezTo>
+                <a:cubicBezTo>
+                  <a:pt x="3970222" y="2212094"/>
+                  <a:pt x="4059124" y="2223552"/>
+                  <a:pt x="4148916" y="2225081"/>
+                </a:cubicBezTo>
+                <a:cubicBezTo>
+                  <a:pt x="4255600" y="2226736"/>
+                  <a:pt x="4361779" y="2236539"/>
+                  <a:pt x="4468337" y="2237813"/>
+                </a:cubicBezTo>
+                <a:cubicBezTo>
+                  <a:pt x="4511390" y="2238577"/>
+                  <a:pt x="4554190" y="2246852"/>
+                  <a:pt x="4605375" y="2240232"/>
+                </a:cubicBezTo>
+                <a:cubicBezTo>
+                  <a:pt x="4574131" y="2238704"/>
+                  <a:pt x="4550762" y="2237940"/>
+                  <a:pt x="4527647" y="2236412"/>
+                </a:cubicBezTo>
+                <a:cubicBezTo>
+                  <a:pt x="4410293" y="2228773"/>
+                  <a:pt x="4292942" y="2220751"/>
+                  <a:pt x="4175589" y="2212985"/>
+                </a:cubicBezTo>
+                <a:cubicBezTo>
+                  <a:pt x="4113101" y="2208783"/>
+                  <a:pt x="4050615" y="2205219"/>
+                  <a:pt x="3988255" y="2200253"/>
+                </a:cubicBezTo>
+                <a:cubicBezTo>
+                  <a:pt x="3887668" y="2192487"/>
+                  <a:pt x="3787079" y="2184082"/>
+                  <a:pt x="3686492" y="2176062"/>
+                </a:cubicBezTo>
+                <a:cubicBezTo>
+                  <a:pt x="3630102" y="2171605"/>
+                  <a:pt x="3573711" y="2168040"/>
+                  <a:pt x="3517320" y="2163330"/>
+                </a:cubicBezTo>
+                <a:cubicBezTo>
+                  <a:pt x="3430958" y="2155689"/>
+                  <a:pt x="3344721" y="2147159"/>
+                  <a:pt x="3258357" y="2139519"/>
+                </a:cubicBezTo>
+                <a:cubicBezTo>
+                  <a:pt x="3206031" y="2134809"/>
+                  <a:pt x="3153705" y="2131371"/>
+                  <a:pt x="3101506" y="2126787"/>
+                </a:cubicBezTo>
+                <a:cubicBezTo>
+                  <a:pt x="3004220" y="2117365"/>
+                  <a:pt x="2907061" y="2106798"/>
+                  <a:pt x="2809395" y="2097502"/>
+                </a:cubicBezTo>
+                <a:cubicBezTo>
+                  <a:pt x="2739161" y="2090628"/>
+                  <a:pt x="2668673" y="2085916"/>
+                  <a:pt x="2598566" y="2078532"/>
+                </a:cubicBezTo>
+                <a:cubicBezTo>
+                  <a:pt x="2511441" y="2069365"/>
+                  <a:pt x="2424569" y="2058160"/>
+                  <a:pt x="2337444" y="2048611"/>
+                </a:cubicBezTo>
+                <a:cubicBezTo>
+                  <a:pt x="2255399" y="2039699"/>
+                  <a:pt x="2173099" y="2032950"/>
+                  <a:pt x="2091054" y="2023146"/>
+                </a:cubicBezTo>
+                <a:cubicBezTo>
+                  <a:pt x="1979162" y="2010414"/>
+                  <a:pt x="1867524" y="1995008"/>
+                  <a:pt x="1755761" y="1981384"/>
+                </a:cubicBezTo>
+                <a:cubicBezTo>
+                  <a:pt x="1650982" y="1968652"/>
+                  <a:pt x="1545821" y="1957830"/>
+                  <a:pt x="1441169" y="1943824"/>
+                </a:cubicBezTo>
+                <a:cubicBezTo>
+                  <a:pt x="1299813" y="1924980"/>
+                  <a:pt x="1158837" y="1903718"/>
+                  <a:pt x="1017607" y="1883345"/>
+                </a:cubicBezTo>
+                <a:cubicBezTo>
+                  <a:pt x="876378" y="1862974"/>
+                  <a:pt x="735402" y="1844003"/>
+                  <a:pt x="594427" y="1821849"/>
+                </a:cubicBezTo>
+                <a:cubicBezTo>
+                  <a:pt x="462850" y="1801222"/>
+                  <a:pt x="331526" y="1778304"/>
+                  <a:pt x="200711" y="1755132"/>
+                </a:cubicBezTo>
+                <a:lnTo>
+                  <a:pt x="0" y="1718743"/>
+                </a:lnTo>
+                <a:close/>
+              </a:path>
+            </a:pathLst>
+          </a:custGeom>
+          <a:solidFill>
+            <a:schemeClr val="accent2"/>
+          </a:solidFill>
+          <a:ln w="8199" cap="flat">
+            <a:noFill/>
+            <a:prstDash val="solid"/>
+            <a:miter/>
+          </a:ln>
+        </p:spPr>
+        <p:txBody>
+          <a:bodyPr rtlCol="0" anchor="ctr"/>
+          <a:lstStyle/>
+          <a:p>
+            <a:endParaRPr lang="en-US"/>
+          </a:p>
+        </p:txBody>
+      </p:sp>
+      <p:sp>
+        <p:nvSpPr>
+          <p:cNvPr id="2" name="Title 1">
+            <a:extLst>
+              <a:ext uri="{FF2B5EF4-FFF2-40B4-BE49-F238E27FC236}">
+                <a16:creationId xmlns:a16="http://schemas.microsoft.com/office/drawing/2014/main" id="{16AAA9A8-0F0E-D8E9-E3A4-B11F70048C9C}"/>
+              </a:ext>
+            </a:extLst>
+          </p:cNvPr>
+          <p:cNvSpPr>
+            <a:spLocks noGrp="1"/>
+          </p:cNvSpPr>
+          <p:nvPr>
+            <p:ph type="title"/>
+          </p:nvPr>
+        </p:nvSpPr>
+        <p:spPr>
+          <a:xfrm>
+            <a:off x="838200" y="401221"/>
+            <a:ext cx="10515600" cy="1348065"/>
+          </a:xfrm>
+        </p:spPr>
+        <p:txBody>
+          <a:bodyPr>
+            <a:normAutofit/>
+          </a:bodyPr>
+          <a:lstStyle/>
+          <a:p>
+            <a:r>
+              <a:rPr lang="en-US" sz="5400" dirty="0">
+                <a:solidFill>
+                  <a:srgbClr val="FFFFFF"/>
+                </a:solidFill>
+              </a:rPr>
+              <a:t>Intro</a:t>
+            </a:r>
+          </a:p>
+        </p:txBody>
+      </p:sp>
+      <p:sp>
+        <p:nvSpPr>
+          <p:cNvPr id="3" name="Content Placeholder 2">
+            <a:extLst>
+              <a:ext uri="{FF2B5EF4-FFF2-40B4-BE49-F238E27FC236}">
+                <a16:creationId xmlns:a16="http://schemas.microsoft.com/office/drawing/2014/main" id="{5AA0300F-26AC-12A9-C7D0-B1663DC7AF4F}"/>
+              </a:ext>
+            </a:extLst>
+          </p:cNvPr>
+          <p:cNvSpPr>
+            <a:spLocks noGrp="1"/>
+          </p:cNvSpPr>
+          <p:nvPr>
+            <p:ph idx="1"/>
+          </p:nvPr>
+        </p:nvSpPr>
+        <p:spPr>
+          <a:xfrm>
+            <a:off x="838200" y="2586789"/>
+            <a:ext cx="10515600" cy="3590174"/>
+          </a:xfrm>
+        </p:spPr>
+        <p:txBody>
+          <a:bodyPr>
+            <a:normAutofit/>
+          </a:bodyPr>
+          <a:lstStyle/>
+          <a:p>
+            <a:pPr marL="0" indent="0">
+              <a:buNone/>
+            </a:pPr>
+            <a:r>
+              <a:rPr lang="en-US" dirty="0"/>
+              <a:t>This project is student project where our goal is to create an unreal simulation of a drone controlled through a python script in an unreal simulation.</a:t>
+            </a:r>
+          </a:p>
+          <a:p>
+            <a:pPr marL="0" indent="0">
+              <a:buNone/>
+            </a:pPr>
+            <a:r>
+              <a:rPr lang="en-US" dirty="0"/>
+              <a:t> - Education </a:t>
+            </a:r>
+          </a:p>
+          <a:p>
+            <a:pPr>
+              <a:buFontTx/>
+              <a:buChar char="-"/>
+            </a:pPr>
+            <a:r>
+              <a:rPr lang="en-US" dirty="0"/>
+              <a:t>Recreation </a:t>
+            </a:r>
+          </a:p>
+          <a:p>
+            <a:pPr>
+              <a:buFontTx/>
+              <a:buChar char="-"/>
+            </a:pPr>
+            <a:r>
+              <a:rPr lang="en-US" dirty="0"/>
+              <a:t>Test run of a product </a:t>
+            </a:r>
+          </a:p>
+          <a:p>
+            <a:pPr marL="0" indent="0">
+              <a:buNone/>
+            </a:pPr>
+            <a:endParaRPr lang="en-US" sz="2200" dirty="0"/>
+          </a:p>
+        </p:txBody>
+      </p:sp>
+    </p:spTree>
+    <p:extLst>
+      <p:ext uri="{BB962C8B-B14F-4D97-AF65-F5344CB8AC3E}">
+        <p14:creationId xmlns:p14="http://schemas.microsoft.com/office/powerpoint/2010/main" val="503420787"/>
+      </p:ext>
+    </p:extLst>
+  </p:cSld>
+  <p:clrMapOvr>
+    <a:masterClrMapping/>
+  </p:clrMapOvr>
+</p:sld>
+</file>
+
+<file path=ppt/slides/slide3.xml><?xml version="1.0" encoding="utf-8"?>
 <p:sld xmlns:a="http://schemas.openxmlformats.org/drawingml/2006/main" xmlns:r="http://schemas.openxmlformats.org/officeDocument/2006/relationships" xmlns:p="http://schemas.openxmlformats.org/presentationml/2006/main">
   <p:cSld>
     <p:bg>
@@ -7444,7 +10180,7 @@
             </a:pPr>
             <a:r>
               <a:rPr lang="en-US" dirty="0"/>
-              <a:t>	- Sprint planning with Stories</a:t>
+              <a:t>	Sprint planning with Stories</a:t>
             </a:r>
           </a:p>
           <a:p>
@@ -7452,12 +10188,8 @@
               <a:buNone/>
             </a:pPr>
             <a:r>
-              <a:rPr lang="en-US"/>
-              <a:t>	- </a:t>
-            </a:r>
-            <a:r>
               <a:rPr lang="en-US" dirty="0"/>
-              <a:t>Sprint Retrospective and Review</a:t>
+              <a:t>	Sprint Retrospective and Review</a:t>
             </a:r>
           </a:p>
         </p:txBody>
@@ -7527,7 +10259,7 @@
 </p:sld>
 </file>
 
-<file path=ppt/slides/slide3.xml><?xml version="1.0" encoding="utf-8"?>
+<file path=ppt/slides/slide4.xml><?xml version="1.0" encoding="utf-8"?>
 <p:sld xmlns:a="http://schemas.openxmlformats.org/drawingml/2006/main" xmlns:r="http://schemas.openxmlformats.org/officeDocument/2006/relationships" xmlns:p="http://schemas.openxmlformats.org/presentationml/2006/main">
   <p:cSld>
     <p:bg>
@@ -7930,8 +10662,9 @@
           <a:p>
             <a:r>
               <a:rPr lang="en-US" sz="4800" dirty="0"/>
-              <a:t>R2 Build - Ali</a:t>
-            </a:r>
+              <a:t>Build - Ali</a:t>
+            </a:r>
+            <a:endParaRPr lang="en-US"/>
           </a:p>
         </p:txBody>
       </p:sp>
@@ -7953,42 +10686,185 @@
         </p:nvSpPr>
         <p:spPr>
           <a:xfrm>
-            <a:off x="1045028" y="3017522"/>
-            <a:ext cx="9941319" cy="3124658"/>
+            <a:off x="369293" y="2356163"/>
+            <a:ext cx="10617054" cy="4504884"/>
           </a:xfrm>
         </p:spPr>
         <p:txBody>
-          <a:bodyPr anchor="ctr">
-            <a:normAutofit/>
+          <a:bodyPr vert="horz" lIns="91440" tIns="45720" rIns="91440" bIns="45720" rtlCol="0" anchor="ctr">
+            <a:normAutofit fontScale="70000" lnSpcReduction="20000"/>
           </a:bodyPr>
           <a:lstStyle/>
-          <a:p>
-            <a:r>
-              <a:rPr lang="en-US" dirty="0"/>
-              <a:t>Task: </a:t>
-            </a:r>
-          </a:p>
           <a:p>
             <a:pPr marL="0" indent="0">
               <a:buNone/>
             </a:pPr>
-            <a:r>
-              <a:rPr lang="en-US" dirty="0"/>
-              <a:t>	- Verify that our project works on a fresh install</a:t>
-            </a:r>
+            <a:endParaRPr lang="en-US" b="1" dirty="0"/>
           </a:p>
           <a:p>
             <a:pPr marL="0" indent="0">
               <a:buNone/>
             </a:pPr>
             <a:r>
-              <a:rPr lang="en-US" dirty="0"/>
-              <a:t>	- Validate on a second machine</a:t>
-            </a:r>
-          </a:p>
-          <a:p>
-            <a:pPr lvl="2"/>
-            <a:endParaRPr lang="en-US" sz="1600" dirty="0"/>
+              <a:rPr lang="en-US" b="1">
+                <a:ea typeface="+mn-lt"/>
+                <a:cs typeface="+mn-lt"/>
+              </a:rPr>
+              <a:t>Role Responsibilities</a:t>
+            </a:r>
+            <a:endParaRPr lang="en-US"/>
+          </a:p>
+          <a:p>
+            <a:pPr marL="0" indent="0">
+              <a:buNone/>
+            </a:pPr>
+            <a:r>
+              <a:rPr lang="en-US">
+                <a:ea typeface="+mn-lt"/>
+                <a:cs typeface="+mn-lt"/>
+              </a:rPr>
+              <a:t>• Ensure the project can run on another machine</a:t>
+            </a:r>
+            <a:endParaRPr lang="en-US"/>
+          </a:p>
+          <a:p>
+            <a:pPr marL="0" indent="0">
+              <a:buNone/>
+            </a:pPr>
+            <a:r>
+              <a:rPr lang="en-US" dirty="0">
+                <a:ea typeface="+mn-lt"/>
+                <a:cs typeface="+mn-lt"/>
+              </a:rPr>
+              <a:t>• Maintain the build status documentation</a:t>
+            </a:r>
+            <a:endParaRPr lang="en-US"/>
+          </a:p>
+          <a:p>
+            <a:pPr marL="0" indent="0">
+              <a:buNone/>
+            </a:pPr>
+            <a:r>
+              <a:rPr lang="en-US" b="1">
+                <a:ea typeface="+mn-lt"/>
+                <a:cs typeface="+mn-lt"/>
+              </a:rPr>
+              <a:t>Work Completed This Week</a:t>
+            </a:r>
+            <a:endParaRPr lang="en-US"/>
+          </a:p>
+          <a:p>
+            <a:pPr marL="0" indent="0">
+              <a:buNone/>
+            </a:pPr>
+            <a:r>
+              <a:rPr lang="en-US">
+                <a:ea typeface="+mn-lt"/>
+                <a:cs typeface="+mn-lt"/>
+              </a:rPr>
+              <a:t>• Packaged the Unreal Engine project into a Windows development build</a:t>
+            </a:r>
+            <a:endParaRPr lang="en-US"/>
+          </a:p>
+          <a:p>
+            <a:pPr marL="0" indent="0">
+              <a:buNone/>
+            </a:pPr>
+            <a:r>
+              <a:rPr lang="en-US">
+                <a:ea typeface="+mn-lt"/>
+                <a:cs typeface="+mn-lt"/>
+              </a:rPr>
+              <a:t>• Verified the packaged build runs successfully on the Golden Machine</a:t>
+            </a:r>
+            <a:endParaRPr lang="en-US" dirty="0"/>
+          </a:p>
+          <a:p>
+            <a:pPr marL="0" indent="0">
+              <a:buNone/>
+            </a:pPr>
+            <a:r>
+              <a:rPr lang="en-US">
+                <a:ea typeface="+mn-lt"/>
+                <a:cs typeface="+mn-lt"/>
+              </a:rPr>
+              <a:t>• Verified the build runs on a secondary machine</a:t>
+            </a:r>
+            <a:endParaRPr lang="en-US"/>
+          </a:p>
+          <a:p>
+            <a:pPr marL="0" indent="0">
+              <a:buNone/>
+            </a:pPr>
+            <a:r>
+              <a:rPr lang="en-US">
+                <a:ea typeface="+mn-lt"/>
+                <a:cs typeface="+mn-lt"/>
+              </a:rPr>
+              <a:t>• Created a downloadable build artifact (GitHub Release)</a:t>
+            </a:r>
+            <a:endParaRPr lang="en-US"/>
+          </a:p>
+          <a:p>
+            <a:pPr marL="0" indent="0">
+              <a:buNone/>
+            </a:pPr>
+            <a:r>
+              <a:rPr lang="en-US" b="1">
+                <a:ea typeface="+mn-lt"/>
+                <a:cs typeface="+mn-lt"/>
+              </a:rPr>
+              <a:t>Build Artifact</a:t>
+            </a:r>
+            <a:endParaRPr lang="en-US"/>
+          </a:p>
+          <a:p>
+            <a:pPr marL="0" indent="0">
+              <a:buNone/>
+            </a:pPr>
+            <a:r>
+              <a:rPr lang="en-US">
+                <a:ea typeface="+mn-lt"/>
+                <a:cs typeface="+mn-lt"/>
+              </a:rPr>
+              <a:t>• Windows packaged build available via GitHub Release</a:t>
+            </a:r>
+            <a:endParaRPr lang="en-US"/>
+          </a:p>
+          <a:p>
+            <a:pPr marL="0" indent="0">
+              <a:buNone/>
+            </a:pPr>
+            <a:r>
+              <a:rPr lang="en-US" b="1">
+                <a:ea typeface="+mn-lt"/>
+                <a:cs typeface="+mn-lt"/>
+              </a:rPr>
+              <a:t>Result</a:t>
+            </a:r>
+            <a:endParaRPr lang="en-US"/>
+          </a:p>
+          <a:p>
+            <a:pPr marL="0" indent="0">
+              <a:buNone/>
+            </a:pPr>
+            <a:r>
+              <a:rPr lang="en-US">
+                <a:ea typeface="+mn-lt"/>
+                <a:cs typeface="+mn-lt"/>
+              </a:rPr>
+              <a:t>✔ Reproducible build workflow established</a:t>
+            </a:r>
+            <a:endParaRPr lang="en-US"/>
+          </a:p>
+          <a:p>
+            <a:pPr marL="0" indent="0">
+              <a:buNone/>
+            </a:pPr>
+            <a:endParaRPr lang="en-US" dirty="0"/>
+          </a:p>
+          <a:p>
+            <a:endParaRPr lang="en-US" dirty="0"/>
           </a:p>
         </p:txBody>
       </p:sp>
@@ -8057,7 +10933,7 @@
 </p:sld>
 </file>
 
-<file path=ppt/slides/slide4.xml><?xml version="1.0" encoding="utf-8"?>
+<file path=ppt/slides/slide5.xml><?xml version="1.0" encoding="utf-8"?>
 <p:sld xmlns:a="http://schemas.openxmlformats.org/drawingml/2006/main" xmlns:r="http://schemas.openxmlformats.org/officeDocument/2006/relationships" xmlns:p="http://schemas.openxmlformats.org/presentationml/2006/main">
   <p:cSld>
     <p:bg>
@@ -8090,10 +10966,10 @@
       </p:grpSpPr>
       <p:sp useBgFill="1">
         <p:nvSpPr>
-          <p:cNvPr id="55" name="Rectangle 54">
+          <p:cNvPr id="61" name="Rectangle 60">
             <a:extLst>
               <a:ext uri="{FF2B5EF4-FFF2-40B4-BE49-F238E27FC236}">
-                <a16:creationId xmlns:a16="http://schemas.microsoft.com/office/drawing/2014/main" id="{0E91F5CA-B392-444C-88E3-BF5BAAEBDEB0}"/>
+                <a16:creationId xmlns:a16="http://schemas.microsoft.com/office/drawing/2014/main" id="{F13C74B1-5B17-4795-BED0-7140497B445A}"/>
               </a:ext>
               <a:ext uri="{C183D7F6-B498-43B3-948B-1728B52AA6E4}">
                 <adec:decorative xmlns:adec="http://schemas.microsoft.com/office/drawing/2017/decorative" val="1"/>
@@ -8114,92 +10990,11 @@
         <p:spPr>
           <a:xfrm>
             <a:off x="0" y="0"/>
-            <a:ext cx="12192000" cy="6858000"/>
+            <a:ext cx="12188952" cy="6858000"/>
           </a:xfrm>
           <a:prstGeom prst="rect">
             <a:avLst/>
           </a:prstGeom>
-          <a:ln w="12700" cap="flat" cmpd="sng" algn="ctr">
-            <a:noFill/>
-            <a:prstDash val="solid"/>
-            <a:miter lim="800000"/>
-          </a:ln>
-          <a:effectLst/>
-          <a:extLst>
-            <a:ext uri="{91240B29-F687-4F45-9708-019B960494DF}">
-              <a14:hiddenLine xmlns:a14="http://schemas.microsoft.com/office/drawing/2010/main" w="12700" cap="flat" cmpd="sng" algn="ctr">
-                <a:solidFill>
-                  <a:schemeClr val="accent1">
-                    <a:shade val="50000"/>
-                  </a:schemeClr>
-                </a:solidFill>
-                <a:prstDash val="solid"/>
-                <a:miter lim="800000"/>
-              </a14:hiddenLine>
-            </a:ext>
-          </a:extLst>
-        </p:spPr>
-        <p:style>
-          <a:lnRef idx="2">
-            <a:schemeClr val="accent1">
-              <a:shade val="50000"/>
-            </a:schemeClr>
-          </a:lnRef>
-          <a:fillRef idx="1">
-            <a:schemeClr val="accent1"/>
-          </a:fillRef>
-          <a:effectRef idx="0">
-            <a:schemeClr val="accent1"/>
-          </a:effectRef>
-          <a:fontRef idx="minor">
-            <a:schemeClr val="lt1"/>
-          </a:fontRef>
-        </p:style>
-        <p:txBody>
-          <a:bodyPr rtlCol="0" anchor="ctr"/>
-          <a:lstStyle/>
-          <a:p>
-            <a:pPr algn="ctr"/>
-            <a:endParaRPr lang="en-US"/>
-          </a:p>
-        </p:txBody>
-      </p:sp>
-      <p:sp>
-        <p:nvSpPr>
-          <p:cNvPr id="56" name="Rectangle 55">
-            <a:extLst>
-              <a:ext uri="{FF2B5EF4-FFF2-40B4-BE49-F238E27FC236}">
-                <a16:creationId xmlns:a16="http://schemas.microsoft.com/office/drawing/2014/main" id="{0459807F-B6FA-44D3-9A53-C55B6B56884A}"/>
-              </a:ext>
-              <a:ext uri="{C183D7F6-B498-43B3-948B-1728B52AA6E4}">
-                <adec:decorative xmlns:adec="http://schemas.microsoft.com/office/drawing/2017/decorative" val="1"/>
-              </a:ext>
-            </a:extLst>
-          </p:cNvPr>
-          <p:cNvSpPr>
-            <a:spLocks noGrp="1" noRot="1" noChangeAspect="1" noMove="1" noResize="1" noEditPoints="1" noAdjustHandles="1" noChangeArrowheads="1" noChangeShapeType="1" noTextEdit="1"/>
-          </p:cNvSpPr>
-          <p:nvPr>
-            <p:extLst>
-              <p:ext uri="{386F3935-93C4-4BCD-93E2-E3B085C9AB24}">
-                <p16:designElem xmlns:p16="http://schemas.microsoft.com/office/powerpoint/2015/main" val="1"/>
-              </p:ext>
-            </p:extLst>
-          </p:nvPr>
-        </p:nvSpPr>
-        <p:spPr>
-          <a:xfrm>
-            <a:off x="0" y="4080681"/>
-            <a:ext cx="12192000" cy="2777318"/>
-          </a:xfrm>
-          <a:prstGeom prst="rect">
-            <a:avLst/>
-          </a:prstGeom>
-          <a:solidFill>
-            <a:srgbClr val="82766A">
-              <a:alpha val="15000"/>
-            </a:srgbClr>
-          </a:solidFill>
           <a:ln>
             <a:noFill/>
           </a:ln>
@@ -8247,8 +11042,8 @@
         </p:nvSpPr>
         <p:spPr>
           <a:xfrm>
-            <a:off x="1255060" y="5279511"/>
-            <a:ext cx="9681882" cy="739880"/>
+            <a:off x="640080" y="325369"/>
+            <a:ext cx="4368602" cy="1956841"/>
           </a:xfrm>
         </p:spPr>
         <p:txBody>
@@ -8257,18 +11052,293 @@
           </a:bodyPr>
           <a:lstStyle/>
           <a:p>
+            <a:r>
+              <a:rPr lang="en-US" sz="5400"/>
+              <a:t>R3 World - Success</a:t>
+            </a:r>
+          </a:p>
+        </p:txBody>
+      </p:sp>
+      <p:sp>
+        <p:nvSpPr>
+          <p:cNvPr id="63" name="sketchy line">
+            <a:extLst>
+              <a:ext uri="{FF2B5EF4-FFF2-40B4-BE49-F238E27FC236}">
+                <a16:creationId xmlns:a16="http://schemas.microsoft.com/office/drawing/2014/main" id="{D4974D33-8DC5-464E-8C6D-BE58F0669C17}"/>
+              </a:ext>
+              <a:ext uri="{C183D7F6-B498-43B3-948B-1728B52AA6E4}">
+                <adec:decorative xmlns:adec="http://schemas.microsoft.com/office/drawing/2017/decorative" val="1"/>
+              </a:ext>
+            </a:extLst>
+          </p:cNvPr>
+          <p:cNvSpPr>
+            <a:spLocks noGrp="1" noRot="1" noChangeAspect="1" noMove="1" noResize="1" noEditPoints="1" noAdjustHandles="1" noChangeArrowheads="1" noChangeShapeType="1" noTextEdit="1"/>
+          </p:cNvSpPr>
+          <p:nvPr>
+            <p:extLst>
+              <p:ext uri="{386F3935-93C4-4BCD-93E2-E3B085C9AB24}">
+                <p16:designElem xmlns:p16="http://schemas.microsoft.com/office/powerpoint/2015/main" val="1"/>
+              </p:ext>
+            </p:extLst>
+          </p:nvPr>
+        </p:nvSpPr>
+        <p:spPr>
+          <a:xfrm>
+            <a:off x="640080" y="2586994"/>
+            <a:ext cx="3474720" cy="18288"/>
+          </a:xfrm>
+          <a:custGeom>
+            <a:avLst/>
+            <a:gdLst>
+              <a:gd name="csX0" fmla="*/ 0 w 3474720"/>
+              <a:gd name="csY0" fmla="*/ 0 h 18288"/>
+              <a:gd name="csX1" fmla="*/ 694944 w 3474720"/>
+              <a:gd name="csY1" fmla="*/ 0 h 18288"/>
+              <a:gd name="csX2" fmla="*/ 1355141 w 3474720"/>
+              <a:gd name="csY2" fmla="*/ 0 h 18288"/>
+              <a:gd name="csX3" fmla="*/ 2015338 w 3474720"/>
+              <a:gd name="csY3" fmla="*/ 0 h 18288"/>
+              <a:gd name="csX4" fmla="*/ 2779776 w 3474720"/>
+              <a:gd name="csY4" fmla="*/ 0 h 18288"/>
+              <a:gd name="csX5" fmla="*/ 3474720 w 3474720"/>
+              <a:gd name="csY5" fmla="*/ 0 h 18288"/>
+              <a:gd name="csX6" fmla="*/ 3474720 w 3474720"/>
+              <a:gd name="csY6" fmla="*/ 18288 h 18288"/>
+              <a:gd name="csX7" fmla="*/ 2779776 w 3474720"/>
+              <a:gd name="csY7" fmla="*/ 18288 h 18288"/>
+              <a:gd name="csX8" fmla="*/ 2189074 w 3474720"/>
+              <a:gd name="csY8" fmla="*/ 18288 h 18288"/>
+              <a:gd name="csX9" fmla="*/ 1528877 w 3474720"/>
+              <a:gd name="csY9" fmla="*/ 18288 h 18288"/>
+              <a:gd name="csX10" fmla="*/ 868680 w 3474720"/>
+              <a:gd name="csY10" fmla="*/ 18288 h 18288"/>
+              <a:gd name="csX11" fmla="*/ 0 w 3474720"/>
+              <a:gd name="csY11" fmla="*/ 18288 h 18288"/>
+              <a:gd name="csX12" fmla="*/ 0 w 3474720"/>
+              <a:gd name="csY12" fmla="*/ 0 h 18288"/>
+            </a:gdLst>
+            <a:ahLst/>
+            <a:cxnLst>
+              <a:cxn ang="0">
+                <a:pos x="csX0" y="csY0"/>
+              </a:cxn>
+              <a:cxn ang="0">
+                <a:pos x="csX1" y="csY1"/>
+              </a:cxn>
+              <a:cxn ang="0">
+                <a:pos x="csX2" y="csY2"/>
+              </a:cxn>
+              <a:cxn ang="0">
+                <a:pos x="csX3" y="csY3"/>
+              </a:cxn>
+              <a:cxn ang="0">
+                <a:pos x="csX4" y="csY4"/>
+              </a:cxn>
+              <a:cxn ang="0">
+                <a:pos x="csX5" y="csY5"/>
+              </a:cxn>
+              <a:cxn ang="0">
+                <a:pos x="csX6" y="csY6"/>
+              </a:cxn>
+              <a:cxn ang="0">
+                <a:pos x="csX7" y="csY7"/>
+              </a:cxn>
+              <a:cxn ang="0">
+                <a:pos x="csX8" y="csY8"/>
+              </a:cxn>
+              <a:cxn ang="0">
+                <a:pos x="csX9" y="csY9"/>
+              </a:cxn>
+              <a:cxn ang="0">
+                <a:pos x="csX10" y="csY10"/>
+              </a:cxn>
+              <a:cxn ang="0">
+                <a:pos x="csX11" y="csY11"/>
+              </a:cxn>
+              <a:cxn ang="0">
+                <a:pos x="csX12" y="csY12"/>
+              </a:cxn>
+            </a:cxnLst>
+            <a:rect l="l" t="t" r="r" b="b"/>
+            <a:pathLst>
+              <a:path w="3474720" h="18288" fill="none" extrusionOk="0">
+                <a:moveTo>
+                  <a:pt x="0" y="0"/>
+                </a:moveTo>
+                <a:cubicBezTo>
+                  <a:pt x="224454" y="-14544"/>
+                  <a:pt x="495407" y="26540"/>
+                  <a:pt x="694944" y="0"/>
+                </a:cubicBezTo>
+                <a:cubicBezTo>
+                  <a:pt x="894481" y="-26540"/>
+                  <a:pt x="1130063" y="24713"/>
+                  <a:pt x="1355141" y="0"/>
+                </a:cubicBezTo>
+                <a:cubicBezTo>
+                  <a:pt x="1580219" y="-24713"/>
+                  <a:pt x="1820099" y="26695"/>
+                  <a:pt x="2015338" y="0"/>
+                </a:cubicBezTo>
+                <a:cubicBezTo>
+                  <a:pt x="2210577" y="-26695"/>
+                  <a:pt x="2402045" y="165"/>
+                  <a:pt x="2779776" y="0"/>
+                </a:cubicBezTo>
+                <a:cubicBezTo>
+                  <a:pt x="3157507" y="-165"/>
+                  <a:pt x="3286859" y="-15571"/>
+                  <a:pt x="3474720" y="0"/>
+                </a:cubicBezTo>
+                <a:cubicBezTo>
+                  <a:pt x="3474286" y="7551"/>
+                  <a:pt x="3474253" y="9822"/>
+                  <a:pt x="3474720" y="18288"/>
+                </a:cubicBezTo>
+                <a:cubicBezTo>
+                  <a:pt x="3233904" y="29845"/>
+                  <a:pt x="2945134" y="-5256"/>
+                  <a:pt x="2779776" y="18288"/>
+                </a:cubicBezTo>
+                <a:cubicBezTo>
+                  <a:pt x="2614418" y="41832"/>
+                  <a:pt x="2339768" y="22709"/>
+                  <a:pt x="2189074" y="18288"/>
+                </a:cubicBezTo>
+                <a:cubicBezTo>
+                  <a:pt x="2038380" y="13867"/>
+                  <a:pt x="1817434" y="-4947"/>
+                  <a:pt x="1528877" y="18288"/>
+                </a:cubicBezTo>
+                <a:cubicBezTo>
+                  <a:pt x="1240320" y="41523"/>
+                  <a:pt x="1042447" y="37198"/>
+                  <a:pt x="868680" y="18288"/>
+                </a:cubicBezTo>
+                <a:cubicBezTo>
+                  <a:pt x="694913" y="-622"/>
+                  <a:pt x="233232" y="44909"/>
+                  <a:pt x="0" y="18288"/>
+                </a:cubicBezTo>
+                <a:cubicBezTo>
+                  <a:pt x="60" y="11696"/>
+                  <a:pt x="66" y="3758"/>
+                  <a:pt x="0" y="0"/>
+                </a:cubicBezTo>
+                <a:close/>
+              </a:path>
+              <a:path w="3474720" h="18288" stroke="0" extrusionOk="0">
+                <a:moveTo>
+                  <a:pt x="0" y="0"/>
+                </a:moveTo>
+                <a:cubicBezTo>
+                  <a:pt x="202328" y="-14716"/>
+                  <a:pt x="332722" y="-11499"/>
+                  <a:pt x="625450" y="0"/>
+                </a:cubicBezTo>
+                <a:cubicBezTo>
+                  <a:pt x="918178" y="11499"/>
+                  <a:pt x="1096688" y="5123"/>
+                  <a:pt x="1389888" y="0"/>
+                </a:cubicBezTo>
+                <a:cubicBezTo>
+                  <a:pt x="1683088" y="-5123"/>
+                  <a:pt x="1835981" y="-14038"/>
+                  <a:pt x="1980590" y="0"/>
+                </a:cubicBezTo>
+                <a:cubicBezTo>
+                  <a:pt x="2125199" y="14038"/>
+                  <a:pt x="2396099" y="-7203"/>
+                  <a:pt x="2571293" y="0"/>
+                </a:cubicBezTo>
+                <a:cubicBezTo>
+                  <a:pt x="2746487" y="7203"/>
+                  <a:pt x="3041609" y="-12036"/>
+                  <a:pt x="3474720" y="0"/>
+                </a:cubicBezTo>
+                <a:cubicBezTo>
+                  <a:pt x="3474638" y="4406"/>
+                  <a:pt x="3474631" y="9982"/>
+                  <a:pt x="3474720" y="18288"/>
+                </a:cubicBezTo>
+                <a:cubicBezTo>
+                  <a:pt x="3324873" y="21876"/>
+                  <a:pt x="3136771" y="12587"/>
+                  <a:pt x="2814523" y="18288"/>
+                </a:cubicBezTo>
+                <a:cubicBezTo>
+                  <a:pt x="2492275" y="23989"/>
+                  <a:pt x="2294402" y="47111"/>
+                  <a:pt x="2154326" y="18288"/>
+                </a:cubicBezTo>
+                <a:cubicBezTo>
+                  <a:pt x="2014250" y="-10535"/>
+                  <a:pt x="1820317" y="33903"/>
+                  <a:pt x="1494130" y="18288"/>
+                </a:cubicBezTo>
+                <a:cubicBezTo>
+                  <a:pt x="1167943" y="2673"/>
+                  <a:pt x="948432" y="14868"/>
+                  <a:pt x="729691" y="18288"/>
+                </a:cubicBezTo>
+                <a:cubicBezTo>
+                  <a:pt x="510950" y="21708"/>
+                  <a:pt x="264032" y="24354"/>
+                  <a:pt x="0" y="18288"/>
+                </a:cubicBezTo>
+                <a:cubicBezTo>
+                  <a:pt x="189" y="14288"/>
+                  <a:pt x="-703" y="3747"/>
+                  <a:pt x="0" y="0"/>
+                </a:cubicBezTo>
+                <a:close/>
+              </a:path>
+            </a:pathLst>
+          </a:custGeom>
+          <a:solidFill>
+            <a:schemeClr val="accent2"/>
+          </a:solidFill>
+          <a:ln w="44450" cap="rnd">
+            <a:solidFill>
+              <a:schemeClr val="accent2"/>
+            </a:solidFill>
+            <a:round/>
+            <a:extLst>
+              <a:ext uri="{C807C97D-BFC1-408E-A445-0C87EB9F89A2}">
+                <ask:lineSketchStyleProps xmlns:ask="http://schemas.microsoft.com/office/drawing/2018/sketchyshapes" sd="2863741219">
+                  <a:prstGeom prst="rect">
+                    <a:avLst/>
+                  </a:prstGeom>
+                  <ask:type>
+                    <ask:lineSketchFreehand/>
+                  </ask:type>
+                </ask:lineSketchStyleProps>
+              </a:ext>
+            </a:extLst>
+          </a:ln>
+        </p:spPr>
+        <p:style>
+          <a:lnRef idx="2">
+            <a:schemeClr val="accent1">
+              <a:shade val="50000"/>
+            </a:schemeClr>
+          </a:lnRef>
+          <a:fillRef idx="1">
+            <a:schemeClr val="accent1"/>
+          </a:fillRef>
+          <a:effectRef idx="0">
+            <a:schemeClr val="accent1"/>
+          </a:effectRef>
+          <a:fontRef idx="minor">
+            <a:schemeClr val="lt1"/>
+          </a:fontRef>
+        </p:style>
+        <p:txBody>
+          <a:bodyPr rtlCol="0" anchor="ctr"/>
+          <a:lstStyle/>
+          <a:p>
             <a:pPr algn="ctr"/>
-            <a:r>
-              <a:rPr lang="en-US" sz="3600" dirty="0">
-                <a:solidFill>
-                  <a:schemeClr val="tx1">
-                    <a:lumMod val="85000"/>
-                    <a:lumOff val="15000"/>
-                  </a:schemeClr>
-                </a:solidFill>
-              </a:rPr>
-              <a:t>R3 World - Success</a:t>
-            </a:r>
+            <a:endParaRPr lang="en-US"/>
           </a:p>
         </p:txBody>
       </p:sp>
@@ -8290,39 +11360,41 @@
         </p:nvSpPr>
         <p:spPr>
           <a:xfrm>
-            <a:off x="2426447" y="6019391"/>
-            <a:ext cx="7315199" cy="365125"/>
+            <a:off x="640080" y="2872899"/>
+            <a:ext cx="4243589" cy="3320668"/>
           </a:xfrm>
         </p:spPr>
         <p:txBody>
-          <a:bodyPr vert="horz" lIns="91440" tIns="45720" rIns="91440" bIns="45720" rtlCol="0" anchor="t">
+          <a:bodyPr vert="horz" lIns="91440" tIns="45720" rIns="91440" bIns="45720" rtlCol="0">
             <a:normAutofit/>
           </a:bodyPr>
           <a:lstStyle/>
           <a:p>
-            <a:pPr marL="0" indent="0" algn="ctr">
+            <a:r>
+              <a:rPr lang="en-US" sz="2200"/>
+              <a:t>Create/acquire a drone model and give it a spawn point</a:t>
+            </a:r>
+          </a:p>
+          <a:p>
+            <a:r>
+              <a:rPr lang="en-US" sz="2200"/>
+              <a:t>- Attaching a 3rd-person camera for the drone</a:t>
+            </a:r>
+          </a:p>
+          <a:p>
+            <a:pPr marL="0" indent="0">
               <a:buNone/>
             </a:pPr>
-            <a:r>
-              <a:rPr lang="en-US" sz="1600">
-                <a:solidFill>
-                  <a:schemeClr val="tx1">
-                    <a:lumMod val="85000"/>
-                    <a:lumOff val="15000"/>
-                  </a:schemeClr>
-                </a:solidFill>
-              </a:rPr>
-              <a:t>Created our 3d Drone environment in Unreal</a:t>
-            </a:r>
+            <a:endParaRPr lang="en-US" sz="2200"/>
           </a:p>
         </p:txBody>
       </p:sp>
       <p:pic>
         <p:nvPicPr>
-          <p:cNvPr id="4" name="Picture 3" descr="A screenshot of a computer&#10;&#10;AI-generated content may be incorrect.">
+          <p:cNvPr id="5" name="Picture 4" descr="A screenshot of a computer&#10;&#10;AI-generated content may be incorrect.">
             <a:extLst>
               <a:ext uri="{FF2B5EF4-FFF2-40B4-BE49-F238E27FC236}">
-                <a16:creationId xmlns:a16="http://schemas.microsoft.com/office/drawing/2014/main" id="{C3C694AD-8D7D-73B3-54E1-84AA2872D83F}"/>
+                <a16:creationId xmlns:a16="http://schemas.microsoft.com/office/drawing/2014/main" id="{26463279-6A66-216D-1669-F4E6230A6329}"/>
               </a:ext>
             </a:extLst>
           </p:cNvPr>
@@ -8333,15 +11405,15 @@
         </p:nvPicPr>
         <p:blipFill>
           <a:blip r:embed="rId2"/>
-          <a:srcRect t="11190" b="2975"/>
+          <a:srcRect l="26596" t="1923" r="25926" b="15379"/>
           <a:stretch>
             <a:fillRect/>
           </a:stretch>
         </p:blipFill>
         <p:spPr>
           <a:xfrm>
-            <a:off x="20" y="10"/>
-            <a:ext cx="12191979" cy="5886523"/>
+            <a:off x="4650222" y="10"/>
+            <a:ext cx="7510126" cy="6875556"/>
           </a:xfrm>
           <a:custGeom>
             <a:avLst/>
@@ -8350,829 +11422,110 @@
             <a:cxnLst/>
             <a:rect l="l" t="t" r="r" b="b"/>
             <a:pathLst>
-              <a:path w="12191999" h="5886533">
+              <a:path w="6878775" h="6858000">
                 <a:moveTo>
-                  <a:pt x="4721173" y="4907914"/>
+                  <a:pt x="1102973" y="0"/>
                 </a:moveTo>
                 <a:lnTo>
-                  <a:pt x="4722109" y="4908125"/>
+                  <a:pt x="1160688" y="0"/>
+                </a:lnTo>
+                <a:lnTo>
+                  <a:pt x="983189" y="331786"/>
                 </a:lnTo>
                 <a:cubicBezTo>
-                  <a:pt x="4721143" y="4908767"/>
-                  <a:pt x="4718263" y="4909373"/>
-                  <a:pt x="4717199" y="4909396"/>
+                  <a:pt x="914866" y="469145"/>
+                  <a:pt x="850355" y="608712"/>
+                  <a:pt x="789261" y="750263"/>
                 </a:cubicBezTo>
-                <a:close/>
-                <a:moveTo>
-                  <a:pt x="0" y="0"/>
-                </a:moveTo>
+                <a:cubicBezTo>
+                  <a:pt x="774307" y="784928"/>
+                  <a:pt x="759992" y="819849"/>
+                  <a:pt x="745295" y="854514"/>
+                </a:cubicBezTo>
+                <a:cubicBezTo>
+                  <a:pt x="756682" y="845393"/>
+                  <a:pt x="765489" y="833492"/>
+                  <a:pt x="770857" y="819975"/>
+                </a:cubicBezTo>
+                <a:cubicBezTo>
+                  <a:pt x="879943" y="589569"/>
+                  <a:pt x="999605" y="365513"/>
+                  <a:pt x="1131329" y="148742"/>
+                </a:cubicBezTo>
                 <a:lnTo>
-                  <a:pt x="12191999" y="0"/>
+                  <a:pt x="1227589" y="0"/>
                 </a:lnTo>
                 <a:lnTo>
-                  <a:pt x="12191999" y="5751311"/>
+                  <a:pt x="6878775" y="0"/>
                 </a:lnTo>
                 <a:lnTo>
-                  <a:pt x="12140860" y="5770509"/>
+                  <a:pt x="6878775" y="6858000"/>
+                </a:lnTo>
+                <a:lnTo>
+                  <a:pt x="713521" y="6858000"/>
+                </a:lnTo>
+                <a:lnTo>
+                  <a:pt x="625642" y="6670527"/>
                 </a:lnTo>
                 <a:cubicBezTo>
-                  <a:pt x="12126656" y="5772723"/>
-                  <a:pt x="12093589" y="5827925"/>
-                  <a:pt x="12080161" y="5826358"/>
+                  <a:pt x="507232" y="6398531"/>
+                  <a:pt x="403083" y="6118381"/>
+                  <a:pt x="312785" y="5830359"/>
                 </a:cubicBezTo>
                 <a:cubicBezTo>
-                  <a:pt x="11978188" y="5850511"/>
-                  <a:pt x="11967361" y="5873564"/>
-                  <a:pt x="11917885" y="5861578"/>
+                  <a:pt x="278149" y="5719759"/>
+                  <a:pt x="248879" y="5607635"/>
+                  <a:pt x="212198" y="5480401"/>
                 </a:cubicBezTo>
                 <a:cubicBezTo>
-                  <a:pt x="11872779" y="5859863"/>
-                  <a:pt x="11928861" y="5896778"/>
-                  <a:pt x="11894610" y="5883738"/>
+                  <a:pt x="212208" y="5491601"/>
+                  <a:pt x="212803" y="5502788"/>
+                  <a:pt x="213988" y="5513923"/>
                 </a:cubicBezTo>
                 <a:cubicBezTo>
-                  <a:pt x="11860359" y="5870698"/>
-                  <a:pt x="11736091" y="5807232"/>
-                  <a:pt x="11712379" y="5783337"/>
+                  <a:pt x="264089" y="5723695"/>
+                  <a:pt x="307290" y="5935370"/>
+                  <a:pt x="365826" y="6142729"/>
                 </a:cubicBezTo>
                 <a:cubicBezTo>
-                  <a:pt x="11688667" y="5759442"/>
-                  <a:pt x="11627912" y="5782933"/>
-                  <a:pt x="11585366" y="5740371"/>
+                  <a:pt x="433152" y="6380817"/>
+                  <a:pt x="510068" y="6614016"/>
+                  <a:pt x="597975" y="6841549"/>
                 </a:cubicBezTo>
                 <a:lnTo>
-                  <a:pt x="11516470" y="5663679"/>
+                  <a:pt x="604824" y="6858000"/>
+                </a:lnTo>
+                <a:lnTo>
+                  <a:pt x="552056" y="6858000"/>
+                </a:lnTo>
+                <a:lnTo>
+                  <a:pt x="539576" y="6828295"/>
                 </a:lnTo>
                 <a:cubicBezTo>
-                  <a:pt x="11468274" y="5661847"/>
-                  <a:pt x="11507335" y="5626593"/>
-                  <a:pt x="11462692" y="5610127"/>
+                  <a:pt x="380597" y="6414594"/>
+                  <a:pt x="260223" y="5988893"/>
+                  <a:pt x="171555" y="5552906"/>
                 </a:cubicBezTo>
                 <a:cubicBezTo>
-                  <a:pt x="11417567" y="5608500"/>
-                  <a:pt x="11408021" y="5556613"/>
-                  <a:pt x="11369712" y="5548654"/>
+                  <a:pt x="91163" y="5157998"/>
+                  <a:pt x="43746" y="4758899"/>
+                  <a:pt x="12305" y="4357388"/>
                 </a:cubicBezTo>
                 <a:cubicBezTo>
-                  <a:pt x="11354317" y="5554704"/>
-                  <a:pt x="11288328" y="5499810"/>
-                  <a:pt x="11273969" y="5488986"/>
+                  <a:pt x="-14281" y="4013908"/>
+                  <a:pt x="4507" y="3672965"/>
+                  <a:pt x="46684" y="3331516"/>
                 </a:cubicBezTo>
                 <a:cubicBezTo>
-                  <a:pt x="11231913" y="5490378"/>
-                  <a:pt x="11221973" y="5480544"/>
-                  <a:pt x="11195084" y="5467967"/>
+                  <a:pt x="127203" y="2664286"/>
+                  <a:pt x="277819" y="2007265"/>
+                  <a:pt x="496065" y="1371196"/>
                 </a:cubicBezTo>
                 <a:cubicBezTo>
-                  <a:pt x="11164086" y="5497749"/>
-                  <a:pt x="11171649" y="5471790"/>
-                  <a:pt x="11143408" y="5468614"/>
+                  <a:pt x="636273" y="966066"/>
+                  <a:pt x="800445" y="573253"/>
+                  <a:pt x="995723" y="196614"/>
                 </a:cubicBezTo>
-                <a:cubicBezTo>
-                  <a:pt x="11125906" y="5464975"/>
-                  <a:pt x="11102603" y="5460835"/>
-                  <a:pt x="11085935" y="5459365"/>
-                </a:cubicBezTo>
-                <a:cubicBezTo>
-                  <a:pt x="11057493" y="5459661"/>
-                  <a:pt x="11029906" y="5441496"/>
-                  <a:pt x="11030953" y="5456484"/>
-                </a:cubicBezTo>
-                <a:cubicBezTo>
-                  <a:pt x="11007784" y="5459001"/>
-                  <a:pt x="10982005" y="5463178"/>
-                  <a:pt x="10951060" y="5461240"/>
-                </a:cubicBezTo>
-                <a:cubicBezTo>
-                  <a:pt x="10885365" y="5424406"/>
-                  <a:pt x="10915288" y="5460968"/>
-                  <a:pt x="10857721" y="5448157"/>
-                </a:cubicBezTo>
-                <a:cubicBezTo>
-                  <a:pt x="10806646" y="5435790"/>
-                  <a:pt x="10707075" y="5402712"/>
-                  <a:pt x="10644616" y="5387039"/>
-                </a:cubicBezTo>
-                <a:cubicBezTo>
-                  <a:pt x="10616446" y="5382224"/>
-                  <a:pt x="10558603" y="5371613"/>
-                  <a:pt x="10519277" y="5366793"/>
-                </a:cubicBezTo>
-                <a:cubicBezTo>
-                  <a:pt x="10495461" y="5368312"/>
-                  <a:pt x="10473830" y="5354868"/>
-                  <a:pt x="10445981" y="5364735"/>
-                </a:cubicBezTo>
-                <a:cubicBezTo>
-                  <a:pt x="10436536" y="5368773"/>
-                  <a:pt x="10409281" y="5367966"/>
-                  <a:pt x="10383865" y="5360888"/>
-                </a:cubicBezTo>
-                <a:cubicBezTo>
-                  <a:pt x="10374827" y="5369095"/>
-                  <a:pt x="10347864" y="5360432"/>
-                  <a:pt x="10336852" y="5360277"/>
-                </a:cubicBezTo>
-                <a:cubicBezTo>
-                  <a:pt x="10323586" y="5366987"/>
-                  <a:pt x="10274741" y="5357921"/>
-                  <a:pt x="10261098" y="5350526"/>
-                </a:cubicBezTo>
-                <a:lnTo>
-                  <a:pt x="10126497" y="5339011"/>
-                </a:lnTo>
-                <a:lnTo>
-                  <a:pt x="10082166" y="5336916"/>
-                </a:lnTo>
-                <a:cubicBezTo>
-                  <a:pt x="10074567" y="5338985"/>
-                  <a:pt x="10046860" y="5337657"/>
-                  <a:pt x="10039237" y="5338580"/>
-                </a:cubicBezTo>
-                <a:cubicBezTo>
-                  <a:pt x="9998458" y="5328479"/>
-                  <a:pt x="9984394" y="5327989"/>
-                  <a:pt x="9960016" y="5323065"/>
-                </a:cubicBezTo>
-                <a:cubicBezTo>
-                  <a:pt x="9918980" y="5322923"/>
-                  <a:pt x="9888741" y="5326122"/>
-                  <a:pt x="9847789" y="5316297"/>
-                </a:cubicBezTo>
-                <a:lnTo>
-                  <a:pt x="9728306" y="5296090"/>
-                </a:lnTo>
-                <a:cubicBezTo>
-                  <a:pt x="9675056" y="5305676"/>
-                  <a:pt x="9602035" y="5297282"/>
-                  <a:pt x="9584504" y="5284670"/>
-                </a:cubicBezTo>
-                <a:cubicBezTo>
-                  <a:pt x="9518952" y="5270394"/>
-                  <a:pt x="9415429" y="5244268"/>
-                  <a:pt x="9343049" y="5238968"/>
-                </a:cubicBezTo>
-                <a:lnTo>
-                  <a:pt x="9231367" y="5187063"/>
-                </a:lnTo>
-                <a:lnTo>
-                  <a:pt x="9194807" y="5176984"/>
-                </a:lnTo>
-                <a:lnTo>
-                  <a:pt x="9189243" y="5167745"/>
-                </a:lnTo>
-                <a:lnTo>
-                  <a:pt x="9151229" y="5156543"/>
-                </a:lnTo>
-                <a:lnTo>
-                  <a:pt x="9150207" y="5157608"/>
-                </a:lnTo>
-                <a:cubicBezTo>
-                  <a:pt x="9147045" y="5159739"/>
-                  <a:pt x="9143081" y="5160831"/>
-                  <a:pt x="9137315" y="5159777"/>
-                </a:cubicBezTo>
-                <a:cubicBezTo>
-                  <a:pt x="9138862" y="5179261"/>
-                  <a:pt x="9130952" y="5165972"/>
-                  <a:pt x="9113809" y="5161143"/>
-                </a:cubicBezTo>
-                <a:cubicBezTo>
-                  <a:pt x="9112388" y="5190326"/>
-                  <a:pt x="9068114" y="5155892"/>
-                  <a:pt x="9053450" y="5169457"/>
-                </a:cubicBezTo>
-                <a:lnTo>
-                  <a:pt x="9005483" y="5166172"/>
-                </a:lnTo>
-                <a:lnTo>
-                  <a:pt x="9005198" y="5166412"/>
-                </a:lnTo>
-                <a:cubicBezTo>
-                  <a:pt x="9003143" y="5166632"/>
-                  <a:pt x="9000324" y="5166304"/>
-                  <a:pt x="8996229" y="5165201"/>
-                </a:cubicBezTo>
-                <a:lnTo>
-                  <a:pt x="8990391" y="5163140"/>
-                </a:lnTo>
-                <a:lnTo>
-                  <a:pt x="8974334" y="5159914"/>
-                </a:lnTo>
-                <a:lnTo>
-                  <a:pt x="8968008" y="5160614"/>
-                </a:lnTo>
-                <a:lnTo>
-                  <a:pt x="8963045" y="5162839"/>
-                </a:lnTo>
-                <a:cubicBezTo>
-                  <a:pt x="8954690" y="5154888"/>
-                  <a:pt x="8955517" y="5145940"/>
-                  <a:pt x="8928985" y="5166027"/>
-                </a:cubicBezTo>
-                <a:cubicBezTo>
-                  <a:pt x="8898031" y="5165007"/>
-                  <a:pt x="8789300" y="5150352"/>
-                  <a:pt x="8752441" y="5146795"/>
-                </a:cubicBezTo>
-                <a:cubicBezTo>
-                  <a:pt x="8719819" y="5136075"/>
-                  <a:pt x="8748194" y="5149736"/>
-                  <a:pt x="8707844" y="5144694"/>
-                </a:cubicBezTo>
-                <a:cubicBezTo>
-                  <a:pt x="8671606" y="5125159"/>
-                  <a:pt x="8639142" y="5141599"/>
-                  <a:pt x="8596068" y="5136122"/>
-                </a:cubicBezTo>
-                <a:lnTo>
-                  <a:pt x="8525227" y="5150964"/>
-                </a:lnTo>
-                <a:lnTo>
-                  <a:pt x="8510980" y="5145049"/>
-                </a:lnTo>
-                <a:lnTo>
-                  <a:pt x="8506164" y="5142048"/>
-                </a:lnTo>
-                <a:cubicBezTo>
-                  <a:pt x="8502646" y="5140271"/>
-                  <a:pt x="8500045" y="5139460"/>
-                  <a:pt x="8497965" y="5139310"/>
-                </a:cubicBezTo>
-                <a:lnTo>
-                  <a:pt x="8497591" y="5139489"/>
-                </a:lnTo>
-                <a:lnTo>
-                  <a:pt x="8490246" y="5136439"/>
-                </a:lnTo>
-                <a:lnTo>
-                  <a:pt x="8367179" y="5122397"/>
-                </a:lnTo>
-                <a:cubicBezTo>
-                  <a:pt x="8362021" y="5120372"/>
-                  <a:pt x="8357730" y="5120720"/>
-                  <a:pt x="8353796" y="5122203"/>
-                </a:cubicBezTo>
-                <a:lnTo>
-                  <a:pt x="8352369" y="5123043"/>
-                </a:lnTo>
-                <a:lnTo>
-                  <a:pt x="8320101" y="5105625"/>
-                </a:lnTo>
-                <a:lnTo>
-                  <a:pt x="8314429" y="5105299"/>
-                </a:lnTo>
-                <a:lnTo>
-                  <a:pt x="8295170" y="5091404"/>
-                </a:lnTo>
-                <a:lnTo>
-                  <a:pt x="8284273" y="5085581"/>
-                </a:lnTo>
-                <a:lnTo>
-                  <a:pt x="8283146" y="5081138"/>
-                </a:lnTo>
-                <a:cubicBezTo>
-                  <a:pt x="8280842" y="5077893"/>
-                  <a:pt x="8276148" y="5075245"/>
-                  <a:pt x="8266072" y="5073963"/>
-                </a:cubicBezTo>
-                <a:lnTo>
-                  <a:pt x="8263373" y="5074193"/>
-                </a:lnTo>
-                <a:lnTo>
-                  <a:pt x="8252030" y="5064350"/>
-                </a:lnTo>
-                <a:cubicBezTo>
-                  <a:pt x="8248856" y="5060500"/>
-                  <a:pt x="8246644" y="5056218"/>
-                  <a:pt x="8245831" y="5051358"/>
-                </a:cubicBezTo>
-                <a:cubicBezTo>
-                  <a:pt x="8181824" y="5054265"/>
-                  <a:pt x="8147127" y="5020143"/>
-                  <a:pt x="8090268" y="5005197"/>
-                </a:cubicBezTo>
-                <a:cubicBezTo>
-                  <a:pt x="8025464" y="4982055"/>
-                  <a:pt x="7967067" y="4960819"/>
-                  <a:pt x="7905404" y="4963224"/>
-                </a:cubicBezTo>
-                <a:cubicBezTo>
-                  <a:pt x="7835116" y="4948312"/>
-                  <a:pt x="7780962" y="4946081"/>
-                  <a:pt x="7718741" y="4937509"/>
-                </a:cubicBezTo>
-                <a:lnTo>
-                  <a:pt x="7614343" y="4940980"/>
-                </a:lnTo>
-                <a:lnTo>
-                  <a:pt x="7527539" y="4935152"/>
-                </a:lnTo>
-                <a:lnTo>
-                  <a:pt x="7519567" y="4932599"/>
-                </a:lnTo>
-                <a:cubicBezTo>
-                  <a:pt x="7513989" y="4931260"/>
-                  <a:pt x="7510169" y="4930910"/>
-                  <a:pt x="7507408" y="4931264"/>
-                </a:cubicBezTo>
-                <a:lnTo>
-                  <a:pt x="7507036" y="4931591"/>
-                </a:lnTo>
-                <a:lnTo>
-                  <a:pt x="7495791" y="4929639"/>
-                </a:lnTo>
-                <a:cubicBezTo>
-                  <a:pt x="7476982" y="4925521"/>
-                  <a:pt x="7422524" y="4942937"/>
-                  <a:pt x="7405387" y="4937744"/>
-                </a:cubicBezTo>
-                <a:cubicBezTo>
-                  <a:pt x="7374785" y="4940694"/>
-                  <a:pt x="7333986" y="4941799"/>
-                  <a:pt x="7312176" y="4947339"/>
-                </a:cubicBezTo>
-                <a:lnTo>
-                  <a:pt x="7310849" y="4948781"/>
-                </a:lnTo>
-                <a:lnTo>
-                  <a:pt x="7218556" y="4923532"/>
-                </a:lnTo>
-                <a:lnTo>
-                  <a:pt x="7201098" y="4918982"/>
-                </a:lnTo>
-                <a:lnTo>
-                  <a:pt x="7197000" y="4913624"/>
-                </a:lnTo>
-                <a:cubicBezTo>
-                  <a:pt x="7192108" y="4910101"/>
-                  <a:pt x="7184502" y="4907962"/>
-                  <a:pt x="7170804" y="4908976"/>
-                </a:cubicBezTo>
-                <a:lnTo>
-                  <a:pt x="7096984" y="4896748"/>
-                </a:lnTo>
-                <a:cubicBezTo>
-                  <a:pt x="7061144" y="4895770"/>
-                  <a:pt x="7050185" y="4894793"/>
-                  <a:pt x="7018492" y="4897122"/>
-                </a:cubicBezTo>
-                <a:cubicBezTo>
-                  <a:pt x="6937524" y="4886184"/>
-                  <a:pt x="6943641" y="4862018"/>
-                  <a:pt x="6904142" y="4867616"/>
-                </a:cubicBezTo>
-                <a:cubicBezTo>
-                  <a:pt x="6871918" y="4872824"/>
-                  <a:pt x="6787985" y="4853750"/>
-                  <a:pt x="6708218" y="4839661"/>
-                </a:cubicBezTo>
-                <a:cubicBezTo>
-                  <a:pt x="6649102" y="4830206"/>
-                  <a:pt x="6628102" y="4816105"/>
-                  <a:pt x="6549451" y="4810885"/>
-                </a:cubicBezTo>
-                <a:cubicBezTo>
-                  <a:pt x="6472150" y="4766795"/>
-                  <a:pt x="6409692" y="4790518"/>
-                  <a:pt x="6317556" y="4764085"/>
-                </a:cubicBezTo>
-                <a:cubicBezTo>
-                  <a:pt x="6297547" y="4748563"/>
-                  <a:pt x="6209288" y="4765756"/>
-                  <a:pt x="6168670" y="4761998"/>
-                </a:cubicBezTo>
-                <a:cubicBezTo>
-                  <a:pt x="6128052" y="4758240"/>
-                  <a:pt x="6090536" y="4744692"/>
-                  <a:pt x="6073844" y="4741536"/>
-                </a:cubicBezTo>
-                <a:lnTo>
-                  <a:pt x="6068526" y="4743073"/>
-                </a:lnTo>
-                <a:lnTo>
-                  <a:pt x="6048634" y="4742390"/>
-                </a:lnTo>
-                <a:lnTo>
-                  <a:pt x="6041279" y="4750739"/>
-                </a:lnTo>
-                <a:lnTo>
-                  <a:pt x="6010088" y="4755832"/>
-                </a:lnTo>
-                <a:cubicBezTo>
-                  <a:pt x="5998677" y="4756419"/>
-                  <a:pt x="5970124" y="4755506"/>
-                  <a:pt x="5957373" y="4752188"/>
-                </a:cubicBezTo>
-                <a:lnTo>
-                  <a:pt x="5758915" y="4736496"/>
-                </a:lnTo>
-                <a:lnTo>
-                  <a:pt x="5626957" y="4735473"/>
-                </a:lnTo>
-                <a:lnTo>
-                  <a:pt x="5470902" y="4749493"/>
-                </a:lnTo>
-                <a:cubicBezTo>
-                  <a:pt x="5478131" y="4762521"/>
-                  <a:pt x="5439006" y="4748455"/>
-                  <a:pt x="5432757" y="4760746"/>
-                </a:cubicBezTo>
-                <a:cubicBezTo>
-                  <a:pt x="5429365" y="4770778"/>
-                  <a:pt x="5391824" y="4775462"/>
-                  <a:pt x="5381664" y="4778448"/>
-                </a:cubicBezTo>
-                <a:lnTo>
-                  <a:pt x="5261760" y="4798865"/>
-                </a:lnTo>
-                <a:cubicBezTo>
-                  <a:pt x="5251595" y="4799049"/>
-                  <a:pt x="5230547" y="4807359"/>
-                  <a:pt x="5222959" y="4809989"/>
-                </a:cubicBezTo>
-                <a:lnTo>
-                  <a:pt x="5174657" y="4812979"/>
-                </a:lnTo>
-                <a:lnTo>
-                  <a:pt x="5156551" y="4820202"/>
-                </a:lnTo>
-                <a:lnTo>
-                  <a:pt x="5142595" y="4823602"/>
-                </a:lnTo>
-                <a:lnTo>
-                  <a:pt x="5139593" y="4825703"/>
-                </a:lnTo>
-                <a:cubicBezTo>
-                  <a:pt x="5133873" y="4829743"/>
-                  <a:pt x="5128076" y="4833554"/>
-                  <a:pt x="5121656" y="4836556"/>
-                </a:cubicBezTo>
-                <a:cubicBezTo>
-                  <a:pt x="5108317" y="4807937"/>
-                  <a:pt x="5064853" y="4857373"/>
-                  <a:pt x="5065787" y="4829985"/>
-                </a:cubicBezTo>
-                <a:cubicBezTo>
-                  <a:pt x="5028193" y="4841501"/>
-                  <a:pt x="5038944" y="4812412"/>
-                  <a:pt x="5011510" y="4846366"/>
-                </a:cubicBezTo>
-                <a:cubicBezTo>
-                  <a:pt x="4937023" y="4845983"/>
-                  <a:pt x="4916353" y="4832976"/>
-                  <a:pt x="4840437" y="4870383"/>
-                </a:cubicBezTo>
-                <a:cubicBezTo>
-                  <a:pt x="4806739" y="4887025"/>
-                  <a:pt x="4784106" y="4898171"/>
-                  <a:pt x="4762444" y="4898151"/>
-                </a:cubicBezTo>
-                <a:cubicBezTo>
-                  <a:pt x="4741323" y="4902652"/>
-                  <a:pt x="4729481" y="4905474"/>
-                  <a:pt x="4723182" y="4907166"/>
-                </a:cubicBezTo>
-                <a:lnTo>
-                  <a:pt x="4721173" y="4907914"/>
-                </a:lnTo>
-                <a:lnTo>
-                  <a:pt x="4715524" y="4906639"/>
-                </a:lnTo>
-                <a:cubicBezTo>
-                  <a:pt x="4680148" y="4913595"/>
-                  <a:pt x="4524744" y="4914403"/>
-                  <a:pt x="4515810" y="4916541"/>
-                </a:cubicBezTo>
-                <a:cubicBezTo>
-                  <a:pt x="4457819" y="4929653"/>
-                  <a:pt x="4462659" y="4930394"/>
-                  <a:pt x="4428539" y="4927192"/>
-                </a:cubicBezTo>
-                <a:cubicBezTo>
-                  <a:pt x="4423303" y="4923821"/>
-                  <a:pt x="4368974" y="4930115"/>
-                  <a:pt x="4362872" y="4928538"/>
-                </a:cubicBezTo>
-                <a:lnTo>
-                  <a:pt x="4316962" y="4921923"/>
-                </a:lnTo>
-                <a:lnTo>
-                  <a:pt x="4315106" y="4923264"/>
-                </a:lnTo>
-                <a:cubicBezTo>
-                  <a:pt x="4306123" y="4926635"/>
-                  <a:pt x="4299993" y="4926634"/>
-                  <a:pt x="4295140" y="4925143"/>
-                </a:cubicBezTo>
-                <a:lnTo>
-                  <a:pt x="4290059" y="4922226"/>
-                </a:lnTo>
-                <a:lnTo>
-                  <a:pt x="4276138" y="4922472"/>
-                </a:lnTo>
-                <a:lnTo>
-                  <a:pt x="4248113" y="4920148"/>
-                </a:lnTo>
-                <a:lnTo>
-                  <a:pt x="4202046" y="4922943"/>
-                </a:lnTo>
-                <a:cubicBezTo>
-                  <a:pt x="4201945" y="4923363"/>
-                  <a:pt x="4201842" y="4923782"/>
-                  <a:pt x="4201741" y="4924202"/>
-                </a:cubicBezTo>
-                <a:cubicBezTo>
-                  <a:pt x="4200116" y="4927039"/>
-                  <a:pt x="4197140" y="4929158"/>
-                  <a:pt x="4191245" y="4929836"/>
-                </a:cubicBezTo>
-                <a:cubicBezTo>
-                  <a:pt x="4204212" y="4947125"/>
-                  <a:pt x="4161274" y="4945230"/>
-                  <a:pt x="4142742" y="4945701"/>
-                </a:cubicBezTo>
-                <a:cubicBezTo>
-                  <a:pt x="4124717" y="4952767"/>
-                  <a:pt x="4099099" y="4966347"/>
-                  <a:pt x="4083094" y="4972234"/>
-                </a:cubicBezTo>
-                <a:lnTo>
-                  <a:pt x="4074543" y="4973069"/>
-                </a:lnTo>
-                <a:cubicBezTo>
-                  <a:pt x="4074504" y="4973170"/>
-                  <a:pt x="4074463" y="4973269"/>
-                  <a:pt x="4074424" y="4973368"/>
-                </a:cubicBezTo>
-                <a:cubicBezTo>
-                  <a:pt x="4072678" y="4974152"/>
-                  <a:pt x="4069906" y="4974653"/>
-                  <a:pt x="4065507" y="4974812"/>
-                </a:cubicBezTo>
-                <a:lnTo>
-                  <a:pt x="4058951" y="4974594"/>
-                </a:lnTo>
-                <a:lnTo>
-                  <a:pt x="4042361" y="4976215"/>
-                </a:lnTo>
-                <a:lnTo>
-                  <a:pt x="4036993" y="4978649"/>
-                </a:lnTo>
-                <a:lnTo>
-                  <a:pt x="4035360" y="4982316"/>
-                </a:lnTo>
-                <a:lnTo>
-                  <a:pt x="4033775" y="4982081"/>
-                </a:lnTo>
-                <a:cubicBezTo>
-                  <a:pt x="4021424" y="4977217"/>
-                  <a:pt x="4016874" y="4968841"/>
-                  <a:pt x="4004535" y="4994649"/>
-                </a:cubicBezTo>
-                <a:cubicBezTo>
-                  <a:pt x="3976667" y="4987584"/>
-                  <a:pt x="3972977" y="5002913"/>
-                  <a:pt x="3936843" y="5012106"/>
-                </a:cubicBezTo>
-                <a:cubicBezTo>
-                  <a:pt x="3920506" y="5004382"/>
-                  <a:pt x="3908535" y="5009071"/>
-                  <a:pt x="3897272" y="5017761"/>
-                </a:cubicBezTo>
-                <a:cubicBezTo>
-                  <a:pt x="3861092" y="5017265"/>
-                  <a:pt x="3829628" y="5031135"/>
-                  <a:pt x="3789757" y="5037999"/>
-                </a:cubicBezTo>
-                <a:cubicBezTo>
-                  <a:pt x="3741007" y="5052705"/>
-                  <a:pt x="3725129" y="5054682"/>
-                  <a:pt x="3682510" y="5061922"/>
-                </a:cubicBezTo>
-                <a:lnTo>
-                  <a:pt x="3610032" y="5094193"/>
-                </a:lnTo>
-                <a:lnTo>
-                  <a:pt x="3603852" y="5092831"/>
-                </a:lnTo>
-                <a:cubicBezTo>
-                  <a:pt x="3599580" y="5092212"/>
-                  <a:pt x="3596726" y="5092212"/>
-                  <a:pt x="3594733" y="5092667"/>
-                </a:cubicBezTo>
-                <a:lnTo>
-                  <a:pt x="3594498" y="5092936"/>
-                </a:lnTo>
-                <a:lnTo>
-                  <a:pt x="3585975" y="5092246"/>
-                </a:lnTo>
-                <a:cubicBezTo>
-                  <a:pt x="3571623" y="5090455"/>
-                  <a:pt x="3549389" y="5104654"/>
-                  <a:pt x="3536132" y="5101945"/>
-                </a:cubicBezTo>
-                <a:cubicBezTo>
-                  <a:pt x="3513940" y="5106241"/>
-                  <a:pt x="3488622" y="5099976"/>
-                  <a:pt x="3473220" y="5105606"/>
-                </a:cubicBezTo>
-                <a:lnTo>
-                  <a:pt x="3400725" y="5117654"/>
-                </a:lnTo>
-                <a:lnTo>
-                  <a:pt x="3375935" y="5106247"/>
-                </a:lnTo>
-                <a:lnTo>
-                  <a:pt x="3348219" y="5109860"/>
-                </a:lnTo>
-                <a:cubicBezTo>
-                  <a:pt x="3337206" y="5110533"/>
-                  <a:pt x="3327054" y="5111295"/>
-                  <a:pt x="3319639" y="5114795"/>
-                </a:cubicBezTo>
-                <a:lnTo>
-                  <a:pt x="3248529" y="5133347"/>
-                </a:lnTo>
-                <a:lnTo>
-                  <a:pt x="3210308" y="5119794"/>
-                </a:lnTo>
-                <a:cubicBezTo>
-                  <a:pt x="3206088" y="5117870"/>
-                  <a:pt x="3200152" y="5117326"/>
-                  <a:pt x="3190375" y="5119915"/>
-                </a:cubicBezTo>
-                <a:lnTo>
-                  <a:pt x="3188145" y="5121096"/>
-                </a:lnTo>
-                <a:cubicBezTo>
-                  <a:pt x="3182625" y="5119116"/>
-                  <a:pt x="3141856" y="5121682"/>
-                  <a:pt x="3108596" y="5122416"/>
-                </a:cubicBezTo>
-                <a:cubicBezTo>
-                  <a:pt x="3055968" y="5124842"/>
-                  <a:pt x="3048940" y="5117475"/>
-                  <a:pt x="2988584" y="5125502"/>
-                </a:cubicBezTo>
-                <a:cubicBezTo>
-                  <a:pt x="2928853" y="5129690"/>
-                  <a:pt x="2917951" y="5124649"/>
-                  <a:pt x="2876540" y="5133019"/>
-                </a:cubicBezTo>
-                <a:lnTo>
-                  <a:pt x="2626864" y="5133771"/>
-                </a:lnTo>
-                <a:cubicBezTo>
-                  <a:pt x="2562348" y="5111858"/>
-                  <a:pt x="2563422" y="5142456"/>
-                  <a:pt x="2491422" y="5135486"/>
-                </a:cubicBezTo>
-                <a:cubicBezTo>
-                  <a:pt x="2433091" y="5200962"/>
-                  <a:pt x="2455709" y="5160483"/>
-                  <a:pt x="2415617" y="5168715"/>
-                </a:cubicBezTo>
-                <a:lnTo>
-                  <a:pt x="2290098" y="5166151"/>
-                </a:lnTo>
-                <a:cubicBezTo>
-                  <a:pt x="2257057" y="5152522"/>
-                  <a:pt x="2202458" y="5187690"/>
-                  <a:pt x="2161714" y="5169302"/>
-                </a:cubicBezTo>
-                <a:cubicBezTo>
-                  <a:pt x="2122714" y="5172302"/>
-                  <a:pt x="2080450" y="5180350"/>
-                  <a:pt x="2056089" y="5184144"/>
-                </a:cubicBezTo>
-                <a:cubicBezTo>
-                  <a:pt x="2019828" y="5191108"/>
-                  <a:pt x="1978839" y="5203797"/>
-                  <a:pt x="1944153" y="5211084"/>
-                </a:cubicBezTo>
-                <a:cubicBezTo>
-                  <a:pt x="1925867" y="5199079"/>
-                  <a:pt x="1896027" y="5224183"/>
-                  <a:pt x="1847968" y="5227868"/>
-                </a:cubicBezTo>
-                <a:cubicBezTo>
-                  <a:pt x="1827977" y="5213971"/>
-                  <a:pt x="1815570" y="5230544"/>
-                  <a:pt x="1777083" y="5212267"/>
-                </a:cubicBezTo>
-                <a:cubicBezTo>
-                  <a:pt x="1775439" y="5214216"/>
-                  <a:pt x="1773397" y="5216035"/>
-                  <a:pt x="1771025" y="5217668"/>
-                </a:cubicBezTo>
-                <a:cubicBezTo>
-                  <a:pt x="1757251" y="5227146"/>
-                  <a:pt x="1735528" y="5228402"/>
-                  <a:pt x="1722509" y="5220470"/>
-                </a:cubicBezTo>
-                <a:cubicBezTo>
-                  <a:pt x="1691779" y="5208440"/>
-                  <a:pt x="1662321" y="5203305"/>
-                  <a:pt x="1633941" y="5200774"/>
-                </a:cubicBezTo>
-                <a:lnTo>
-                  <a:pt x="1586145" y="5210184"/>
-                </a:lnTo>
-                <a:cubicBezTo>
-                  <a:pt x="1567948" y="5215416"/>
-                  <a:pt x="1545900" y="5226363"/>
-                  <a:pt x="1524748" y="5232173"/>
-                </a:cubicBezTo>
-                <a:cubicBezTo>
-                  <a:pt x="1502586" y="5235395"/>
-                  <a:pt x="1478013" y="5230993"/>
-                  <a:pt x="1459242" y="5245044"/>
-                </a:cubicBezTo>
-                <a:cubicBezTo>
-                  <a:pt x="1421474" y="5260197"/>
-                  <a:pt x="1374524" y="5244220"/>
-                  <a:pt x="1349457" y="5280705"/>
-                </a:cubicBezTo>
-                <a:cubicBezTo>
-                  <a:pt x="1273276" y="5302389"/>
-                  <a:pt x="1121512" y="5336260"/>
-                  <a:pt x="1009212" y="5361227"/>
-                </a:cubicBezTo>
-                <a:cubicBezTo>
-                  <a:pt x="939016" y="5373529"/>
-                  <a:pt x="866895" y="5370149"/>
-                  <a:pt x="808572" y="5377024"/>
-                </a:cubicBezTo>
-                <a:cubicBezTo>
-                  <a:pt x="802823" y="5374184"/>
-                  <a:pt x="726016" y="5397963"/>
-                  <a:pt x="719549" y="5396991"/>
-                </a:cubicBezTo>
-                <a:lnTo>
-                  <a:pt x="698795" y="5397657"/>
-                </a:lnTo>
-                <a:cubicBezTo>
-                  <a:pt x="689833" y="5401894"/>
-                  <a:pt x="683492" y="5402495"/>
-                  <a:pt x="678327" y="5401487"/>
-                </a:cubicBezTo>
-                <a:lnTo>
-                  <a:pt x="672784" y="5399085"/>
-                </a:lnTo>
-                <a:lnTo>
-                  <a:pt x="658406" y="5400696"/>
-                </a:lnTo>
-                <a:lnTo>
-                  <a:pt x="629185" y="5401132"/>
-                </a:lnTo>
-                <a:lnTo>
-                  <a:pt x="624558" y="5403782"/>
-                </a:lnTo>
-                <a:lnTo>
-                  <a:pt x="581798" y="5408438"/>
-                </a:lnTo>
-                <a:cubicBezTo>
-                  <a:pt x="581736" y="5408865"/>
-                  <a:pt x="581671" y="5409294"/>
-                  <a:pt x="581608" y="5409722"/>
-                </a:cubicBezTo>
-                <a:cubicBezTo>
-                  <a:pt x="580204" y="5412704"/>
-                  <a:pt x="577331" y="5415106"/>
-                  <a:pt x="571299" y="5416358"/>
-                </a:cubicBezTo>
-                <a:cubicBezTo>
-                  <a:pt x="551623" y="5426267"/>
-                  <a:pt x="484499" y="5459654"/>
-                  <a:pt x="463549" y="5469173"/>
-                </a:cubicBezTo>
-                <a:cubicBezTo>
-                  <a:pt x="453136" y="5470720"/>
-                  <a:pt x="449731" y="5472678"/>
-                  <a:pt x="445606" y="5473465"/>
-                </a:cubicBezTo>
-                <a:lnTo>
-                  <a:pt x="438799" y="5473893"/>
-                </a:lnTo>
-                <a:cubicBezTo>
-                  <a:pt x="417222" y="5482183"/>
-                  <a:pt x="343312" y="5513407"/>
-                  <a:pt x="316138" y="5523213"/>
-                </a:cubicBezTo>
-                <a:cubicBezTo>
-                  <a:pt x="298481" y="5517132"/>
-                  <a:pt x="286556" y="5522972"/>
-                  <a:pt x="275748" y="5532726"/>
-                </a:cubicBezTo>
-                <a:cubicBezTo>
-                  <a:pt x="238274" y="5535784"/>
-                  <a:pt x="207076" y="5552679"/>
-                  <a:pt x="166496" y="5563424"/>
-                </a:cubicBezTo>
-                <a:lnTo>
-                  <a:pt x="0" y="5629888"/>
-                </a:lnTo>
                 <a:close/>
               </a:path>
             </a:pathLst>
@@ -9192,7 +11545,7 @@
 </p:sld>
 </file>
 
-<file path=ppt/slides/slide5.xml><?xml version="1.0" encoding="utf-8"?>
+<file path=ppt/slides/slide6.xml><?xml version="1.0" encoding="utf-8"?>
 <p:sld xmlns:a="http://schemas.openxmlformats.org/drawingml/2006/main" xmlns:r="http://schemas.openxmlformats.org/officeDocument/2006/relationships" xmlns:p="http://schemas.openxmlformats.org/presentationml/2006/main">
   <p:cSld>
     <p:bg>
@@ -9595,7 +11948,7 @@
           <a:p>
             <a:r>
               <a:rPr lang="en-US" sz="4800" dirty="0"/>
-              <a:t>R4 API - </a:t>
+              <a:t>R4 API\SDK - </a:t>
             </a:r>
             <a:r>
               <a:rPr lang="en-US" sz="4800" dirty="0" err="1"/>
@@ -9634,14 +11987,50 @@
           <a:lstStyle/>
           <a:p>
             <a:r>
-              <a:rPr lang="en-US" sz="2400"/>
-              <a:t>Created Our Template PROTOCOL.md and updated the file with current messages.</a:t>
-            </a:r>
-          </a:p>
-          <a:p>
-            <a:r>
-              <a:rPr lang="en-US" sz="2400"/>
-              <a:t>Began implementing Messages Between the SDK and unreal</a:t>
+              <a:rPr lang="en-US" sz="2400" dirty="0"/>
+              <a:t>Task: </a:t>
+            </a:r>
+          </a:p>
+          <a:p>
+            <a:pPr lvl="1">
+              <a:buFontTx/>
+              <a:buChar char="-"/>
+            </a:pPr>
+            <a:r>
+              <a:rPr lang="en-US" sz="2000" dirty="0"/>
+              <a:t>Set up SDK in The project</a:t>
+            </a:r>
+          </a:p>
+          <a:p>
+            <a:pPr lvl="1">
+              <a:buFontTx/>
+              <a:buChar char="-"/>
+            </a:pPr>
+            <a:r>
+              <a:rPr lang="en-US" sz="2000" dirty="0"/>
+              <a:t>Created the test </a:t>
+            </a:r>
+            <a:r>
+              <a:rPr lang="en-US" sz="2000" dirty="0" err="1"/>
+              <a:t>old_model</a:t>
+            </a:r>
+            <a:r>
+              <a:rPr lang="en-US" sz="2000" dirty="0"/>
+              <a:t> branch to verify how it functions</a:t>
+            </a:r>
+          </a:p>
+          <a:p>
+            <a:pPr lvl="1">
+              <a:buFontTx/>
+              <a:buChar char="-"/>
+            </a:pPr>
+            <a:r>
+              <a:rPr lang="en-US" sz="2000" dirty="0" err="1"/>
+              <a:t>Etc</a:t>
+            </a:r>
+            <a:r>
+              <a:rPr lang="en-US" sz="2000" dirty="0"/>
+              <a:t>…</a:t>
             </a:r>
           </a:p>
         </p:txBody>
@@ -9711,7 +12100,7 @@
 </p:sld>
 </file>
 
-<file path=ppt/slides/slide6.xml><?xml version="1.0" encoding="utf-8"?>
+<file path=ppt/slides/slide7.xml><?xml version="1.0" encoding="utf-8"?>
 <p:sld xmlns:a="http://schemas.openxmlformats.org/drawingml/2006/main" xmlns:r="http://schemas.openxmlformats.org/officeDocument/2006/relationships" xmlns:p="http://schemas.openxmlformats.org/presentationml/2006/main">
   <p:cSld>
     <p:bg>
@@ -10148,10 +12537,70 @@
         </p:spPr>
         <p:txBody>
           <a:bodyPr anchor="ctr">
-            <a:normAutofit/>
+            <a:normAutofit lnSpcReduction="10000"/>
           </a:bodyPr>
           <a:lstStyle/>
           <a:p>
+            <a:r>
+              <a:rPr lang="en-US" dirty="0"/>
+              <a:t>Task: </a:t>
+            </a:r>
+          </a:p>
+          <a:p>
+            <a:pPr marL="457200" lvl="1" indent="0">
+              <a:buNone/>
+            </a:pPr>
+            <a:r>
+              <a:rPr lang="en-US" dirty="0"/>
+              <a:t>	</a:t>
+            </a:r>
+            <a:r>
+              <a:rPr lang="en-US" sz="2800" dirty="0"/>
+              <a:t>Create Python script that handles user commands.</a:t>
+            </a:r>
+          </a:p>
+          <a:p>
+            <a:pPr marL="0" indent="0">
+              <a:buNone/>
+            </a:pPr>
+            <a:r>
+              <a:rPr lang="en-US" dirty="0"/>
+              <a:t>	Create the output folders "run" and the command csv(s)</a:t>
+            </a:r>
+          </a:p>
+          <a:p>
+            <a:r>
+              <a:rPr lang="en-US" dirty="0"/>
+              <a:t>Task: </a:t>
+            </a:r>
+          </a:p>
+          <a:p>
+            <a:pPr marL="0" indent="0">
+              <a:buNone/>
+            </a:pPr>
+            <a:r>
+              <a:rPr lang="en-US" dirty="0"/>
+              <a:t>	Implement the commands: close(), </a:t>
+            </a:r>
+            <a:r>
+              <a:rPr lang="en-US" dirty="0" err="1"/>
+              <a:t>statePulling</a:t>
+            </a:r>
+            <a:r>
+              <a:rPr lang="en-US" dirty="0"/>
+              <a:t>(), 	</a:t>
+            </a:r>
+            <a:r>
+              <a:rPr lang="en-US" dirty="0" err="1"/>
+              <a:t>takeof</a:t>
+            </a:r>
+            <a:r>
+              <a:rPr lang="en-US" dirty="0"/>
+              <a:t>(), hover() and land()</a:t>
+            </a:r>
+            <a:br>
+              <a:rPr lang="en-US" dirty="0"/>
+            </a:br>
             <a:endParaRPr lang="en-US" sz="2400" dirty="0"/>
           </a:p>
         </p:txBody>
@@ -10221,7 +12670,7 @@
 </p:sld>
 </file>
 
-<file path=ppt/slides/slide7.xml><?xml version="1.0" encoding="utf-8"?>
+<file path=ppt/slides/slide8.xml><?xml version="1.0" encoding="utf-8"?>
 <p:sld xmlns:a="http://schemas.openxmlformats.org/drawingml/2006/main" xmlns:r="http://schemas.openxmlformats.org/officeDocument/2006/relationships" xmlns:p="http://schemas.openxmlformats.org/presentationml/2006/main">
   <p:cSld>
     <p:bg>
@@ -10524,7 +12973,7 @@
           <a:lstStyle/>
           <a:p>
             <a:r>
-              <a:rPr lang="en-US" sz="2000">
+              <a:rPr lang="en-US" sz="2000" dirty="0">
                 <a:solidFill>
                   <a:schemeClr val="tx1">
                     <a:lumMod val="65000"/>
@@ -10532,13 +12981,13 @@
                   </a:schemeClr>
                 </a:solidFill>
               </a:rPr>
-              <a:t>What Worked: </a:t>
+              <a:t>What Worked:</a:t>
             </a:r>
           </a:p>
           <a:p>
             <a:pPr lvl="1"/>
             <a:r>
-              <a:rPr lang="en-US" sz="1600">
+              <a:rPr lang="en-US" sz="1600" dirty="0">
                 <a:solidFill>
                   <a:schemeClr val="tx1">
                     <a:lumMod val="65000"/>
@@ -10546,13 +12995,10 @@
                   </a:schemeClr>
                 </a:solidFill>
               </a:rPr>
-              <a:t>Consistent Meeting times drastically improved productivity.</a:t>
-            </a:r>
-          </a:p>
-          <a:p>
-            <a:pPr lvl="1"/>
-            <a:r>
-              <a:rPr lang="en-US" sz="1600">
+              <a:t>Documentation on </a:t>
+            </a:r>
+            <a:r>
+              <a:rPr lang="en-US" sz="1600" dirty="0" err="1">
                 <a:solidFill>
                   <a:schemeClr val="tx1">
                     <a:lumMod val="65000"/>
@@ -10560,10 +13006,10 @@
                   </a:schemeClr>
                 </a:solidFill>
               </a:rPr>
-              <a:t>New Golden Machine runs unreal well and we can </a:t>
-            </a:r>
-            <a:r>
-              <a:rPr lang="en-US" sz="1600" err="1">
+              <a:t>Airsim</a:t>
+            </a:r>
+            <a:r>
+              <a:rPr lang="en-US" sz="1600" dirty="0">
                 <a:solidFill>
                   <a:schemeClr val="tx1">
                     <a:lumMod val="65000"/>
@@ -10571,10 +13017,13 @@
                   </a:schemeClr>
                 </a:solidFill>
               </a:rPr>
-              <a:t>setit</a:t>
-            </a:r>
-            <a:r>
-              <a:rPr lang="en-US" sz="1600">
+              <a:t> is more abundant than we thought.</a:t>
+            </a:r>
+          </a:p>
+          <a:p>
+            <a:pPr lvl="1"/>
+            <a:r>
+              <a:rPr lang="en-US" sz="1600" dirty="0">
                 <a:solidFill>
                   <a:schemeClr val="tx1">
                     <a:lumMod val="65000"/>
@@ -10582,12 +13031,12 @@
                   </a:schemeClr>
                 </a:solidFill>
               </a:rPr>
-              <a:t> up with little issue.</a:t>
-            </a:r>
-          </a:p>
-          <a:p>
-            <a:r>
-              <a:rPr lang="en-US" sz="2000">
+              <a:t>A lot can be done in Unreal without writing a single line of code </a:t>
+            </a:r>
+          </a:p>
+          <a:p>
+            <a:r>
+              <a:rPr lang="en-US" sz="2000" dirty="0">
                 <a:solidFill>
                   <a:schemeClr val="tx1">
                     <a:lumMod val="65000"/>
@@ -10601,7 +13050,7 @@
           <a:p>
             <a:pPr lvl="1"/>
             <a:r>
-              <a:rPr lang="en-US" sz="1600">
+              <a:rPr lang="en-US" sz="1600" dirty="0">
                 <a:solidFill>
                   <a:schemeClr val="tx1">
                     <a:lumMod val="65000"/>
@@ -10609,13 +13058,13 @@
                   </a:schemeClr>
                 </a:solidFill>
               </a:rPr>
-              <a:t>Unreal ran poorly on many of our machines if it ran at all.</a:t>
-            </a:r>
-          </a:p>
-          <a:p>
-            <a:pPr lvl="1"/>
-            <a:r>
-              <a:rPr lang="en-US" sz="1600">
+              <a:t>Microsoft Air sim was going to continue being a challenge:</a:t>
+            </a:r>
+          </a:p>
+          <a:p>
+            <a:pPr lvl="2"/>
+            <a:r>
+              <a:rPr lang="en-US" sz="1200" dirty="0">
                 <a:solidFill>
                   <a:schemeClr val="tx1">
                     <a:lumMod val="65000"/>
@@ -10623,10 +13072,38 @@
                   </a:schemeClr>
                 </a:solidFill>
               </a:rPr>
-              <a:t>Microsoft </a:t>
-            </a:r>
-            <a:r>
-              <a:rPr lang="en-US" sz="1600" err="1">
+              <a:t>Older and out of date. </a:t>
+            </a:r>
+          </a:p>
+          <a:p>
+            <a:pPr lvl="3"/>
+            <a:r>
+              <a:rPr lang="en-US" sz="1000" dirty="0">
+                <a:solidFill>
+                  <a:schemeClr val="tx1">
+                    <a:lumMod val="65000"/>
+                    <a:lumOff val="35000"/>
+                  </a:schemeClr>
+                </a:solidFill>
+              </a:rPr>
+              <a:t>Need to use python 3.9 and Unreal 4.27</a:t>
+            </a:r>
+          </a:p>
+          <a:p>
+            <a:pPr lvl="2"/>
+            <a:r>
+              <a:rPr lang="en-US" sz="1200" dirty="0">
+                <a:solidFill>
+                  <a:schemeClr val="tx1">
+                    <a:lumMod val="65000"/>
+                    <a:lumOff val="35000"/>
+                  </a:schemeClr>
+                </a:solidFill>
+              </a:rPr>
+              <a:t>Project </a:t>
+            </a:r>
+            <a:r>
+              <a:rPr lang="en-US" sz="1200" dirty="0" err="1">
                 <a:solidFill>
                   <a:schemeClr val="tx1">
                     <a:lumMod val="65000"/>
@@ -10637,7 +13114,7 @@
               <a:t>AirSim</a:t>
             </a:r>
             <a:r>
-              <a:rPr lang="en-US" sz="1600">
+              <a:rPr lang="en-US" sz="1200" dirty="0">
                 <a:solidFill>
                   <a:schemeClr val="tx1">
                     <a:lumMod val="65000"/>
@@ -10645,13 +13122,13 @@
                   </a:schemeClr>
                 </a:solidFill>
               </a:rPr>
-              <a:t> SDK is outdated and no longer receiving updates.</a:t>
-            </a:r>
-          </a:p>
-          <a:p>
-            <a:pPr lvl="2"/>
-            <a:r>
-              <a:rPr lang="en-US" sz="1200">
+              <a:t> fixes this</a:t>
+            </a:r>
+          </a:p>
+          <a:p>
+            <a:pPr lvl="3"/>
+            <a:r>
+              <a:rPr lang="en-US" sz="1000" dirty="0">
                 <a:solidFill>
                   <a:schemeClr val="tx1">
                     <a:lumMod val="65000"/>
@@ -10659,13 +13136,13 @@
                   </a:schemeClr>
                 </a:solidFill>
               </a:rPr>
-              <a:t>Forces us to use outdated python versions and dependencies.</a:t>
-            </a:r>
-          </a:p>
-          <a:p>
-            <a:pPr lvl="2"/>
-            <a:r>
-              <a:rPr lang="en-US" sz="1200">
+              <a:t>Still being supported</a:t>
+            </a:r>
+          </a:p>
+          <a:p>
+            <a:pPr lvl="3"/>
+            <a:r>
+              <a:rPr lang="en-US" sz="1000" dirty="0">
                 <a:solidFill>
                   <a:schemeClr val="tx1">
                     <a:lumMod val="65000"/>
@@ -10673,21 +13150,7 @@
                   </a:schemeClr>
                 </a:solidFill>
               </a:rPr>
-              <a:t>Inconsistent set up </a:t>
-            </a:r>
-          </a:p>
-          <a:p>
-            <a:pPr lvl="3"/>
-            <a:r>
-              <a:rPr lang="en-US" sz="1000">
-                <a:solidFill>
-                  <a:schemeClr val="tx1">
-                    <a:lumMod val="65000"/>
-                    <a:lumOff val="35000"/>
-                  </a:schemeClr>
-                </a:solidFill>
-              </a:rPr>
-              <a:t>Some machines are straight forward others do work no matter what.</a:t>
+              <a:t>Works with modern  unreal</a:t>
             </a:r>
           </a:p>
         </p:txBody>
@@ -10705,7 +13168,7 @@
 </p:sld>
 </file>
 
-<file path=ppt/slides/slide8.xml><?xml version="1.0" encoding="utf-8"?>
+<file path=ppt/slides/slide9.xml><?xml version="1.0" encoding="utf-8"?>
 <p:sld xmlns:a="http://schemas.openxmlformats.org/drawingml/2006/main" xmlns:r="http://schemas.openxmlformats.org/officeDocument/2006/relationships" xmlns:p="http://schemas.openxmlformats.org/presentationml/2006/main">
   <p:cSld>
     <p:bg>
@@ -10858,7 +13321,7 @@
             <p:ph idx="1"/>
             <p:extLst>
               <p:ext uri="{D42A27DB-BD31-4B8C-83A1-F6EECF244321}">
-                <p14:modId xmlns:p14="http://schemas.microsoft.com/office/powerpoint/2010/main" val="1216432367"/>
+                <p14:modId xmlns:p14="http://schemas.microsoft.com/office/powerpoint/2010/main" val="3210727792"/>
               </p:ext>
             </p:extLst>
           </p:nvPr>
@@ -10877,609 +13340,6 @@
     <p:extLst>
       <p:ext uri="{BB962C8B-B14F-4D97-AF65-F5344CB8AC3E}">
         <p14:creationId xmlns:p14="http://schemas.microsoft.com/office/powerpoint/2010/main" val="3197113900"/>
-      </p:ext>
-    </p:extLst>
-  </p:cSld>
-  <p:clrMapOvr>
-    <a:masterClrMapping/>
-  </p:clrMapOvr>
-</p:sld>
-</file>
-
-<file path=ppt/slides/slide9.xml><?xml version="1.0" encoding="utf-8"?>
-<p:sld xmlns:a="http://schemas.openxmlformats.org/drawingml/2006/main" xmlns:r="http://schemas.openxmlformats.org/officeDocument/2006/relationships" xmlns:p="http://schemas.openxmlformats.org/presentationml/2006/main">
-  <p:cSld>
-    <p:bg>
-      <p:bgPr>
-        <a:solidFill>
-          <a:schemeClr val="bg1"/>
-        </a:solidFill>
-        <a:effectLst/>
-      </p:bgPr>
-    </p:bg>
-    <p:spTree>
-      <p:nvGrpSpPr>
-        <p:cNvPr id="1" name=""/>
-        <p:cNvGrpSpPr/>
-        <p:nvPr/>
-      </p:nvGrpSpPr>
-      <p:grpSpPr>
-        <a:xfrm>
-          <a:off x="0" y="0"/>
-          <a:ext cx="0" cy="0"/>
-          <a:chOff x="0" y="0"/>
-          <a:chExt cx="0" cy="0"/>
-        </a:xfrm>
-      </p:grpSpPr>
-      <p:sp useBgFill="1">
-        <p:nvSpPr>
-          <p:cNvPr id="8" name="Rectangle 7">
-            <a:extLst>
-              <a:ext uri="{FF2B5EF4-FFF2-40B4-BE49-F238E27FC236}">
-                <a16:creationId xmlns:a16="http://schemas.microsoft.com/office/drawing/2014/main" id="{DEE2AD96-B495-4E06-9291-B71706F728CB}"/>
-              </a:ext>
-              <a:ext uri="{C183D7F6-B498-43B3-948B-1728B52AA6E4}">
-                <adec:decorative xmlns:adec="http://schemas.microsoft.com/office/drawing/2017/decorative" val="1"/>
-              </a:ext>
-            </a:extLst>
-          </p:cNvPr>
-          <p:cNvSpPr>
-            <a:spLocks noGrp="1" noRot="1" noChangeAspect="1" noMove="1" noResize="1" noEditPoints="1" noAdjustHandles="1" noChangeArrowheads="1" noChangeShapeType="1" noTextEdit="1"/>
-          </p:cNvSpPr>
-          <p:nvPr>
-            <p:extLst>
-              <p:ext uri="{386F3935-93C4-4BCD-93E2-E3B085C9AB24}">
-                <p16:designElem xmlns:p16="http://schemas.microsoft.com/office/powerpoint/2015/main" val="1"/>
-              </p:ext>
-            </p:extLst>
-          </p:nvPr>
-        </p:nvSpPr>
-        <p:spPr>
-          <a:xfrm>
-            <a:off x="0" y="0"/>
-            <a:ext cx="12192000" cy="6858000"/>
-          </a:xfrm>
-          <a:prstGeom prst="rect">
-            <a:avLst/>
-          </a:prstGeom>
-          <a:ln w="12700" cap="flat" cmpd="sng" algn="ctr">
-            <a:noFill/>
-            <a:prstDash val="solid"/>
-            <a:miter lim="800000"/>
-          </a:ln>
-          <a:effectLst/>
-          <a:extLst>
-            <a:ext uri="{91240B29-F687-4F45-9708-019B960494DF}">
-              <a14:hiddenLine xmlns:a14="http://schemas.microsoft.com/office/drawing/2010/main" w="12700" cap="flat" cmpd="sng" algn="ctr">
-                <a:solidFill>
-                  <a:schemeClr val="accent1">
-                    <a:shade val="50000"/>
-                  </a:schemeClr>
-                </a:solidFill>
-                <a:prstDash val="solid"/>
-                <a:miter lim="800000"/>
-              </a14:hiddenLine>
-            </a:ext>
-          </a:extLst>
-        </p:spPr>
-        <p:style>
-          <a:lnRef idx="2">
-            <a:schemeClr val="accent1">
-              <a:shade val="50000"/>
-            </a:schemeClr>
-          </a:lnRef>
-          <a:fillRef idx="1">
-            <a:schemeClr val="accent1"/>
-          </a:fillRef>
-          <a:effectRef idx="0">
-            <a:schemeClr val="accent1"/>
-          </a:effectRef>
-          <a:fontRef idx="minor">
-            <a:schemeClr val="lt1"/>
-          </a:fontRef>
-        </p:style>
-        <p:txBody>
-          <a:bodyPr rtlCol="0" anchor="ctr"/>
-          <a:lstStyle/>
-          <a:p>
-            <a:pPr algn="ctr"/>
-            <a:endParaRPr lang="en-US"/>
-          </a:p>
-        </p:txBody>
-      </p:sp>
-      <p:sp>
-        <p:nvSpPr>
-          <p:cNvPr id="10" name="Rectangle 9">
-            <a:extLst>
-              <a:ext uri="{FF2B5EF4-FFF2-40B4-BE49-F238E27FC236}">
-                <a16:creationId xmlns:a16="http://schemas.microsoft.com/office/drawing/2014/main" id="{53CF6D67-C5A8-4ADD-9E8E-1E38CA1D3166}"/>
-              </a:ext>
-              <a:ext uri="{C183D7F6-B498-43B3-948B-1728B52AA6E4}">
-                <adec:decorative xmlns:adec="http://schemas.microsoft.com/office/drawing/2017/decorative" val="1"/>
-              </a:ext>
-            </a:extLst>
-          </p:cNvPr>
-          <p:cNvSpPr>
-            <a:spLocks noGrp="1" noRot="1" noChangeAspect="1" noMove="1" noResize="1" noEditPoints="1" noAdjustHandles="1" noChangeArrowheads="1" noChangeShapeType="1" noTextEdit="1"/>
-          </p:cNvSpPr>
-          <p:nvPr>
-            <p:extLst>
-              <p:ext uri="{386F3935-93C4-4BCD-93E2-E3B085C9AB24}">
-                <p16:designElem xmlns:p16="http://schemas.microsoft.com/office/powerpoint/2015/main" val="1"/>
-              </p:ext>
-            </p:extLst>
-          </p:nvPr>
-        </p:nvSpPr>
-        <p:spPr>
-          <a:xfrm rot="5400000" flipH="1">
-            <a:off x="-638515" y="639280"/>
-            <a:ext cx="6858000" cy="5579440"/>
-          </a:xfrm>
-          <a:prstGeom prst="rect">
-            <a:avLst/>
-          </a:prstGeom>
-          <a:gradFill>
-            <a:gsLst>
-              <a:gs pos="8000">
-                <a:srgbClr val="000000"/>
-              </a:gs>
-              <a:gs pos="100000">
-                <a:schemeClr val="accent1">
-                  <a:lumMod val="75000"/>
-                </a:schemeClr>
-              </a:gs>
-            </a:gsLst>
-            <a:lin ang="3000000" scaled="0"/>
-          </a:gradFill>
-          <a:ln>
-            <a:noFill/>
-          </a:ln>
-        </p:spPr>
-        <p:style>
-          <a:lnRef idx="2">
-            <a:schemeClr val="accent1">
-              <a:shade val="50000"/>
-            </a:schemeClr>
-          </a:lnRef>
-          <a:fillRef idx="1">
-            <a:schemeClr val="accent1"/>
-          </a:fillRef>
-          <a:effectRef idx="0">
-            <a:schemeClr val="accent1"/>
-          </a:effectRef>
-          <a:fontRef idx="minor">
-            <a:schemeClr val="lt1"/>
-          </a:fontRef>
-        </p:style>
-        <p:txBody>
-          <a:bodyPr rtlCol="0" anchor="ctr"/>
-          <a:lstStyle/>
-          <a:p>
-            <a:pPr algn="ctr"/>
-            <a:endParaRPr lang="en-US"/>
-          </a:p>
-        </p:txBody>
-      </p:sp>
-      <p:sp>
-        <p:nvSpPr>
-          <p:cNvPr id="12" name="Rectangle 11">
-            <a:extLst>
-              <a:ext uri="{FF2B5EF4-FFF2-40B4-BE49-F238E27FC236}">
-                <a16:creationId xmlns:a16="http://schemas.microsoft.com/office/drawing/2014/main" id="{86909FA0-B515-4681-B7A8-FA281D133B94}"/>
-              </a:ext>
-              <a:ext uri="{C183D7F6-B498-43B3-948B-1728B52AA6E4}">
-                <adec:decorative xmlns:adec="http://schemas.microsoft.com/office/drawing/2017/decorative" val="1"/>
-              </a:ext>
-            </a:extLst>
-          </p:cNvPr>
-          <p:cNvSpPr>
-            <a:spLocks noGrp="1" noRot="1" noChangeAspect="1" noMove="1" noResize="1" noEditPoints="1" noAdjustHandles="1" noChangeArrowheads="1" noChangeShapeType="1" noTextEdit="1"/>
-          </p:cNvSpPr>
-          <p:nvPr>
-            <p:extLst>
-              <p:ext uri="{386F3935-93C4-4BCD-93E2-E3B085C9AB24}">
-                <p16:designElem xmlns:p16="http://schemas.microsoft.com/office/powerpoint/2015/main" val="1"/>
-              </p:ext>
-            </p:extLst>
-          </p:nvPr>
-        </p:nvSpPr>
-        <p:spPr>
-          <a:xfrm rot="5400000" flipH="1">
-            <a:off x="-393206" y="395206"/>
-            <a:ext cx="6346209" cy="5576080"/>
-          </a:xfrm>
-          <a:prstGeom prst="rect">
-            <a:avLst/>
-          </a:prstGeom>
-          <a:gradFill>
-            <a:gsLst>
-              <a:gs pos="0">
-                <a:srgbClr val="000000">
-                  <a:alpha val="0"/>
-                </a:srgbClr>
-              </a:gs>
-              <a:gs pos="99000">
-                <a:schemeClr val="accent1">
-                  <a:alpha val="0"/>
-                </a:schemeClr>
-              </a:gs>
-            </a:gsLst>
-            <a:lin ang="1800000" scaled="0"/>
-          </a:gradFill>
-          <a:ln>
-            <a:noFill/>
-          </a:ln>
-        </p:spPr>
-        <p:style>
-          <a:lnRef idx="2">
-            <a:schemeClr val="accent1">
-              <a:shade val="50000"/>
-            </a:schemeClr>
-          </a:lnRef>
-          <a:fillRef idx="1">
-            <a:schemeClr val="accent1"/>
-          </a:fillRef>
-          <a:effectRef idx="0">
-            <a:schemeClr val="accent1"/>
-          </a:effectRef>
-          <a:fontRef idx="minor">
-            <a:schemeClr val="lt1"/>
-          </a:fontRef>
-        </p:style>
-        <p:txBody>
-          <a:bodyPr rtlCol="0" anchor="ctr"/>
-          <a:lstStyle/>
-          <a:p>
-            <a:pPr algn="ctr"/>
-            <a:endParaRPr lang="en-US"/>
-          </a:p>
-        </p:txBody>
-      </p:sp>
-      <p:sp>
-        <p:nvSpPr>
-          <p:cNvPr id="14" name="Rectangle 13">
-            <a:extLst>
-              <a:ext uri="{FF2B5EF4-FFF2-40B4-BE49-F238E27FC236}">
-                <a16:creationId xmlns:a16="http://schemas.microsoft.com/office/drawing/2014/main" id="{21C9FE86-FCC3-4A31-AA1C-C882262B7FE7}"/>
-              </a:ext>
-              <a:ext uri="{C183D7F6-B498-43B3-948B-1728B52AA6E4}">
-                <adec:decorative xmlns:adec="http://schemas.microsoft.com/office/drawing/2017/decorative" val="1"/>
-              </a:ext>
-            </a:extLst>
-          </p:cNvPr>
-          <p:cNvSpPr>
-            <a:spLocks noGrp="1" noRot="1" noChangeAspect="1" noMove="1" noResize="1" noEditPoints="1" noAdjustHandles="1" noChangeArrowheads="1" noChangeShapeType="1" noTextEdit="1"/>
-          </p:cNvSpPr>
-          <p:nvPr>
-            <p:extLst>
-              <p:ext uri="{386F3935-93C4-4BCD-93E2-E3B085C9AB24}">
-                <p16:designElem xmlns:p16="http://schemas.microsoft.com/office/powerpoint/2015/main" val="1"/>
-              </p:ext>
-            </p:extLst>
-          </p:nvPr>
-        </p:nvSpPr>
-        <p:spPr>
-          <a:xfrm rot="5400000" flipH="1">
-            <a:off x="1528907" y="2818967"/>
-            <a:ext cx="2501979" cy="5576080"/>
-          </a:xfrm>
-          <a:prstGeom prst="rect">
-            <a:avLst/>
-          </a:prstGeom>
-          <a:gradFill>
-            <a:gsLst>
-              <a:gs pos="2000">
-                <a:schemeClr val="accent1">
-                  <a:alpha val="29000"/>
-                </a:schemeClr>
-              </a:gs>
-              <a:gs pos="100000">
-                <a:srgbClr val="000000">
-                  <a:alpha val="30000"/>
-                </a:srgbClr>
-              </a:gs>
-            </a:gsLst>
-            <a:lin ang="7800000" scaled="0"/>
-          </a:gradFill>
-          <a:ln>
-            <a:noFill/>
-          </a:ln>
-        </p:spPr>
-        <p:style>
-          <a:lnRef idx="2">
-            <a:schemeClr val="accent1">
-              <a:shade val="50000"/>
-            </a:schemeClr>
-          </a:lnRef>
-          <a:fillRef idx="1">
-            <a:schemeClr val="accent1"/>
-          </a:fillRef>
-          <a:effectRef idx="0">
-            <a:schemeClr val="accent1"/>
-          </a:effectRef>
-          <a:fontRef idx="minor">
-            <a:schemeClr val="lt1"/>
-          </a:fontRef>
-        </p:style>
-        <p:txBody>
-          <a:bodyPr rtlCol="0" anchor="ctr"/>
-          <a:lstStyle/>
-          <a:p>
-            <a:pPr algn="ctr"/>
-            <a:endParaRPr lang="en-US"/>
-          </a:p>
-        </p:txBody>
-      </p:sp>
-      <p:sp>
-        <p:nvSpPr>
-          <p:cNvPr id="16" name="Rectangle 15">
-            <a:extLst>
-              <a:ext uri="{FF2B5EF4-FFF2-40B4-BE49-F238E27FC236}">
-                <a16:creationId xmlns:a16="http://schemas.microsoft.com/office/drawing/2014/main" id="{7D96243B-ECED-4B71-8E06-AE9A285EAD20}"/>
-              </a:ext>
-              <a:ext uri="{C183D7F6-B498-43B3-948B-1728B52AA6E4}">
-                <adec:decorative xmlns:adec="http://schemas.microsoft.com/office/drawing/2017/decorative" val="1"/>
-              </a:ext>
-            </a:extLst>
-          </p:cNvPr>
-          <p:cNvSpPr>
-            <a:spLocks noGrp="1" noRot="1" noChangeAspect="1" noMove="1" noResize="1" noEditPoints="1" noAdjustHandles="1" noChangeArrowheads="1" noChangeShapeType="1" noTextEdit="1"/>
-          </p:cNvSpPr>
-          <p:nvPr>
-            <p:extLst>
-              <p:ext uri="{386F3935-93C4-4BCD-93E2-E3B085C9AB24}">
-                <p16:designElem xmlns:p16="http://schemas.microsoft.com/office/powerpoint/2015/main" val="1"/>
-              </p:ext>
-            </p:extLst>
-          </p:nvPr>
-        </p:nvSpPr>
-        <p:spPr>
-          <a:xfrm rot="5400000" flipH="1">
-            <a:off x="-425002" y="852793"/>
-            <a:ext cx="6858001" cy="5152412"/>
-          </a:xfrm>
-          <a:prstGeom prst="rect">
-            <a:avLst/>
-          </a:prstGeom>
-          <a:gradFill>
-            <a:gsLst>
-              <a:gs pos="0">
-                <a:srgbClr val="000000">
-                  <a:alpha val="0"/>
-                </a:srgbClr>
-              </a:gs>
-              <a:gs pos="99000">
-                <a:schemeClr val="accent1">
-                  <a:alpha val="11000"/>
-                </a:schemeClr>
-              </a:gs>
-            </a:gsLst>
-            <a:lin ang="7800000" scaled="0"/>
-          </a:gradFill>
-          <a:ln>
-            <a:noFill/>
-          </a:ln>
-        </p:spPr>
-        <p:style>
-          <a:lnRef idx="2">
-            <a:schemeClr val="accent1">
-              <a:shade val="50000"/>
-            </a:schemeClr>
-          </a:lnRef>
-          <a:fillRef idx="1">
-            <a:schemeClr val="accent1"/>
-          </a:fillRef>
-          <a:effectRef idx="0">
-            <a:schemeClr val="accent1"/>
-          </a:effectRef>
-          <a:fontRef idx="minor">
-            <a:schemeClr val="lt1"/>
-          </a:fontRef>
-        </p:style>
-        <p:txBody>
-          <a:bodyPr rtlCol="0" anchor="ctr"/>
-          <a:lstStyle/>
-          <a:p>
-            <a:pPr algn="ctr"/>
-            <a:endParaRPr lang="en-US"/>
-          </a:p>
-        </p:txBody>
-      </p:sp>
-      <p:sp>
-        <p:nvSpPr>
-          <p:cNvPr id="18" name="Oval 17">
-            <a:extLst>
-              <a:ext uri="{FF2B5EF4-FFF2-40B4-BE49-F238E27FC236}">
-                <a16:creationId xmlns:a16="http://schemas.microsoft.com/office/drawing/2014/main" id="{A09989E4-EFDC-4A90-A633-E0525FB4139E}"/>
-              </a:ext>
-              <a:ext uri="{C183D7F6-B498-43B3-948B-1728B52AA6E4}">
-                <adec:decorative xmlns:adec="http://schemas.microsoft.com/office/drawing/2017/decorative" val="1"/>
-              </a:ext>
-            </a:extLst>
-          </p:cNvPr>
-          <p:cNvSpPr>
-            <a:spLocks noGrp="1" noRot="1" noChangeAspect="1" noMove="1" noResize="1" noEditPoints="1" noAdjustHandles="1" noChangeArrowheads="1" noChangeShapeType="1" noTextEdit="1"/>
-          </p:cNvSpPr>
-          <p:nvPr>
-            <p:extLst>
-              <p:ext uri="{386F3935-93C4-4BCD-93E2-E3B085C9AB24}">
-                <p16:designElem xmlns:p16="http://schemas.microsoft.com/office/powerpoint/2015/main" val="1"/>
-              </p:ext>
-            </p:extLst>
-          </p:nvPr>
-        </p:nvSpPr>
-        <p:spPr>
-          <a:xfrm rot="6097846">
-            <a:off x="818753" y="1128497"/>
-            <a:ext cx="4318303" cy="4318303"/>
-          </a:xfrm>
-          <a:prstGeom prst="ellipse">
-            <a:avLst/>
-          </a:prstGeom>
-          <a:gradFill>
-            <a:gsLst>
-              <a:gs pos="39000">
-                <a:schemeClr val="accent1">
-                  <a:alpha val="0"/>
-                </a:schemeClr>
-              </a:gs>
-              <a:gs pos="100000">
-                <a:schemeClr val="accent1">
-                  <a:lumMod val="60000"/>
-                  <a:lumOff val="40000"/>
-                  <a:alpha val="15000"/>
-                </a:schemeClr>
-              </a:gs>
-            </a:gsLst>
-            <a:lin ang="17400000" scaled="0"/>
-          </a:gradFill>
-          <a:ln>
-            <a:noFill/>
-          </a:ln>
-        </p:spPr>
-        <p:style>
-          <a:lnRef idx="2">
-            <a:schemeClr val="accent1">
-              <a:shade val="50000"/>
-            </a:schemeClr>
-          </a:lnRef>
-          <a:fillRef idx="1">
-            <a:schemeClr val="accent1"/>
-          </a:fillRef>
-          <a:effectRef idx="0">
-            <a:schemeClr val="accent1"/>
-          </a:effectRef>
-          <a:fontRef idx="minor">
-            <a:schemeClr val="lt1"/>
-          </a:fontRef>
-        </p:style>
-        <p:txBody>
-          <a:bodyPr rtlCol="0" anchor="ctr"/>
-          <a:lstStyle/>
-          <a:p>
-            <a:pPr algn="ctr"/>
-            <a:endParaRPr lang="en-US"/>
-          </a:p>
-        </p:txBody>
-      </p:sp>
-      <p:sp>
-        <p:nvSpPr>
-          <p:cNvPr id="2" name="Title 1">
-            <a:extLst>
-              <a:ext uri="{FF2B5EF4-FFF2-40B4-BE49-F238E27FC236}">
-                <a16:creationId xmlns:a16="http://schemas.microsoft.com/office/drawing/2014/main" id="{19B99161-CF3F-3482-840E-53756302768D}"/>
-              </a:ext>
-            </a:extLst>
-          </p:cNvPr>
-          <p:cNvSpPr>
-            <a:spLocks noGrp="1"/>
-          </p:cNvSpPr>
-          <p:nvPr>
-            <p:ph type="title"/>
-          </p:nvPr>
-        </p:nvSpPr>
-        <p:spPr>
-          <a:xfrm>
-            <a:off x="826396" y="586855"/>
-            <a:ext cx="4230100" cy="3387497"/>
-          </a:xfrm>
-        </p:spPr>
-        <p:txBody>
-          <a:bodyPr anchor="b">
-            <a:normAutofit/>
-          </a:bodyPr>
-          <a:lstStyle/>
-          <a:p>
-            <a:pPr algn="r"/>
-            <a:r>
-              <a:rPr lang="en-US" sz="4000">
-                <a:solidFill>
-                  <a:srgbClr val="FFFFFF"/>
-                </a:solidFill>
-              </a:rPr>
-              <a:t>What we plan to change next sprint</a:t>
-            </a:r>
-          </a:p>
-        </p:txBody>
-      </p:sp>
-      <p:sp>
-        <p:nvSpPr>
-          <p:cNvPr id="3" name="Content Placeholder 2">
-            <a:extLst>
-              <a:ext uri="{FF2B5EF4-FFF2-40B4-BE49-F238E27FC236}">
-                <a16:creationId xmlns:a16="http://schemas.microsoft.com/office/drawing/2014/main" id="{9C21ADEC-A271-6C08-CE13-326274AD1660}"/>
-              </a:ext>
-            </a:extLst>
-          </p:cNvPr>
-          <p:cNvSpPr>
-            <a:spLocks noGrp="1"/>
-          </p:cNvSpPr>
-          <p:nvPr>
-            <p:ph idx="1"/>
-          </p:nvPr>
-        </p:nvSpPr>
-        <p:spPr>
-          <a:xfrm>
-            <a:off x="6503158" y="649480"/>
-            <a:ext cx="4862447" cy="5546047"/>
-          </a:xfrm>
-        </p:spPr>
-        <p:txBody>
-          <a:bodyPr anchor="ctr">
-            <a:normAutofit/>
-          </a:bodyPr>
-          <a:lstStyle/>
-          <a:p>
-            <a:r>
-              <a:rPr lang="en-US" sz="2000" dirty="0"/>
-              <a:t>Migrate to Project </a:t>
-            </a:r>
-            <a:r>
-              <a:rPr lang="en-US" sz="2000" dirty="0" err="1"/>
-              <a:t>AirSim</a:t>
-            </a:r>
-            <a:endParaRPr lang="en-US" sz="2000" dirty="0"/>
-          </a:p>
-          <a:p>
-            <a:pPr lvl="1">
-              <a:buFont typeface="Courier New" panose="020B0604020202020204" pitchFamily="34" charset="0"/>
-              <a:buChar char="o"/>
-            </a:pPr>
-            <a:r>
-              <a:rPr lang="en-US" sz="1600" dirty="0"/>
-              <a:t>The Successor to Microsoft </a:t>
-            </a:r>
-            <a:r>
-              <a:rPr lang="en-US" sz="1600" dirty="0" err="1"/>
-              <a:t>Airsim</a:t>
-            </a:r>
-            <a:r>
-              <a:rPr lang="en-US" sz="1600" dirty="0"/>
-              <a:t> Managed by IAMAI.</a:t>
-            </a:r>
-          </a:p>
-          <a:p>
-            <a:pPr marL="457200" lvl="1" indent="0">
-              <a:buNone/>
-            </a:pPr>
-            <a:r>
-              <a:rPr lang="en-US" sz="1600" dirty="0"/>
-              <a:t>That’s pretty much it!!</a:t>
-            </a:r>
-            <a:endParaRPr lang="en-US" sz="2000" dirty="0"/>
-          </a:p>
-          <a:p>
-            <a:pPr marL="914400" lvl="2" indent="0">
-              <a:buNone/>
-            </a:pPr>
-            <a:endParaRPr lang="en-US" sz="1200" dirty="0"/>
-          </a:p>
-        </p:txBody>
-      </p:sp>
-    </p:spTree>
-    <p:extLst>
-      <p:ext uri="{BB962C8B-B14F-4D97-AF65-F5344CB8AC3E}">
-        <p14:creationId xmlns:p14="http://schemas.microsoft.com/office/powerpoint/2010/main" val="1048493380"/>
       </p:ext>
     </p:extLst>
   </p:cSld>
@@ -11802,4 +13662,319 @@
     </a:ext>
   </a:extLst>
 </a:theme>
+</file>
+
+<file path=ppt/theme/theme2.xml><?xml version="1.0" encoding="utf-8"?>
+<a:theme xmlns:a="http://schemas.openxmlformats.org/drawingml/2006/main" name="Office Theme">
+  <a:themeElements>
+    <a:clrScheme name="Office">
+      <a:dk1>
+        <a:sysClr val="windowText" lastClr="000000"/>
+      </a:dk1>
+      <a:lt1>
+        <a:sysClr val="window" lastClr="FFFFFF"/>
+      </a:lt1>
+      <a:dk2>
+        <a:srgbClr val="0E2841"/>
+      </a:dk2>
+      <a:lt2>
+        <a:srgbClr val="E8E8E8"/>
+      </a:lt2>
+      <a:accent1>
+        <a:srgbClr val="156082"/>
+      </a:accent1>
+      <a:accent2>
+        <a:srgbClr val="E97132"/>
+      </a:accent2>
+      <a:accent3>
+        <a:srgbClr val="196B24"/>
+      </a:accent3>
+      <a:accent4>
+        <a:srgbClr val="0F9ED5"/>
+      </a:accent4>
+      <a:accent5>
+        <a:srgbClr val="A02B93"/>
+      </a:accent5>
+      <a:accent6>
+        <a:srgbClr val="4EA72E"/>
+      </a:accent6>
+      <a:hlink>
+        <a:srgbClr val="467886"/>
+      </a:hlink>
+      <a:folHlink>
+        <a:srgbClr val="96607D"/>
+      </a:folHlink>
+    </a:clrScheme>
+    <a:fontScheme name="Office">
+      <a:majorFont>
+        <a:latin typeface="Aptos Display" panose="02110004020202020204"/>
+        <a:ea typeface=""/>
+        <a:cs typeface=""/>
+        <a:font script="Jpan" typeface="游ゴシック Light"/>
+        <a:font script="Hang" typeface="맑은 고딕"/>
+        <a:font script="Hans" typeface="等线 Light"/>
+        <a:font script="Hant" typeface="新細明體"/>
+        <a:font script="Arab" typeface="Times New Roman"/>
+        <a:font script="Hebr" typeface="Times New Roman"/>
+        <a:font script="Thai" typeface="Angsana New"/>
+        <a:font script="Ethi" typeface="Nyala"/>
+        <a:font script="Beng" typeface="Vrinda"/>
+        <a:font script="Gujr" typeface="Shruti"/>
+        <a:font script="Khmr" typeface="MoolBoran"/>
+        <a:font script="Knda" typeface="Tunga"/>
+        <a:font script="Guru" typeface="Raavi"/>
+        <a:font script="Cans" typeface="Euphemia"/>
+        <a:font script="Cher" typeface="Plantagenet Cherokee"/>
+        <a:font script="Yiii" typeface="Microsoft Yi Baiti"/>
+        <a:font script="Tibt" typeface="Microsoft Himalaya"/>
+        <a:font script="Thaa" typeface="MV Boli"/>
+        <a:font script="Deva" typeface="Mangal"/>
+        <a:font script="Telu" typeface="Gautami"/>
+        <a:font script="Taml" typeface="Latha"/>
+        <a:font script="Syrc" typeface="Estrangelo Edessa"/>
+        <a:font script="Orya" typeface="Kalinga"/>
+        <a:font script="Mlym" typeface="Kartika"/>
+        <a:font script="Laoo" typeface="DokChampa"/>
+        <a:font script="Sinh" typeface="Iskoola Pota"/>
+        <a:font script="Mong" typeface="Mongolian Baiti"/>
+        <a:font script="Viet" typeface="Times New Roman"/>
+        <a:font script="Uigh" typeface="Microsoft Uighur"/>
+        <a:font script="Geor" typeface="Sylfaen"/>
+        <a:font script="Armn" typeface="Arial"/>
+        <a:font script="Bugi" typeface="Leelawadee UI"/>
+        <a:font script="Bopo" typeface="Microsoft JhengHei"/>
+        <a:font script="Java" typeface="Javanese Text"/>
+        <a:font script="Lisu" typeface="Segoe UI"/>
+        <a:font script="Mymr" typeface="Myanmar Text"/>
+        <a:font script="Nkoo" typeface="Ebrima"/>
+        <a:font script="Olck" typeface="Nirmala UI"/>
+        <a:font script="Osma" typeface="Ebrima"/>
+        <a:font script="Phag" typeface="Phagspa"/>
+        <a:font script="Syrn" typeface="Estrangelo Edessa"/>
+        <a:font script="Syrj" typeface="Estrangelo Edessa"/>
+        <a:font script="Syre" typeface="Estrangelo Edessa"/>
+        <a:font script="Sora" typeface="Nirmala UI"/>
+        <a:font script="Tale" typeface="Microsoft Tai Le"/>
+        <a:font script="Talu" typeface="Microsoft New Tai Lue"/>
+        <a:font script="Tfng" typeface="Ebrima"/>
+      </a:majorFont>
+      <a:minorFont>
+        <a:latin typeface="Aptos" panose="02110004020202020204"/>
+        <a:ea typeface=""/>
+        <a:cs typeface=""/>
+        <a:font script="Jpan" typeface="游ゴシック"/>
+        <a:font script="Hang" typeface="맑은 고딕"/>
+        <a:font script="Hans" typeface="等线"/>
+        <a:font script="Hant" typeface="新細明體"/>
+        <a:font script="Arab" typeface="Arial"/>
+        <a:font script="Hebr" typeface="Arial"/>
+        <a:font script="Thai" typeface="Cordia New"/>
+        <a:font script="Ethi" typeface="Nyala"/>
+        <a:font script="Beng" typeface="Vrinda"/>
+        <a:font script="Gujr" typeface="Shruti"/>
+        <a:font script="Khmr" typeface="DaunPenh"/>
+        <a:font script="Knda" typeface="Tunga"/>
+        <a:font script="Guru" typeface="Raavi"/>
+        <a:font script="Cans" typeface="Euphemia"/>
+        <a:font script="Cher" typeface="Plantagenet Cherokee"/>
+        <a:font script="Yiii" typeface="Microsoft Yi Baiti"/>
+        <a:font script="Tibt" typeface="Microsoft Himalaya"/>
+        <a:font script="Thaa" typeface="MV Boli"/>
+        <a:font script="Deva" typeface="Mangal"/>
+        <a:font script="Telu" typeface="Gautami"/>
+        <a:font script="Taml" typeface="Latha"/>
+        <a:font script="Syrc" typeface="Estrangelo Edessa"/>
+        <a:font script="Orya" typeface="Kalinga"/>
+        <a:font script="Mlym" typeface="Kartika"/>
+        <a:font script="Laoo" typeface="DokChampa"/>
+        <a:font script="Sinh" typeface="Iskoola Pota"/>
+        <a:font script="Mong" typeface="Mongolian Baiti"/>
+        <a:font script="Viet" typeface="Arial"/>
+        <a:font script="Uigh" typeface="Microsoft Uighur"/>
+        <a:font script="Geor" typeface="Sylfaen"/>
+        <a:font script="Armn" typeface="Arial"/>
+        <a:font script="Bugi" typeface="Leelawadee UI"/>
+        <a:font script="Bopo" typeface="Microsoft JhengHei"/>
+        <a:font script="Java" typeface="Javanese Text"/>
+        <a:font script="Lisu" typeface="Segoe UI"/>
+        <a:font script="Mymr" typeface="Myanmar Text"/>
+        <a:font script="Nkoo" typeface="Ebrima"/>
+        <a:font script="Olck" typeface="Nirmala UI"/>
+        <a:font script="Osma" typeface="Ebrima"/>
+        <a:font script="Phag" typeface="Phagspa"/>
+        <a:font script="Syrn" typeface="Estrangelo Edessa"/>
+        <a:font script="Syrj" typeface="Estrangelo Edessa"/>
+        <a:font script="Syre" typeface="Estrangelo Edessa"/>
+        <a:font script="Sora" typeface="Nirmala UI"/>
+        <a:font script="Tale" typeface="Microsoft Tai Le"/>
+        <a:font script="Talu" typeface="Microsoft New Tai Lue"/>
+        <a:font script="Tfng" typeface="Ebrima"/>
+      </a:minorFont>
+    </a:fontScheme>
+    <a:fmtScheme name="Office">
+      <a:fillStyleLst>
+        <a:solidFill>
+          <a:schemeClr val="phClr"/>
+        </a:solidFill>
+        <a:gradFill rotWithShape="1">
+          <a:gsLst>
+            <a:gs pos="0">
+              <a:schemeClr val="phClr">
+                <a:lumMod val="110000"/>
+                <a:satMod val="105000"/>
+                <a:tint val="67000"/>
+              </a:schemeClr>
+            </a:gs>
+            <a:gs pos="50000">
+              <a:schemeClr val="phClr">
+                <a:lumMod val="105000"/>
+                <a:satMod val="103000"/>
+                <a:tint val="73000"/>
+              </a:schemeClr>
+            </a:gs>
+            <a:gs pos="100000">
+              <a:schemeClr val="phClr">
+                <a:lumMod val="105000"/>
+                <a:satMod val="109000"/>
+                <a:tint val="81000"/>
+              </a:schemeClr>
+            </a:gs>
+          </a:gsLst>
+          <a:lin ang="5400000" scaled="0"/>
+        </a:gradFill>
+        <a:gradFill rotWithShape="1">
+          <a:gsLst>
+            <a:gs pos="0">
+              <a:schemeClr val="phClr">
+                <a:satMod val="103000"/>
+                <a:lumMod val="102000"/>
+                <a:tint val="94000"/>
+              </a:schemeClr>
+            </a:gs>
+            <a:gs pos="50000">
+              <a:schemeClr val="phClr">
+                <a:satMod val="110000"/>
+                <a:lumMod val="100000"/>
+                <a:shade val="100000"/>
+              </a:schemeClr>
+            </a:gs>
+            <a:gs pos="100000">
+              <a:schemeClr val="phClr">
+                <a:lumMod val="99000"/>
+                <a:satMod val="120000"/>
+                <a:shade val="78000"/>
+              </a:schemeClr>
+            </a:gs>
+          </a:gsLst>
+          <a:lin ang="5400000" scaled="0"/>
+        </a:gradFill>
+      </a:fillStyleLst>
+      <a:lnStyleLst>
+        <a:ln w="12700" cap="flat" cmpd="sng" algn="ctr">
+          <a:solidFill>
+            <a:schemeClr val="phClr"/>
+          </a:solidFill>
+          <a:prstDash val="solid"/>
+          <a:miter lim="800000"/>
+        </a:ln>
+        <a:ln w="19050" cap="flat" cmpd="sng" algn="ctr">
+          <a:solidFill>
+            <a:schemeClr val="phClr"/>
+          </a:solidFill>
+          <a:prstDash val="solid"/>
+          <a:miter lim="800000"/>
+        </a:ln>
+        <a:ln w="25400" cap="flat" cmpd="sng" algn="ctr">
+          <a:solidFill>
+            <a:schemeClr val="phClr"/>
+          </a:solidFill>
+          <a:prstDash val="solid"/>
+          <a:miter lim="800000"/>
+        </a:ln>
+      </a:lnStyleLst>
+      <a:effectStyleLst>
+        <a:effectStyle>
+          <a:effectLst/>
+        </a:effectStyle>
+        <a:effectStyle>
+          <a:effectLst/>
+        </a:effectStyle>
+        <a:effectStyle>
+          <a:effectLst>
+            <a:outerShdw blurRad="57150" dist="19050" dir="5400000" algn="ctr" rotWithShape="0">
+              <a:srgbClr val="000000">
+                <a:alpha val="63000"/>
+              </a:srgbClr>
+            </a:outerShdw>
+          </a:effectLst>
+        </a:effectStyle>
+      </a:effectStyleLst>
+      <a:bgFillStyleLst>
+        <a:solidFill>
+          <a:schemeClr val="phClr"/>
+        </a:solidFill>
+        <a:solidFill>
+          <a:schemeClr val="phClr">
+            <a:tint val="95000"/>
+            <a:satMod val="170000"/>
+          </a:schemeClr>
+        </a:solidFill>
+        <a:gradFill rotWithShape="1">
+          <a:gsLst>
+            <a:gs pos="0">
+              <a:schemeClr val="phClr">
+                <a:tint val="93000"/>
+                <a:satMod val="150000"/>
+                <a:shade val="98000"/>
+                <a:lumMod val="102000"/>
+              </a:schemeClr>
+            </a:gs>
+            <a:gs pos="50000">
+              <a:schemeClr val="phClr">
+                <a:tint val="98000"/>
+                <a:satMod val="130000"/>
+                <a:shade val="90000"/>
+                <a:lumMod val="103000"/>
+              </a:schemeClr>
+            </a:gs>
+            <a:gs pos="100000">
+              <a:schemeClr val="phClr">
+                <a:shade val="63000"/>
+                <a:satMod val="120000"/>
+              </a:schemeClr>
+            </a:gs>
+          </a:gsLst>
+          <a:lin ang="5400000" scaled="0"/>
+        </a:gradFill>
+      </a:bgFillStyleLst>
+    </a:fmtScheme>
+  </a:themeElements>
+  <a:objectDefaults>
+    <a:lnDef>
+      <a:spPr/>
+      <a:bodyPr/>
+      <a:lstStyle/>
+      <a:style>
+        <a:lnRef idx="2">
+          <a:schemeClr val="accent1"/>
+        </a:lnRef>
+        <a:fillRef idx="0">
+          <a:schemeClr val="accent1"/>
+        </a:fillRef>
+        <a:effectRef idx="1">
+          <a:schemeClr val="accent1"/>
+        </a:effectRef>
+        <a:fontRef idx="minor">
+          <a:schemeClr val="tx1"/>
+        </a:fontRef>
+      </a:style>
+    </a:lnDef>
+  </a:objectDefaults>
+  <a:extraClrSchemeLst/>
+  <a:extLst>
+    <a:ext uri="{05A4C25C-085E-4340-85A3-A5531E510DB2}">
+      <thm15:themeFamily xmlns:thm15="http://schemas.microsoft.com/office/thememl/2012/main" name="Office Theme" id="{2E142A2C-CD16-42D6-873A-C26D2A0506FA}" vid="{1BDDFF52-6CD6-40A5-AB3C-68EB2F1E4D0A}"/>
+    </a:ext>
+  </a:extLst>
+</a:theme>
 </file>